--- a/LabBook_3.pptx
+++ b/LabBook_3.pptx
@@ -5,19 +5,22 @@
     <p:sldMasterId id="2147483648" r:id="rId1"/>
   </p:sldMasterIdLst>
   <p:notesMasterIdLst>
-    <p:notesMasterId r:id="rId9"/>
+    <p:notesMasterId r:id="rId12"/>
   </p:notesMasterIdLst>
   <p:handoutMasterIdLst>
-    <p:handoutMasterId r:id="rId10"/>
+    <p:handoutMasterId r:id="rId13"/>
   </p:handoutMasterIdLst>
   <p:sldIdLst>
     <p:sldId id="256" r:id="rId2"/>
     <p:sldId id="289" r:id="rId3"/>
     <p:sldId id="290" r:id="rId4"/>
-    <p:sldId id="295" r:id="rId5"/>
-    <p:sldId id="296" r:id="rId6"/>
-    <p:sldId id="293" r:id="rId7"/>
-    <p:sldId id="288" r:id="rId8"/>
+    <p:sldId id="297" r:id="rId5"/>
+    <p:sldId id="298" r:id="rId6"/>
+    <p:sldId id="299" r:id="rId7"/>
+    <p:sldId id="295" r:id="rId8"/>
+    <p:sldId id="296" r:id="rId9"/>
+    <p:sldId id="293" r:id="rId10"/>
+    <p:sldId id="288" r:id="rId11"/>
   </p:sldIdLst>
   <p:sldSz cx="12192000" cy="6858000"/>
   <p:notesSz cx="12192000" cy="6858000"/>
@@ -232,7 +235,7 @@
           <a:p>
             <a:fld id="{8438F8DC-35B0-48E6-A86E-42F1F08DD00F}" type="datetimeFigureOut">
               <a:rPr lang="es-ES" smtClean="0"/>
-              <a:t>02/03/2026</a:t>
+              <a:t>23/03/2026</a:t>
             </a:fld>
             <a:endParaRPr lang="es-ES"/>
           </a:p>
@@ -310,7 +313,7 @@
           <a:p>
             <a:fld id="{4116A549-763A-4A89-A454-A94BAF51395E}" type="slidenum">
               <a:rPr lang="es-ES" smtClean="0"/>
-              <a:t>‹Nº›</a:t>
+              <a:t>‹#›</a:t>
             </a:fld>
             <a:endParaRPr lang="es-ES"/>
           </a:p>
@@ -409,7 +412,7 @@
           <a:p>
             <a:fld id="{FACBDC12-F39B-4B97-8F4D-6734F9D366FF}" type="datetimeFigureOut">
               <a:rPr lang="es-ES" smtClean="0"/>
-              <a:t>02/03/2026</a:t>
+              <a:t>23/03/2026</a:t>
             </a:fld>
             <a:endParaRPr lang="es-ES"/>
           </a:p>
@@ -567,7 +570,7 @@
           <a:p>
             <a:fld id="{676223B9-C868-4436-87D9-1A3152E1157A}" type="slidenum">
               <a:rPr lang="es-ES" smtClean="0"/>
-              <a:t>‹Nº›</a:t>
+              <a:t>‹#›</a:t>
             </a:fld>
             <a:endParaRPr lang="es-ES"/>
           </a:p>
@@ -768,6 +771,330 @@
         <p:cNvPr id="1" name="">
           <a:extLst>
             <a:ext uri="{FF2B5EF4-FFF2-40B4-BE49-F238E27FC236}">
+              <a16:creationId xmlns:a16="http://schemas.microsoft.com/office/drawing/2014/main" id="{7A69AA65-166B-474B-A6C9-9858D86A9448}"/>
+            </a:ext>
+          </a:extLst>
+        </p:cNvPr>
+        <p:cNvGrpSpPr/>
+        <p:nvPr/>
+      </p:nvGrpSpPr>
+      <p:grpSpPr>
+        <a:xfrm>
+          <a:off x="0" y="0"/>
+          <a:ext cx="0" cy="0"/>
+          <a:chOff x="0" y="0"/>
+          <a:chExt cx="0" cy="0"/>
+        </a:xfrm>
+      </p:grpSpPr>
+      <p:sp>
+        <p:nvSpPr>
+          <p:cNvPr id="2" name="Marcador de imagen de diapositiva 1">
+            <a:extLst>
+              <a:ext uri="{FF2B5EF4-FFF2-40B4-BE49-F238E27FC236}">
+                <a16:creationId xmlns:a16="http://schemas.microsoft.com/office/drawing/2014/main" id="{38158223-A8BA-05F6-464C-EC03A9FB8C56}"/>
+              </a:ext>
+            </a:extLst>
+          </p:cNvPr>
+          <p:cNvSpPr>
+            <a:spLocks noGrp="1" noRot="1" noChangeAspect="1"/>
+          </p:cNvSpPr>
+          <p:nvPr>
+            <p:ph type="sldImg"/>
+          </p:nvPr>
+        </p:nvSpPr>
+        <p:spPr/>
+      </p:sp>
+      <p:sp>
+        <p:nvSpPr>
+          <p:cNvPr id="3" name="Marcador de notas 2">
+            <a:extLst>
+              <a:ext uri="{FF2B5EF4-FFF2-40B4-BE49-F238E27FC236}">
+                <a16:creationId xmlns:a16="http://schemas.microsoft.com/office/drawing/2014/main" id="{F6ECB4DF-C329-8F47-9ECE-661B5B2BF9AC}"/>
+              </a:ext>
+            </a:extLst>
+          </p:cNvPr>
+          <p:cNvSpPr>
+            <a:spLocks noGrp="1"/>
+          </p:cNvSpPr>
+          <p:nvPr>
+            <p:ph type="body" idx="1"/>
+          </p:nvPr>
+        </p:nvSpPr>
+        <p:spPr/>
+        <p:txBody>
+          <a:bodyPr/>
+          <a:lstStyle/>
+          <a:p>
+            <a:endParaRPr lang="es-ES" dirty="0"/>
+          </a:p>
+        </p:txBody>
+      </p:sp>
+      <p:sp>
+        <p:nvSpPr>
+          <p:cNvPr id="4" name="Marcador de número de diapositiva 3">
+            <a:extLst>
+              <a:ext uri="{FF2B5EF4-FFF2-40B4-BE49-F238E27FC236}">
+                <a16:creationId xmlns:a16="http://schemas.microsoft.com/office/drawing/2014/main" id="{041B2276-A4E2-DFBF-0088-6997E86C9FE1}"/>
+              </a:ext>
+            </a:extLst>
+          </p:cNvPr>
+          <p:cNvSpPr>
+            <a:spLocks noGrp="1"/>
+          </p:cNvSpPr>
+          <p:nvPr>
+            <p:ph type="sldNum" sz="quarter" idx="5"/>
+          </p:nvPr>
+        </p:nvSpPr>
+        <p:spPr/>
+        <p:txBody>
+          <a:bodyPr/>
+          <a:lstStyle/>
+          <a:p>
+            <a:fld id="{676223B9-C868-4436-87D9-1A3152E1157A}" type="slidenum">
+              <a:rPr lang="es-ES" smtClean="0"/>
+              <a:t>4</a:t>
+            </a:fld>
+            <a:endParaRPr lang="es-ES"/>
+          </a:p>
+        </p:txBody>
+      </p:sp>
+    </p:spTree>
+    <p:extLst>
+      <p:ext uri="{BB962C8B-B14F-4D97-AF65-F5344CB8AC3E}">
+        <p14:creationId xmlns:p14="http://schemas.microsoft.com/office/powerpoint/2010/main" val="2362315989"/>
+      </p:ext>
+    </p:extLst>
+  </p:cSld>
+  <p:clrMapOvr>
+    <a:masterClrMapping/>
+  </p:clrMapOvr>
+</p:notes>
+</file>
+
+<file path=ppt/notesSlides/notesSlide3.xml><?xml version="1.0" encoding="utf-8"?>
+<p:notes xmlns:a="http://schemas.openxmlformats.org/drawingml/2006/main" xmlns:r="http://schemas.openxmlformats.org/officeDocument/2006/relationships" xmlns:p="http://schemas.openxmlformats.org/presentationml/2006/main">
+  <p:cSld>
+    <p:spTree>
+      <p:nvGrpSpPr>
+        <p:cNvPr id="1" name="">
+          <a:extLst>
+            <a:ext uri="{FF2B5EF4-FFF2-40B4-BE49-F238E27FC236}">
+              <a16:creationId xmlns:a16="http://schemas.microsoft.com/office/drawing/2014/main" id="{2AC4BC9F-98B2-66F1-35FF-48ED8BCB5FB0}"/>
+            </a:ext>
+          </a:extLst>
+        </p:cNvPr>
+        <p:cNvGrpSpPr/>
+        <p:nvPr/>
+      </p:nvGrpSpPr>
+      <p:grpSpPr>
+        <a:xfrm>
+          <a:off x="0" y="0"/>
+          <a:ext cx="0" cy="0"/>
+          <a:chOff x="0" y="0"/>
+          <a:chExt cx="0" cy="0"/>
+        </a:xfrm>
+      </p:grpSpPr>
+      <p:sp>
+        <p:nvSpPr>
+          <p:cNvPr id="2" name="Marcador de imagen de diapositiva 1">
+            <a:extLst>
+              <a:ext uri="{FF2B5EF4-FFF2-40B4-BE49-F238E27FC236}">
+                <a16:creationId xmlns:a16="http://schemas.microsoft.com/office/drawing/2014/main" id="{C6E480F2-257B-80E6-FA55-FC36E8E06A69}"/>
+              </a:ext>
+            </a:extLst>
+          </p:cNvPr>
+          <p:cNvSpPr>
+            <a:spLocks noGrp="1" noRot="1" noChangeAspect="1"/>
+          </p:cNvSpPr>
+          <p:nvPr>
+            <p:ph type="sldImg"/>
+          </p:nvPr>
+        </p:nvSpPr>
+        <p:spPr/>
+      </p:sp>
+      <p:sp>
+        <p:nvSpPr>
+          <p:cNvPr id="3" name="Marcador de notas 2">
+            <a:extLst>
+              <a:ext uri="{FF2B5EF4-FFF2-40B4-BE49-F238E27FC236}">
+                <a16:creationId xmlns:a16="http://schemas.microsoft.com/office/drawing/2014/main" id="{A708A38C-1345-CF91-6B73-A33866A8DCBC}"/>
+              </a:ext>
+            </a:extLst>
+          </p:cNvPr>
+          <p:cNvSpPr>
+            <a:spLocks noGrp="1"/>
+          </p:cNvSpPr>
+          <p:nvPr>
+            <p:ph type="body" idx="1"/>
+          </p:nvPr>
+        </p:nvSpPr>
+        <p:spPr/>
+        <p:txBody>
+          <a:bodyPr/>
+          <a:lstStyle/>
+          <a:p>
+            <a:endParaRPr lang="es-ES" dirty="0"/>
+          </a:p>
+        </p:txBody>
+      </p:sp>
+      <p:sp>
+        <p:nvSpPr>
+          <p:cNvPr id="4" name="Marcador de número de diapositiva 3">
+            <a:extLst>
+              <a:ext uri="{FF2B5EF4-FFF2-40B4-BE49-F238E27FC236}">
+                <a16:creationId xmlns:a16="http://schemas.microsoft.com/office/drawing/2014/main" id="{F232A2E9-E312-8DCB-8E7B-6C01DB44707A}"/>
+              </a:ext>
+            </a:extLst>
+          </p:cNvPr>
+          <p:cNvSpPr>
+            <a:spLocks noGrp="1"/>
+          </p:cNvSpPr>
+          <p:nvPr>
+            <p:ph type="sldNum" sz="quarter" idx="5"/>
+          </p:nvPr>
+        </p:nvSpPr>
+        <p:spPr/>
+        <p:txBody>
+          <a:bodyPr/>
+          <a:lstStyle/>
+          <a:p>
+            <a:fld id="{676223B9-C868-4436-87D9-1A3152E1157A}" type="slidenum">
+              <a:rPr lang="es-ES" smtClean="0"/>
+              <a:t>5</a:t>
+            </a:fld>
+            <a:endParaRPr lang="es-ES"/>
+          </a:p>
+        </p:txBody>
+      </p:sp>
+    </p:spTree>
+    <p:extLst>
+      <p:ext uri="{BB962C8B-B14F-4D97-AF65-F5344CB8AC3E}">
+        <p14:creationId xmlns:p14="http://schemas.microsoft.com/office/powerpoint/2010/main" val="1041108003"/>
+      </p:ext>
+    </p:extLst>
+  </p:cSld>
+  <p:clrMapOvr>
+    <a:masterClrMapping/>
+  </p:clrMapOvr>
+</p:notes>
+</file>
+
+<file path=ppt/notesSlides/notesSlide4.xml><?xml version="1.0" encoding="utf-8"?>
+<p:notes xmlns:a="http://schemas.openxmlformats.org/drawingml/2006/main" xmlns:r="http://schemas.openxmlformats.org/officeDocument/2006/relationships" xmlns:p="http://schemas.openxmlformats.org/presentationml/2006/main">
+  <p:cSld>
+    <p:spTree>
+      <p:nvGrpSpPr>
+        <p:cNvPr id="1" name="">
+          <a:extLst>
+            <a:ext uri="{FF2B5EF4-FFF2-40B4-BE49-F238E27FC236}">
+              <a16:creationId xmlns:a16="http://schemas.microsoft.com/office/drawing/2014/main" id="{2DE4EBA3-0213-BA7A-7435-9B22EB7D46A3}"/>
+            </a:ext>
+          </a:extLst>
+        </p:cNvPr>
+        <p:cNvGrpSpPr/>
+        <p:nvPr/>
+      </p:nvGrpSpPr>
+      <p:grpSpPr>
+        <a:xfrm>
+          <a:off x="0" y="0"/>
+          <a:ext cx="0" cy="0"/>
+          <a:chOff x="0" y="0"/>
+          <a:chExt cx="0" cy="0"/>
+        </a:xfrm>
+      </p:grpSpPr>
+      <p:sp>
+        <p:nvSpPr>
+          <p:cNvPr id="2" name="Marcador de imagen de diapositiva 1">
+            <a:extLst>
+              <a:ext uri="{FF2B5EF4-FFF2-40B4-BE49-F238E27FC236}">
+                <a16:creationId xmlns:a16="http://schemas.microsoft.com/office/drawing/2014/main" id="{231D264E-ED0C-5809-2B12-D0DB7A5F2BB5}"/>
+              </a:ext>
+            </a:extLst>
+          </p:cNvPr>
+          <p:cNvSpPr>
+            <a:spLocks noGrp="1" noRot="1" noChangeAspect="1"/>
+          </p:cNvSpPr>
+          <p:nvPr>
+            <p:ph type="sldImg"/>
+          </p:nvPr>
+        </p:nvSpPr>
+        <p:spPr/>
+      </p:sp>
+      <p:sp>
+        <p:nvSpPr>
+          <p:cNvPr id="3" name="Marcador de notas 2">
+            <a:extLst>
+              <a:ext uri="{FF2B5EF4-FFF2-40B4-BE49-F238E27FC236}">
+                <a16:creationId xmlns:a16="http://schemas.microsoft.com/office/drawing/2014/main" id="{B11F22E7-F6DD-2400-F4E8-7563A937BDE9}"/>
+              </a:ext>
+            </a:extLst>
+          </p:cNvPr>
+          <p:cNvSpPr>
+            <a:spLocks noGrp="1"/>
+          </p:cNvSpPr>
+          <p:nvPr>
+            <p:ph type="body" idx="1"/>
+          </p:nvPr>
+        </p:nvSpPr>
+        <p:spPr/>
+        <p:txBody>
+          <a:bodyPr/>
+          <a:lstStyle/>
+          <a:p>
+            <a:endParaRPr lang="es-ES" dirty="0"/>
+          </a:p>
+        </p:txBody>
+      </p:sp>
+      <p:sp>
+        <p:nvSpPr>
+          <p:cNvPr id="4" name="Marcador de número de diapositiva 3">
+            <a:extLst>
+              <a:ext uri="{FF2B5EF4-FFF2-40B4-BE49-F238E27FC236}">
+                <a16:creationId xmlns:a16="http://schemas.microsoft.com/office/drawing/2014/main" id="{D3B72082-8262-802F-7FD5-E48A61933C44}"/>
+              </a:ext>
+            </a:extLst>
+          </p:cNvPr>
+          <p:cNvSpPr>
+            <a:spLocks noGrp="1"/>
+          </p:cNvSpPr>
+          <p:nvPr>
+            <p:ph type="sldNum" sz="quarter" idx="5"/>
+          </p:nvPr>
+        </p:nvSpPr>
+        <p:spPr/>
+        <p:txBody>
+          <a:bodyPr/>
+          <a:lstStyle/>
+          <a:p>
+            <a:fld id="{676223B9-C868-4436-87D9-1A3152E1157A}" type="slidenum">
+              <a:rPr lang="es-ES" smtClean="0"/>
+              <a:t>6</a:t>
+            </a:fld>
+            <a:endParaRPr lang="es-ES"/>
+          </a:p>
+        </p:txBody>
+      </p:sp>
+    </p:spTree>
+    <p:extLst>
+      <p:ext uri="{BB962C8B-B14F-4D97-AF65-F5344CB8AC3E}">
+        <p14:creationId xmlns:p14="http://schemas.microsoft.com/office/powerpoint/2010/main" val="1290118565"/>
+      </p:ext>
+    </p:extLst>
+  </p:cSld>
+  <p:clrMapOvr>
+    <a:masterClrMapping/>
+  </p:clrMapOvr>
+</p:notes>
+</file>
+
+<file path=ppt/notesSlides/notesSlide5.xml><?xml version="1.0" encoding="utf-8"?>
+<p:notes xmlns:a="http://schemas.openxmlformats.org/drawingml/2006/main" xmlns:r="http://schemas.openxmlformats.org/officeDocument/2006/relationships" xmlns:p="http://schemas.openxmlformats.org/presentationml/2006/main">
+  <p:cSld>
+    <p:spTree>
+      <p:nvGrpSpPr>
+        <p:cNvPr id="1" name="">
+          <a:extLst>
+            <a:ext uri="{FF2B5EF4-FFF2-40B4-BE49-F238E27FC236}">
               <a16:creationId xmlns:a16="http://schemas.microsoft.com/office/drawing/2014/main" id="{812B2A21-C6A2-C5B9-2DCA-3754617037C3}"/>
             </a:ext>
           </a:extLst>
@@ -849,7 +1176,7 @@
           <a:p>
             <a:fld id="{676223B9-C868-4436-87D9-1A3152E1157A}" type="slidenum">
               <a:rPr lang="es-ES" smtClean="0"/>
-              <a:t>4</a:t>
+              <a:t>7</a:t>
             </a:fld>
             <a:endParaRPr lang="es-ES"/>
           </a:p>
@@ -868,7 +1195,7 @@
 </p:notes>
 </file>
 
-<file path=ppt/notesSlides/notesSlide3.xml><?xml version="1.0" encoding="utf-8"?>
+<file path=ppt/notesSlides/notesSlide6.xml><?xml version="1.0" encoding="utf-8"?>
 <p:notes xmlns:a="http://schemas.openxmlformats.org/drawingml/2006/main" xmlns:r="http://schemas.openxmlformats.org/officeDocument/2006/relationships" xmlns:p="http://schemas.openxmlformats.org/presentationml/2006/main">
   <p:cSld>
     <p:spTree>
@@ -957,7 +1284,7 @@
           <a:p>
             <a:fld id="{676223B9-C868-4436-87D9-1A3152E1157A}" type="slidenum">
               <a:rPr lang="es-ES" smtClean="0"/>
-              <a:t>5</a:t>
+              <a:t>8</a:t>
             </a:fld>
             <a:endParaRPr lang="es-ES"/>
           </a:p>
@@ -976,7 +1303,7 @@
 </p:notes>
 </file>
 
-<file path=ppt/notesSlides/notesSlide4.xml><?xml version="1.0" encoding="utf-8"?>
+<file path=ppt/notesSlides/notesSlide7.xml><?xml version="1.0" encoding="utf-8"?>
 <p:notes xmlns:a="http://schemas.openxmlformats.org/drawingml/2006/main" xmlns:r="http://schemas.openxmlformats.org/officeDocument/2006/relationships" xmlns:p="http://schemas.openxmlformats.org/presentationml/2006/main">
   <p:cSld>
     <p:spTree>
@@ -1065,7 +1392,7 @@
           <a:p>
             <a:fld id="{676223B9-C868-4436-87D9-1A3152E1157A}" type="slidenum">
               <a:rPr lang="es-ES" smtClean="0"/>
-              <a:t>6</a:t>
+              <a:t>9</a:t>
             </a:fld>
             <a:endParaRPr lang="es-ES"/>
           </a:p>
@@ -1222,7 +1549,7 @@
           </a:lstStyle>
           <a:p>
             <a:fld id="{B6F15528-21DE-4FAA-801E-634DDDAF4B2B}" type="slidenum">
-              <a:t>‹Nº›</a:t>
+              <a:t>‹#›</a:t>
             </a:fld>
             <a:endParaRPr/>
           </a:p>
@@ -1446,7 +1773,7 @@
           </a:lstStyle>
           <a:p>
             <a:fld id="{B6F15528-21DE-4FAA-801E-634DDDAF4B2B}" type="slidenum">
-              <a:t>‹Nº›</a:t>
+              <a:t>‹#›</a:t>
             </a:fld>
             <a:endParaRPr/>
           </a:p>
@@ -1627,7 +1954,7 @@
           </a:lstStyle>
           <a:p>
             <a:fld id="{B6F15528-21DE-4FAA-801E-634DDDAF4B2B}" type="slidenum">
-              <a:t>‹Nº›</a:t>
+              <a:t>‹#›</a:t>
             </a:fld>
             <a:endParaRPr/>
           </a:p>
@@ -1891,7 +2218,7 @@
           </a:lstStyle>
           <a:p>
             <a:fld id="{B6F15528-21DE-4FAA-801E-634DDDAF4B2B}" type="slidenum">
-              <a:t>‹Nº›</a:t>
+              <a:t>‹#›</a:t>
             </a:fld>
             <a:endParaRPr/>
           </a:p>
@@ -2055,7 +2382,7 @@
           </a:lstStyle>
           <a:p>
             <a:fld id="{B6F15528-21DE-4FAA-801E-634DDDAF4B2B}" type="slidenum">
-              <a:t>‹Nº›</a:t>
+              <a:t>‹#›</a:t>
             </a:fld>
             <a:endParaRPr/>
           </a:p>
@@ -2357,7 +2684,7 @@
           </a:lstStyle>
           <a:p>
             <a:fld id="{B6F15528-21DE-4FAA-801E-634DDDAF4B2B}" type="slidenum">
-              <a:t>‹Nº›</a:t>
+              <a:t>‹#›</a:t>
             </a:fld>
             <a:endParaRPr/>
           </a:p>
@@ -2544,7 +2871,7 @@
         <p:spPr>
           <a:xfrm>
             <a:off x="2749676" y="4919853"/>
-            <a:ext cx="8299324" cy="505267"/>
+            <a:ext cx="8299324" cy="1010533"/>
           </a:xfrm>
           <a:prstGeom prst="rect">
             <a:avLst/>
@@ -2590,8 +2917,18 @@
                 <a:latin typeface="Lucida Sans"/>
                 <a:cs typeface="Lucida Sans"/>
               </a:rPr>
-              <a:t> I - MZI</a:t>
-            </a:r>
+              <a:t> I – MZI</a:t>
+            </a:r>
+          </a:p>
+          <a:p>
+            <a:pPr marL="12700">
+              <a:lnSpc>
+                <a:spcPct val="100000"/>
+              </a:lnSpc>
+              <a:spcBef>
+                <a:spcPts val="100"/>
+              </a:spcBef>
+            </a:pPr>
             <a:endParaRPr sz="3200" dirty="0">
               <a:latin typeface="Lucida Sans"/>
               <a:cs typeface="Lucida Sans"/>
@@ -2702,6 +3039,159 @@
             <a:fld id="{B6F15528-21DE-4FAA-801E-634DDDAF4B2B}" type="slidenum">
               <a:rPr lang="es-ES" smtClean="0"/>
               <a:t>1</a:t>
+            </a:fld>
+            <a:endParaRPr lang="es-ES"/>
+          </a:p>
+        </p:txBody>
+      </p:sp>
+    </p:spTree>
+  </p:cSld>
+  <p:clrMapOvr>
+    <a:masterClrMapping/>
+  </p:clrMapOvr>
+</p:sld>
+</file>
+
+<file path=ppt/slides/slide10.xml><?xml version="1.0" encoding="utf-8"?>
+<p:sld xmlns:a="http://schemas.openxmlformats.org/drawingml/2006/main" xmlns:r="http://schemas.openxmlformats.org/officeDocument/2006/relationships" xmlns:p="http://schemas.openxmlformats.org/presentationml/2006/main">
+  <p:cSld>
+    <p:spTree>
+      <p:nvGrpSpPr>
+        <p:cNvPr id="1" name=""/>
+        <p:cNvGrpSpPr/>
+        <p:nvPr/>
+      </p:nvGrpSpPr>
+      <p:grpSpPr>
+        <a:xfrm>
+          <a:off x="0" y="0"/>
+          <a:ext cx="0" cy="0"/>
+          <a:chOff x="0" y="0"/>
+          <a:chExt cx="0" cy="0"/>
+        </a:xfrm>
+      </p:grpSpPr>
+      <p:sp>
+        <p:nvSpPr>
+          <p:cNvPr id="3" name="object 3"/>
+          <p:cNvSpPr/>
+          <p:nvPr/>
+        </p:nvSpPr>
+        <p:spPr>
+          <a:xfrm>
+            <a:off x="3945635" y="2636520"/>
+            <a:ext cx="8246363" cy="1584959"/>
+          </a:xfrm>
+          <a:prstGeom prst="rect">
+            <a:avLst/>
+          </a:prstGeom>
+          <a:blipFill>
+            <a:blip r:embed="rId2" cstate="print"/>
+            <a:stretch>
+              <a:fillRect/>
+            </a:stretch>
+          </a:blipFill>
+        </p:spPr>
+        <p:txBody>
+          <a:bodyPr wrap="square" lIns="0" tIns="0" rIns="0" bIns="0" rtlCol="0"/>
+          <a:lstStyle/>
+          <a:p>
+            <a:endParaRPr/>
+          </a:p>
+        </p:txBody>
+      </p:sp>
+      <p:sp>
+        <p:nvSpPr>
+          <p:cNvPr id="4" name="object 4"/>
+          <p:cNvSpPr txBox="1">
+            <a:spLocks noGrp="1"/>
+          </p:cNvSpPr>
+          <p:nvPr>
+            <p:ph type="title"/>
+          </p:nvPr>
+        </p:nvSpPr>
+        <p:spPr>
+          <a:xfrm>
+            <a:off x="4513326" y="3165729"/>
+            <a:ext cx="2233295" cy="513715"/>
+          </a:xfrm>
+          <a:prstGeom prst="rect">
+            <a:avLst/>
+          </a:prstGeom>
+        </p:spPr>
+        <p:txBody>
+          <a:bodyPr vert="horz" wrap="square" lIns="0" tIns="13335" rIns="0" bIns="0" rtlCol="0">
+            <a:spAutoFit/>
+          </a:bodyPr>
+          <a:lstStyle/>
+          <a:p>
+            <a:pPr marL="12700">
+              <a:lnSpc>
+                <a:spcPct val="100000"/>
+              </a:lnSpc>
+              <a:spcBef>
+                <a:spcPts val="105"/>
+              </a:spcBef>
+            </a:pPr>
+            <a:r>
+              <a:rPr sz="3200" b="1" spc="-5" dirty="0">
+                <a:solidFill>
+                  <a:srgbClr val="FFFFFF"/>
+                </a:solidFill>
+                <a:latin typeface="Lucida Sans"/>
+                <a:cs typeface="Lucida Sans"/>
+              </a:rPr>
+              <a:t>Thank</a:t>
+            </a:r>
+            <a:r>
+              <a:rPr sz="3200" b="1" spc="-55" dirty="0">
+                <a:solidFill>
+                  <a:srgbClr val="FFFFFF"/>
+                </a:solidFill>
+                <a:latin typeface="Lucida Sans"/>
+                <a:cs typeface="Lucida Sans"/>
+              </a:rPr>
+              <a:t> </a:t>
+            </a:r>
+            <a:r>
+              <a:rPr sz="3200" b="1" dirty="0">
+                <a:solidFill>
+                  <a:srgbClr val="FFFFFF"/>
+                </a:solidFill>
+                <a:latin typeface="Lucida Sans"/>
+                <a:cs typeface="Lucida Sans"/>
+              </a:rPr>
+              <a:t>you</a:t>
+            </a:r>
+            <a:endParaRPr sz="3200">
+              <a:latin typeface="Lucida Sans"/>
+              <a:cs typeface="Lucida Sans"/>
+            </a:endParaRPr>
+          </a:p>
+        </p:txBody>
+      </p:sp>
+      <p:sp>
+        <p:nvSpPr>
+          <p:cNvPr id="5" name="Marcador de número de diapositiva 4">
+            <a:extLst>
+              <a:ext uri="{FF2B5EF4-FFF2-40B4-BE49-F238E27FC236}">
+                <a16:creationId xmlns:a16="http://schemas.microsoft.com/office/drawing/2014/main" id="{B052DA19-AD24-7D24-2AE9-51F8F5A7F5E0}"/>
+              </a:ext>
+            </a:extLst>
+          </p:cNvPr>
+          <p:cNvSpPr>
+            <a:spLocks noGrp="1"/>
+          </p:cNvSpPr>
+          <p:nvPr>
+            <p:ph type="sldNum" sz="quarter" idx="7"/>
+          </p:nvPr>
+        </p:nvSpPr>
+        <p:spPr/>
+        <p:txBody>
+          <a:bodyPr/>
+          <a:lstStyle/>
+          <a:p>
+            <a:fld id="{B6F15528-21DE-4FAA-801E-634DDDAF4B2B}" type="slidenum">
+              <a:rPr lang="es-ES" smtClean="0"/>
+              <a:t>10</a:t>
             </a:fld>
             <a:endParaRPr lang="es-ES"/>
           </a:p>
@@ -3085,13 +3575,17 @@
               <a:buChar char="•"/>
             </a:pPr>
             <a:r>
-              <a:rPr lang="en-US" kern="0" dirty="0">
-                <a:solidFill>
-                  <a:sysClr val="windowText" lastClr="000000"/>
-                </a:solidFill>
+              <a:rPr lang="es-ES" dirty="0">
+                <a:hlinkClick r:id="rId4" tooltip="https://github.com/cccanvas-upv/pic-upv-lab3.git"/>
               </a:rPr>
-              <a:t>Either run locally or at Cloud workspace</a:t>
-            </a:r>
+              <a:t>https://github.com/cccanvas-upv/pic-upv-lab3.git</a:t>
+            </a:r>
+            <a:endParaRPr lang="en-US" kern="0" dirty="0">
+              <a:solidFill>
+                <a:sysClr val="windowText" lastClr="000000"/>
+              </a:solidFill>
+              <a:sym typeface="Wingdings" pitchFamily="2" charset="2"/>
+            </a:endParaRPr>
           </a:p>
           <a:p>
             <a:pPr algn="just"/>
@@ -3382,7 +3876,7 @@
                 <a:avLst/>
               </a:prstGeom>
               <a:blipFill>
-                <a:blip r:embed="rId4"/>
+                <a:blip r:embed="rId5"/>
                 <a:stretch>
                   <a:fillRect t="-8197" b="-24590"/>
                 </a:stretch>
@@ -3660,7 +4154,7 @@
                 <a:avLst/>
               </a:prstGeom>
               <a:blipFill>
-                <a:blip r:embed="rId5"/>
+                <a:blip r:embed="rId6"/>
                 <a:stretch>
                   <a:fillRect/>
                 </a:stretch>
@@ -4104,7 +4598,7 @@
                 <a:avLst/>
               </a:prstGeom>
               <a:blipFill>
-                <a:blip r:embed="rId6"/>
+                <a:blip r:embed="rId7"/>
                 <a:stretch>
                   <a:fillRect/>
                 </a:stretch>
@@ -4276,7 +4770,7 @@
                 <a:avLst/>
               </a:prstGeom>
               <a:blipFill>
-                <a:blip r:embed="rId7"/>
+                <a:blip r:embed="rId8"/>
                 <a:stretch>
                   <a:fillRect t="-10000" b="-26667"/>
                 </a:stretch>
@@ -4875,6 +5369,1917 @@
         <p:cNvPr id="1" name="">
           <a:extLst>
             <a:ext uri="{FF2B5EF4-FFF2-40B4-BE49-F238E27FC236}">
+              <a16:creationId xmlns:a16="http://schemas.microsoft.com/office/drawing/2014/main" id="{9E1DA0F9-B230-D9FC-3CE7-03BD08CF54F7}"/>
+            </a:ext>
+          </a:extLst>
+        </p:cNvPr>
+        <p:cNvGrpSpPr/>
+        <p:nvPr/>
+      </p:nvGrpSpPr>
+      <p:grpSpPr>
+        <a:xfrm>
+          <a:off x="0" y="0"/>
+          <a:ext cx="0" cy="0"/>
+          <a:chOff x="0" y="0"/>
+          <a:chExt cx="0" cy="0"/>
+        </a:xfrm>
+      </p:grpSpPr>
+      <p:pic>
+        <p:nvPicPr>
+          <p:cNvPr id="10" name="Picture 9">
+            <a:extLst>
+              <a:ext uri="{FF2B5EF4-FFF2-40B4-BE49-F238E27FC236}">
+                <a16:creationId xmlns:a16="http://schemas.microsoft.com/office/drawing/2014/main" id="{D86AC4DA-0321-D9F4-C1A6-44838C881CC3}"/>
+              </a:ext>
+            </a:extLst>
+          </p:cNvPr>
+          <p:cNvPicPr>
+            <a:picLocks noChangeAspect="1"/>
+          </p:cNvPicPr>
+          <p:nvPr/>
+        </p:nvPicPr>
+        <p:blipFill>
+          <a:blip r:embed="rId3">
+            <a:extLst>
+              <a:ext uri="{28A0092B-C50C-407E-A947-70E740481C1C}">
+                <a14:useLocalDpi xmlns:a14="http://schemas.microsoft.com/office/drawing/2010/main" val="0"/>
+              </a:ext>
+            </a:extLst>
+          </a:blip>
+          <a:stretch>
+            <a:fillRect/>
+          </a:stretch>
+        </p:blipFill>
+        <p:spPr>
+          <a:xfrm>
+            <a:off x="631254" y="1447800"/>
+            <a:ext cx="5349251" cy="4023368"/>
+          </a:xfrm>
+          <a:prstGeom prst="rect">
+            <a:avLst/>
+          </a:prstGeom>
+        </p:spPr>
+      </p:pic>
+      <p:pic>
+        <p:nvPicPr>
+          <p:cNvPr id="83" name="Gráfico 82">
+            <a:extLst>
+              <a:ext uri="{FF2B5EF4-FFF2-40B4-BE49-F238E27FC236}">
+                <a16:creationId xmlns:a16="http://schemas.microsoft.com/office/drawing/2014/main" id="{4D53B68D-17ED-7EFB-F2B4-10DA7A772E17}"/>
+              </a:ext>
+            </a:extLst>
+          </p:cNvPr>
+          <p:cNvPicPr>
+            <a:picLocks noChangeAspect="1"/>
+          </p:cNvPicPr>
+          <p:nvPr/>
+        </p:nvPicPr>
+        <p:blipFill>
+          <a:blip r:embed="rId4">
+            <a:extLst>
+              <a:ext uri="{96DAC541-7B7A-43D3-8B79-37D633B846F1}">
+                <asvg:svgBlip xmlns:asvg="http://schemas.microsoft.com/office/drawing/2016/SVG/main" r:embed="rId5"/>
+              </a:ext>
+            </a:extLst>
+          </a:blip>
+          <a:stretch>
+            <a:fillRect/>
+          </a:stretch>
+        </p:blipFill>
+        <p:spPr>
+          <a:xfrm>
+            <a:off x="5045006" y="6356057"/>
+            <a:ext cx="6409575" cy="363174"/>
+          </a:xfrm>
+          <a:prstGeom prst="rect">
+            <a:avLst/>
+          </a:prstGeom>
+        </p:spPr>
+      </p:pic>
+      <p:sp>
+        <p:nvSpPr>
+          <p:cNvPr id="84" name="Marcador de número de diapositiva 83">
+            <a:extLst>
+              <a:ext uri="{FF2B5EF4-FFF2-40B4-BE49-F238E27FC236}">
+                <a16:creationId xmlns:a16="http://schemas.microsoft.com/office/drawing/2014/main" id="{09AB8697-C1EE-6E9A-6550-ACA2C3AE6630}"/>
+              </a:ext>
+            </a:extLst>
+          </p:cNvPr>
+          <p:cNvSpPr>
+            <a:spLocks noGrp="1"/>
+          </p:cNvSpPr>
+          <p:nvPr>
+            <p:ph type="sldNum" sz="quarter" idx="7"/>
+          </p:nvPr>
+        </p:nvSpPr>
+        <p:spPr/>
+        <p:txBody>
+          <a:bodyPr/>
+          <a:lstStyle/>
+          <a:p>
+            <a:fld id="{B6F15528-21DE-4FAA-801E-634DDDAF4B2B}" type="slidenum">
+              <a:rPr lang="es-ES" smtClean="0"/>
+              <a:t>4</a:t>
+            </a:fld>
+            <a:endParaRPr lang="es-ES"/>
+          </a:p>
+        </p:txBody>
+      </p:sp>
+      <p:sp>
+        <p:nvSpPr>
+          <p:cNvPr id="3" name="Marcador de pie de página 2">
+            <a:extLst>
+              <a:ext uri="{FF2B5EF4-FFF2-40B4-BE49-F238E27FC236}">
+                <a16:creationId xmlns:a16="http://schemas.microsoft.com/office/drawing/2014/main" id="{970D4A6C-5B37-EDF5-6242-74B16127E96B}"/>
+              </a:ext>
+            </a:extLst>
+          </p:cNvPr>
+          <p:cNvSpPr>
+            <a:spLocks noGrp="1"/>
+          </p:cNvSpPr>
+          <p:nvPr>
+            <p:ph type="ftr" sz="quarter" idx="5"/>
+          </p:nvPr>
+        </p:nvSpPr>
+        <p:spPr/>
+        <p:txBody>
+          <a:bodyPr/>
+          <a:lstStyle/>
+          <a:p>
+            <a:pPr marL="12700">
+              <a:spcBef>
+                <a:spcPts val="15"/>
+              </a:spcBef>
+            </a:pPr>
+            <a:r>
+              <a:rPr lang="es-ES" spc="-5"/>
+              <a:t>LAB 1.0. WAVEGUIDES</a:t>
+            </a:r>
+            <a:endParaRPr lang="es-ES" spc="-5" dirty="0"/>
+          </a:p>
+        </p:txBody>
+      </p:sp>
+      <p:sp>
+        <p:nvSpPr>
+          <p:cNvPr id="5" name="Rectángulo 4">
+            <a:extLst>
+              <a:ext uri="{FF2B5EF4-FFF2-40B4-BE49-F238E27FC236}">
+                <a16:creationId xmlns:a16="http://schemas.microsoft.com/office/drawing/2014/main" id="{A6B92C76-6772-2E00-346F-532321092C04}"/>
+              </a:ext>
+            </a:extLst>
+          </p:cNvPr>
+          <p:cNvSpPr/>
+          <p:nvPr/>
+        </p:nvSpPr>
+        <p:spPr>
+          <a:xfrm>
+            <a:off x="609441" y="1463032"/>
+            <a:ext cx="5486559" cy="4023368"/>
+          </a:xfrm>
+          <a:prstGeom prst="rect">
+            <a:avLst/>
+          </a:prstGeom>
+          <a:noFill/>
+          <a:ln w="28575">
+            <a:solidFill>
+              <a:srgbClr val="E0700D"/>
+            </a:solidFill>
+          </a:ln>
+        </p:spPr>
+        <p:style>
+          <a:lnRef idx="2">
+            <a:schemeClr val="accent1">
+              <a:shade val="15000"/>
+            </a:schemeClr>
+          </a:lnRef>
+          <a:fillRef idx="1">
+            <a:schemeClr val="accent1"/>
+          </a:fillRef>
+          <a:effectRef idx="0">
+            <a:schemeClr val="accent1"/>
+          </a:effectRef>
+          <a:fontRef idx="minor">
+            <a:schemeClr val="lt1"/>
+          </a:fontRef>
+        </p:style>
+        <p:txBody>
+          <a:bodyPr rtlCol="0" anchor="ctr"/>
+          <a:lstStyle/>
+          <a:p>
+            <a:pPr algn="ctr"/>
+            <a:endParaRPr lang="en-US"/>
+          </a:p>
+        </p:txBody>
+      </p:sp>
+      <p:sp>
+        <p:nvSpPr>
+          <p:cNvPr id="8" name="object 16">
+            <a:extLst>
+              <a:ext uri="{FF2B5EF4-FFF2-40B4-BE49-F238E27FC236}">
+                <a16:creationId xmlns:a16="http://schemas.microsoft.com/office/drawing/2014/main" id="{413EE84B-06C8-C286-4D0A-7D5B8CFC747D}"/>
+              </a:ext>
+            </a:extLst>
+          </p:cNvPr>
+          <p:cNvSpPr txBox="1">
+            <a:spLocks noGrp="1"/>
+          </p:cNvSpPr>
+          <p:nvPr>
+            <p:ph type="title"/>
+          </p:nvPr>
+        </p:nvSpPr>
+        <p:spPr>
+          <a:xfrm>
+            <a:off x="631254" y="194877"/>
+            <a:ext cx="10994410" cy="782265"/>
+          </a:xfrm>
+          <a:prstGeom prst="rect">
+            <a:avLst/>
+          </a:prstGeom>
+        </p:spPr>
+        <p:txBody>
+          <a:bodyPr vert="horz" wrap="square" lIns="0" tIns="12700" rIns="0" bIns="0" rtlCol="0">
+            <a:spAutoFit/>
+          </a:bodyPr>
+          <a:lstStyle/>
+          <a:p>
+            <a:pPr marL="12700">
+              <a:lnSpc>
+                <a:spcPct val="100000"/>
+              </a:lnSpc>
+              <a:spcBef>
+                <a:spcPts val="100"/>
+              </a:spcBef>
+            </a:pPr>
+            <a:r>
+              <a:rPr lang="en-US" sz="2400" b="1" dirty="0"/>
+              <a:t>ASSESSMENT #1 </a:t>
+            </a:r>
+            <a:r>
+              <a:rPr lang="en-US" sz="2500" dirty="0"/>
+              <a:t>– Recap from theory – MZI configurations</a:t>
+            </a:r>
+            <a:br>
+              <a:rPr lang="es-ES" sz="2500" spc="-5" dirty="0">
+                <a:latin typeface="+mj-lt"/>
+                <a:cs typeface="Lucida Sans"/>
+              </a:rPr>
+            </a:br>
+            <a:endParaRPr sz="2500" b="0" dirty="0">
+              <a:latin typeface="+mj-lt"/>
+              <a:cs typeface="Lucida Sans"/>
+            </a:endParaRPr>
+          </a:p>
+        </p:txBody>
+      </p:sp>
+      <p:sp>
+        <p:nvSpPr>
+          <p:cNvPr id="12" name="TextBox 11">
+            <a:extLst>
+              <a:ext uri="{FF2B5EF4-FFF2-40B4-BE49-F238E27FC236}">
+                <a16:creationId xmlns:a16="http://schemas.microsoft.com/office/drawing/2014/main" id="{6D21F016-DFD2-CBE1-0732-7E1DF4C3A0C2}"/>
+              </a:ext>
+            </a:extLst>
+          </p:cNvPr>
+          <p:cNvSpPr txBox="1"/>
+          <p:nvPr/>
+        </p:nvSpPr>
+        <p:spPr>
+          <a:xfrm>
+            <a:off x="566336" y="828306"/>
+            <a:ext cx="6128794" cy="369332"/>
+          </a:xfrm>
+          <a:prstGeom prst="rect">
+            <a:avLst/>
+          </a:prstGeom>
+          <a:noFill/>
+        </p:spPr>
+        <p:txBody>
+          <a:bodyPr wrap="square">
+            <a:spAutoFit/>
+          </a:bodyPr>
+          <a:lstStyle/>
+          <a:p>
+            <a:r>
+              <a:rPr lang="en-US" sz="1800" dirty="0"/>
+              <a:t>SOI Balanced configuration</a:t>
+            </a:r>
+            <a:endParaRPr lang="es-CO" dirty="0"/>
+          </a:p>
+        </p:txBody>
+      </p:sp>
+      <mc:AlternateContent xmlns:mc="http://schemas.openxmlformats.org/markup-compatibility/2006">
+        <mc:Choice xmlns:a14="http://schemas.microsoft.com/office/drawing/2010/main" Requires="a14">
+          <p:sp>
+            <p:nvSpPr>
+              <p:cNvPr id="4" name="TextBox 3">
+                <a:extLst>
+                  <a:ext uri="{FF2B5EF4-FFF2-40B4-BE49-F238E27FC236}">
+                    <a16:creationId xmlns:a16="http://schemas.microsoft.com/office/drawing/2014/main" id="{F894F083-0CBA-575B-A085-E759834EB9A2}"/>
+                  </a:ext>
+                </a:extLst>
+              </p:cNvPr>
+              <p:cNvSpPr txBox="1"/>
+              <p:nvPr/>
+            </p:nvSpPr>
+            <p:spPr>
+              <a:xfrm>
+                <a:off x="6324600" y="1463032"/>
+                <a:ext cx="5638333" cy="646331"/>
+              </a:xfrm>
+              <a:prstGeom prst="rect">
+                <a:avLst/>
+              </a:prstGeom>
+              <a:noFill/>
+            </p:spPr>
+            <p:txBody>
+              <a:bodyPr wrap="square">
+                <a:spAutoFit/>
+              </a:bodyPr>
+              <a:lstStyle/>
+              <a:p>
+                <a:pPr algn="just">
+                  <a:buNone/>
+                </a:pPr>
+                <a:r>
+                  <a:rPr lang="en-US" b="1" dirty="0"/>
+                  <a:t>Why does a perfectly balanced MZI (</a:t>
+                </a:r>
+                <a14:m>
+                  <m:oMath xmlns:m="http://schemas.openxmlformats.org/officeDocument/2006/math">
+                    <m:r>
+                      <a:rPr lang="en-US" b="1" i="0" dirty="0" smtClean="0">
+                        <a:latin typeface="Cambria Math" panose="02040503050406030204" pitchFamily="18" charset="0"/>
+                      </a:rPr>
+                      <m:t>𝚫</m:t>
+                    </m:r>
+                    <m:r>
+                      <a:rPr lang="en-US" b="1" i="1" dirty="0">
+                        <a:latin typeface="Cambria Math" panose="02040503050406030204" pitchFamily="18" charset="0"/>
+                      </a:rPr>
+                      <m:t>𝑳</m:t>
+                    </m:r>
+                    <m:r>
+                      <a:rPr lang="en-US" b="1" i="1" dirty="0">
+                        <a:latin typeface="Cambria Math" panose="02040503050406030204" pitchFamily="18" charset="0"/>
+                      </a:rPr>
+                      <m:t> = </m:t>
+                    </m:r>
+                    <m:r>
+                      <a:rPr lang="en-US" b="1" i="1" dirty="0" smtClean="0">
+                        <a:latin typeface="Cambria Math" panose="02040503050406030204" pitchFamily="18" charset="0"/>
+                      </a:rPr>
+                      <m:t>𝟎</m:t>
+                    </m:r>
+                    <m:r>
+                      <a:rPr lang="es-MX" b="1" i="1" dirty="0" smtClean="0">
+                        <a:latin typeface="Cambria Math" panose="02040503050406030204" pitchFamily="18" charset="0"/>
+                      </a:rPr>
+                      <m:t> </m:t>
+                    </m:r>
+                  </m:oMath>
+                </a14:m>
+                <a:r>
+                  <a:rPr lang="en-US" b="1" dirty="0"/>
+                  <a:t>, identical arms and 50:50 couplers) not exhibit spectral periodicity? </a:t>
+                </a:r>
+              </a:p>
+            </p:txBody>
+          </p:sp>
+        </mc:Choice>
+        <mc:Fallback>
+          <p:sp>
+            <p:nvSpPr>
+              <p:cNvPr id="4" name="TextBox 3">
+                <a:extLst>
+                  <a:ext uri="{FF2B5EF4-FFF2-40B4-BE49-F238E27FC236}">
+                    <a16:creationId xmlns:a16="http://schemas.microsoft.com/office/drawing/2014/main" id="{F894F083-0CBA-575B-A085-E759834EB9A2}"/>
+                  </a:ext>
+                </a:extLst>
+              </p:cNvPr>
+              <p:cNvSpPr txBox="1">
+                <a:spLocks noRot="1" noChangeAspect="1" noMove="1" noResize="1" noEditPoints="1" noAdjustHandles="1" noChangeArrowheads="1" noChangeShapeType="1" noTextEdit="1"/>
+              </p:cNvSpPr>
+              <p:nvPr/>
+            </p:nvSpPr>
+            <p:spPr>
+              <a:xfrm>
+                <a:off x="6324600" y="1463032"/>
+                <a:ext cx="5638333" cy="646331"/>
+              </a:xfrm>
+              <a:prstGeom prst="rect">
+                <a:avLst/>
+              </a:prstGeom>
+              <a:blipFill>
+                <a:blip r:embed="rId6"/>
+                <a:stretch>
+                  <a:fillRect l="-974" t="-5660" r="-974" b="-14151"/>
+                </a:stretch>
+              </a:blipFill>
+            </p:spPr>
+            <p:txBody>
+              <a:bodyPr/>
+              <a:lstStyle/>
+              <a:p>
+                <a:r>
+                  <a:rPr lang="en-US">
+                    <a:noFill/>
+                  </a:rPr>
+                  <a:t> </a:t>
+                </a:r>
+              </a:p>
+            </p:txBody>
+          </p:sp>
+        </mc:Fallback>
+      </mc:AlternateContent>
+      <p:sp>
+        <p:nvSpPr>
+          <p:cNvPr id="7" name="TextBox 6">
+            <a:extLst>
+              <a:ext uri="{FF2B5EF4-FFF2-40B4-BE49-F238E27FC236}">
+                <a16:creationId xmlns:a16="http://schemas.microsoft.com/office/drawing/2014/main" id="{36591DDB-E6F4-9E69-71D9-A269DD535BFB}"/>
+              </a:ext>
+            </a:extLst>
+          </p:cNvPr>
+          <p:cNvSpPr txBox="1"/>
+          <p:nvPr/>
+        </p:nvSpPr>
+        <p:spPr>
+          <a:xfrm>
+            <a:off x="6346767" y="2131246"/>
+            <a:ext cx="5486559" cy="369332"/>
+          </a:xfrm>
+          <a:prstGeom prst="rect">
+            <a:avLst/>
+          </a:prstGeom>
+          <a:noFill/>
+        </p:spPr>
+        <p:txBody>
+          <a:bodyPr wrap="square">
+            <a:spAutoFit/>
+          </a:bodyPr>
+          <a:lstStyle/>
+          <a:p>
+            <a:pPr>
+              <a:buNone/>
+            </a:pPr>
+            <a:r>
+              <a:rPr lang="en-US" dirty="0"/>
+              <a:t>On a MZI transmission depends on a phase difference</a:t>
+            </a:r>
+          </a:p>
+        </p:txBody>
+      </p:sp>
+      <mc:AlternateContent xmlns:mc="http://schemas.openxmlformats.org/markup-compatibility/2006">
+        <mc:Choice xmlns:a14="http://schemas.microsoft.com/office/drawing/2010/main" Requires="a14">
+          <p:sp>
+            <p:nvSpPr>
+              <p:cNvPr id="11" name="TextBox 10">
+                <a:extLst>
+                  <a:ext uri="{FF2B5EF4-FFF2-40B4-BE49-F238E27FC236}">
+                    <a16:creationId xmlns:a16="http://schemas.microsoft.com/office/drawing/2014/main" id="{D5A7F511-33A0-39EF-64D2-D41F8BC5985F}"/>
+                  </a:ext>
+                </a:extLst>
+              </p:cNvPr>
+              <p:cNvSpPr txBox="1"/>
+              <p:nvPr/>
+            </p:nvSpPr>
+            <p:spPr>
+              <a:xfrm>
+                <a:off x="6514019" y="2643956"/>
+                <a:ext cx="5152053" cy="369332"/>
+              </a:xfrm>
+              <a:prstGeom prst="rect">
+                <a:avLst/>
+              </a:prstGeom>
+              <a:noFill/>
+            </p:spPr>
+            <p:txBody>
+              <a:bodyPr wrap="square">
+                <a:spAutoFit/>
+              </a:bodyPr>
+              <a:lstStyle/>
+              <a:p>
+                <a:pPr>
+                  <a:buNone/>
+                </a:pPr>
+                <a14:m>
+                  <m:oMathPara xmlns:m="http://schemas.openxmlformats.org/officeDocument/2006/math">
+                    <m:oMathParaPr>
+                      <m:jc m:val="centerGroup"/>
+                    </m:oMathParaPr>
+                    <m:oMath xmlns:m="http://schemas.openxmlformats.org/officeDocument/2006/math">
+                      <m:r>
+                        <m:rPr>
+                          <m:sty m:val="p"/>
+                        </m:rPr>
+                        <a:rPr lang="es-CO" i="0" dirty="0" smtClean="0">
+                          <a:latin typeface="Cambria Math" panose="02040503050406030204" pitchFamily="18" charset="0"/>
+                        </a:rPr>
+                        <m:t>Δ</m:t>
+                      </m:r>
+                      <m:sSub>
+                        <m:sSubPr>
+                          <m:ctrlPr>
+                            <a:rPr lang="es-CO" i="1" dirty="0" smtClean="0">
+                              <a:latin typeface="Cambria Math" panose="02040503050406030204" pitchFamily="18" charset="0"/>
+                            </a:rPr>
+                          </m:ctrlPr>
+                        </m:sSubPr>
+                        <m:e>
+                          <m:r>
+                            <a:rPr lang="es-CO" i="1" dirty="0" smtClean="0">
+                              <a:latin typeface="Cambria Math" panose="02040503050406030204" pitchFamily="18" charset="0"/>
+                            </a:rPr>
+                            <m:t>𝜙</m:t>
+                          </m:r>
+                        </m:e>
+                        <m:sub>
+                          <m:r>
+                            <a:rPr lang="es-CO" i="1" dirty="0" err="1">
+                              <a:latin typeface="Cambria Math" panose="02040503050406030204" pitchFamily="18" charset="0"/>
+                            </a:rPr>
+                            <m:t>𝑢𝑑</m:t>
+                          </m:r>
+                        </m:sub>
+                      </m:sSub>
+                      <m:r>
+                        <a:rPr lang="es-CO" i="1" dirty="0">
+                          <a:latin typeface="Cambria Math" panose="02040503050406030204" pitchFamily="18" charset="0"/>
+                        </a:rPr>
+                        <m:t>=</m:t>
+                      </m:r>
+                      <m:sSub>
+                        <m:sSubPr>
+                          <m:ctrlPr>
+                            <a:rPr lang="es-CO" i="1" dirty="0" err="1">
+                              <a:latin typeface="Cambria Math" panose="02040503050406030204" pitchFamily="18" charset="0"/>
+                            </a:rPr>
+                          </m:ctrlPr>
+                        </m:sSubPr>
+                        <m:e>
+                          <m:r>
+                            <a:rPr lang="es-CO" i="1" dirty="0">
+                              <a:latin typeface="Cambria Math" panose="02040503050406030204" pitchFamily="18" charset="0"/>
+                            </a:rPr>
+                            <m:t>𝛽</m:t>
+                          </m:r>
+                        </m:e>
+                        <m:sub>
+                          <m:r>
+                            <a:rPr lang="es-CO" i="1" dirty="0" err="1">
+                              <a:latin typeface="Cambria Math" panose="02040503050406030204" pitchFamily="18" charset="0"/>
+                            </a:rPr>
+                            <m:t>𝑢</m:t>
+                          </m:r>
+                        </m:sub>
+                      </m:sSub>
+                      <m:d>
+                        <m:dPr>
+                          <m:ctrlPr>
+                            <a:rPr lang="es-CO" i="1" dirty="0">
+                              <a:latin typeface="Cambria Math" panose="02040503050406030204" pitchFamily="18" charset="0"/>
+                            </a:rPr>
+                          </m:ctrlPr>
+                        </m:dPr>
+                        <m:e>
+                          <m:r>
+                            <a:rPr lang="es-CO" i="1" dirty="0">
+                              <a:latin typeface="Cambria Math" panose="02040503050406030204" pitchFamily="18" charset="0"/>
+                            </a:rPr>
+                            <m:t>𝜆</m:t>
+                          </m:r>
+                        </m:e>
+                      </m:d>
+                      <m:sSub>
+                        <m:sSubPr>
+                          <m:ctrlPr>
+                            <a:rPr lang="es-CO" i="1" dirty="0" err="1">
+                              <a:latin typeface="Cambria Math" panose="02040503050406030204" pitchFamily="18" charset="0"/>
+                            </a:rPr>
+                          </m:ctrlPr>
+                        </m:sSubPr>
+                        <m:e>
+                          <m:r>
+                            <a:rPr lang="es-CO" i="1" dirty="0" err="1">
+                              <a:latin typeface="Cambria Math" panose="02040503050406030204" pitchFamily="18" charset="0"/>
+                            </a:rPr>
+                            <m:t>𝐿</m:t>
+                          </m:r>
+                        </m:e>
+                        <m:sub>
+                          <m:r>
+                            <a:rPr lang="es-CO" i="1" dirty="0" err="1">
+                              <a:latin typeface="Cambria Math" panose="02040503050406030204" pitchFamily="18" charset="0"/>
+                            </a:rPr>
+                            <m:t>𝑢</m:t>
+                          </m:r>
+                        </m:sub>
+                      </m:sSub>
+                      <m:r>
+                        <a:rPr lang="es-CO" i="1" dirty="0">
+                          <a:latin typeface="Cambria Math" panose="02040503050406030204" pitchFamily="18" charset="0"/>
+                        </a:rPr>
+                        <m:t>−</m:t>
+                      </m:r>
+                      <m:sSub>
+                        <m:sSubPr>
+                          <m:ctrlPr>
+                            <a:rPr lang="es-CO" i="1" dirty="0" err="1">
+                              <a:latin typeface="Cambria Math" panose="02040503050406030204" pitchFamily="18" charset="0"/>
+                            </a:rPr>
+                          </m:ctrlPr>
+                        </m:sSubPr>
+                        <m:e>
+                          <m:r>
+                            <a:rPr lang="es-CO" i="1" dirty="0">
+                              <a:latin typeface="Cambria Math" panose="02040503050406030204" pitchFamily="18" charset="0"/>
+                            </a:rPr>
+                            <m:t>𝛽</m:t>
+                          </m:r>
+                        </m:e>
+                        <m:sub>
+                          <m:r>
+                            <a:rPr lang="es-CO" i="1" dirty="0" err="1">
+                              <a:latin typeface="Cambria Math" panose="02040503050406030204" pitchFamily="18" charset="0"/>
+                            </a:rPr>
+                            <m:t>𝑑</m:t>
+                          </m:r>
+                        </m:sub>
+                      </m:sSub>
+                      <m:d>
+                        <m:dPr>
+                          <m:ctrlPr>
+                            <a:rPr lang="es-CO" i="1" dirty="0">
+                              <a:latin typeface="Cambria Math" panose="02040503050406030204" pitchFamily="18" charset="0"/>
+                            </a:rPr>
+                          </m:ctrlPr>
+                        </m:dPr>
+                        <m:e>
+                          <m:r>
+                            <a:rPr lang="es-CO" i="1" dirty="0">
+                              <a:latin typeface="Cambria Math" panose="02040503050406030204" pitchFamily="18" charset="0"/>
+                            </a:rPr>
+                            <m:t>𝜆</m:t>
+                          </m:r>
+                        </m:e>
+                      </m:d>
+                      <m:sSub>
+                        <m:sSubPr>
+                          <m:ctrlPr>
+                            <a:rPr lang="es-CO" i="1" dirty="0" err="1">
+                              <a:latin typeface="Cambria Math" panose="02040503050406030204" pitchFamily="18" charset="0"/>
+                            </a:rPr>
+                          </m:ctrlPr>
+                        </m:sSubPr>
+                        <m:e>
+                          <m:r>
+                            <a:rPr lang="es-CO" i="1" dirty="0" err="1">
+                              <a:latin typeface="Cambria Math" panose="02040503050406030204" pitchFamily="18" charset="0"/>
+                            </a:rPr>
+                            <m:t>𝐿</m:t>
+                          </m:r>
+                        </m:e>
+                        <m:sub>
+                          <m:r>
+                            <a:rPr lang="es-CO" i="1" dirty="0" err="1">
+                              <a:latin typeface="Cambria Math" panose="02040503050406030204" pitchFamily="18" charset="0"/>
+                            </a:rPr>
+                            <m:t>𝑑</m:t>
+                          </m:r>
+                        </m:sub>
+                      </m:sSub>
+                    </m:oMath>
+                  </m:oMathPara>
+                </a14:m>
+              </a:p>
+            </p:txBody>
+          </p:sp>
+        </mc:Choice>
+        <mc:Fallback>
+          <p:sp>
+            <p:nvSpPr>
+              <p:cNvPr id="11" name="TextBox 10">
+                <a:extLst>
+                  <a:ext uri="{FF2B5EF4-FFF2-40B4-BE49-F238E27FC236}">
+                    <a16:creationId xmlns:a16="http://schemas.microsoft.com/office/drawing/2014/main" id="{D5A7F511-33A0-39EF-64D2-D41F8BC5985F}"/>
+                  </a:ext>
+                </a:extLst>
+              </p:cNvPr>
+              <p:cNvSpPr txBox="1">
+                <a:spLocks noRot="1" noChangeAspect="1" noMove="1" noResize="1" noEditPoints="1" noAdjustHandles="1" noChangeArrowheads="1" noChangeShapeType="1" noTextEdit="1"/>
+              </p:cNvSpPr>
+              <p:nvPr/>
+            </p:nvSpPr>
+            <p:spPr>
+              <a:xfrm>
+                <a:off x="6514019" y="2643956"/>
+                <a:ext cx="5152053" cy="369332"/>
+              </a:xfrm>
+              <a:prstGeom prst="rect">
+                <a:avLst/>
+              </a:prstGeom>
+              <a:blipFill>
+                <a:blip r:embed="rId7"/>
+                <a:stretch>
+                  <a:fillRect t="-11667" b="-25000"/>
+                </a:stretch>
+              </a:blipFill>
+            </p:spPr>
+            <p:txBody>
+              <a:bodyPr/>
+              <a:lstStyle/>
+              <a:p>
+                <a:r>
+                  <a:rPr lang="en-US">
+                    <a:noFill/>
+                  </a:rPr>
+                  <a:t> </a:t>
+                </a:r>
+              </a:p>
+            </p:txBody>
+          </p:sp>
+        </mc:Fallback>
+      </mc:AlternateContent>
+      <p:sp>
+        <p:nvSpPr>
+          <p:cNvPr id="14" name="TextBox 13">
+            <a:extLst>
+              <a:ext uri="{FF2B5EF4-FFF2-40B4-BE49-F238E27FC236}">
+                <a16:creationId xmlns:a16="http://schemas.microsoft.com/office/drawing/2014/main" id="{1875CA8F-2E9D-3F24-ACB5-C92C4B8ACB86}"/>
+              </a:ext>
+            </a:extLst>
+          </p:cNvPr>
+          <p:cNvSpPr txBox="1"/>
+          <p:nvPr/>
+        </p:nvSpPr>
+        <p:spPr>
+          <a:xfrm>
+            <a:off x="6374559" y="3169107"/>
+            <a:ext cx="5257800" cy="369332"/>
+          </a:xfrm>
+          <a:prstGeom prst="rect">
+            <a:avLst/>
+          </a:prstGeom>
+          <a:noFill/>
+        </p:spPr>
+        <p:txBody>
+          <a:bodyPr wrap="square">
+            <a:spAutoFit/>
+          </a:bodyPr>
+          <a:lstStyle/>
+          <a:p>
+            <a:pPr>
+              <a:buNone/>
+            </a:pPr>
+            <a:r>
+              <a:rPr lang="en-US" dirty="0"/>
+              <a:t>If the MZI is perfectly balanced</a:t>
+            </a:r>
+          </a:p>
+        </p:txBody>
+      </p:sp>
+      <mc:AlternateContent xmlns:mc="http://schemas.openxmlformats.org/markup-compatibility/2006">
+        <mc:Choice xmlns:a14="http://schemas.microsoft.com/office/drawing/2010/main" Requires="a14">
+          <p:sp>
+            <p:nvSpPr>
+              <p:cNvPr id="16" name="TextBox 15">
+                <a:extLst>
+                  <a:ext uri="{FF2B5EF4-FFF2-40B4-BE49-F238E27FC236}">
+                    <a16:creationId xmlns:a16="http://schemas.microsoft.com/office/drawing/2014/main" id="{D21D2954-5CB5-102D-6631-FBD08AC8A8EA}"/>
+                  </a:ext>
+                </a:extLst>
+              </p:cNvPr>
+              <p:cNvSpPr txBox="1"/>
+              <p:nvPr/>
+            </p:nvSpPr>
+            <p:spPr>
+              <a:xfrm>
+                <a:off x="6460358" y="3610900"/>
+                <a:ext cx="5205714" cy="403124"/>
+              </a:xfrm>
+              <a:prstGeom prst="rect">
+                <a:avLst/>
+              </a:prstGeom>
+              <a:noFill/>
+            </p:spPr>
+            <p:txBody>
+              <a:bodyPr wrap="square">
+                <a:spAutoFit/>
+              </a:bodyPr>
+              <a:lstStyle/>
+              <a:p>
+                <a:pPr>
+                  <a:buNone/>
+                </a:pPr>
+                <a14:m>
+                  <m:oMathPara xmlns:m="http://schemas.openxmlformats.org/officeDocument/2006/math">
+                    <m:oMathParaPr>
+                      <m:jc m:val="centerGroup"/>
+                    </m:oMathParaPr>
+                    <m:oMath xmlns:m="http://schemas.openxmlformats.org/officeDocument/2006/math">
+                      <m:r>
+                        <m:rPr>
+                          <m:sty m:val="p"/>
+                        </m:rPr>
+                        <a:rPr lang="es-CO" i="0" dirty="0" smtClean="0">
+                          <a:latin typeface="Cambria Math" panose="02040503050406030204" pitchFamily="18" charset="0"/>
+                        </a:rPr>
+                        <m:t>Δ</m:t>
+                      </m:r>
+                      <m:r>
+                        <a:rPr lang="es-CO" i="1" dirty="0" smtClean="0">
+                          <a:latin typeface="Cambria Math" panose="02040503050406030204" pitchFamily="18" charset="0"/>
+                        </a:rPr>
+                        <m:t>𝐿</m:t>
+                      </m:r>
+                      <m:r>
+                        <a:rPr lang="es-CO" i="1" dirty="0" smtClean="0">
+                          <a:latin typeface="Cambria Math" panose="02040503050406030204" pitchFamily="18" charset="0"/>
+                        </a:rPr>
+                        <m:t>=0  ,  </m:t>
+                      </m:r>
+                      <m:r>
+                        <m:rPr>
+                          <m:sty m:val="p"/>
+                        </m:rPr>
+                        <a:rPr lang="es-CO" i="0" dirty="0">
+                          <a:latin typeface="Cambria Math" panose="02040503050406030204" pitchFamily="18" charset="0"/>
+                        </a:rPr>
+                        <m:t>Δ</m:t>
+                      </m:r>
+                      <m:r>
+                        <a:rPr lang="es-CO" i="1" dirty="0">
+                          <a:latin typeface="Cambria Math" panose="02040503050406030204" pitchFamily="18" charset="0"/>
+                        </a:rPr>
+                        <m:t>𝛽</m:t>
+                      </m:r>
+                      <m:r>
+                        <a:rPr lang="es-CO" i="1" dirty="0">
+                          <a:latin typeface="Cambria Math" panose="02040503050406030204" pitchFamily="18" charset="0"/>
+                        </a:rPr>
+                        <m:t>= 0  ,  </m:t>
+                      </m:r>
+                      <m:r>
+                        <m:rPr>
+                          <m:sty m:val="p"/>
+                        </m:rPr>
+                        <a:rPr lang="es-CO" i="0" dirty="0">
+                          <a:latin typeface="Cambria Math" panose="02040503050406030204" pitchFamily="18" charset="0"/>
+                        </a:rPr>
+                        <m:t>Δ</m:t>
+                      </m:r>
+                      <m:r>
+                        <a:rPr lang="es-CO" i="1" dirty="0">
+                          <a:latin typeface="Cambria Math" panose="02040503050406030204" pitchFamily="18" charset="0"/>
+                        </a:rPr>
+                        <m:t>𝜙</m:t>
+                      </m:r>
+                      <m:r>
+                        <a:rPr lang="es-CO" i="1" dirty="0">
+                          <a:latin typeface="Cambria Math" panose="02040503050406030204" pitchFamily="18" charset="0"/>
+                        </a:rPr>
+                        <m:t>= 0</m:t>
+                      </m:r>
+                    </m:oMath>
+                  </m:oMathPara>
+                </a14:m>
+              </a:p>
+            </p:txBody>
+          </p:sp>
+        </mc:Choice>
+        <mc:Fallback>
+          <p:sp>
+            <p:nvSpPr>
+              <p:cNvPr id="16" name="TextBox 15">
+                <a:extLst>
+                  <a:ext uri="{FF2B5EF4-FFF2-40B4-BE49-F238E27FC236}">
+                    <a16:creationId xmlns:a16="http://schemas.microsoft.com/office/drawing/2014/main" id="{D21D2954-5CB5-102D-6631-FBD08AC8A8EA}"/>
+                  </a:ext>
+                </a:extLst>
+              </p:cNvPr>
+              <p:cNvSpPr txBox="1">
+                <a:spLocks noRot="1" noChangeAspect="1" noMove="1" noResize="1" noEditPoints="1" noAdjustHandles="1" noChangeArrowheads="1" noChangeShapeType="1" noTextEdit="1"/>
+              </p:cNvSpPr>
+              <p:nvPr/>
+            </p:nvSpPr>
+            <p:spPr>
+              <a:xfrm>
+                <a:off x="6460358" y="3610900"/>
+                <a:ext cx="5205714" cy="403124"/>
+              </a:xfrm>
+              <a:prstGeom prst="rect">
+                <a:avLst/>
+              </a:prstGeom>
+              <a:blipFill>
+                <a:blip r:embed="rId8"/>
+                <a:stretch>
+                  <a:fillRect b="-22727"/>
+                </a:stretch>
+              </a:blipFill>
+            </p:spPr>
+            <p:txBody>
+              <a:bodyPr/>
+              <a:lstStyle/>
+              <a:p>
+                <a:r>
+                  <a:rPr lang="en-US">
+                    <a:noFill/>
+                  </a:rPr>
+                  <a:t> </a:t>
+                </a:r>
+              </a:p>
+            </p:txBody>
+          </p:sp>
+        </mc:Fallback>
+      </mc:AlternateContent>
+      <p:sp>
+        <p:nvSpPr>
+          <p:cNvPr id="18" name="TextBox 17">
+            <a:extLst>
+              <a:ext uri="{FF2B5EF4-FFF2-40B4-BE49-F238E27FC236}">
+                <a16:creationId xmlns:a16="http://schemas.microsoft.com/office/drawing/2014/main" id="{0AFD3F8B-C90D-BD60-78E3-FCCBF4F189DC}"/>
+              </a:ext>
+            </a:extLst>
+          </p:cNvPr>
+          <p:cNvSpPr txBox="1"/>
+          <p:nvPr/>
+        </p:nvSpPr>
+        <p:spPr>
+          <a:xfrm>
+            <a:off x="6324600" y="4262818"/>
+            <a:ext cx="5637600" cy="1200329"/>
+          </a:xfrm>
+          <a:prstGeom prst="rect">
+            <a:avLst/>
+          </a:prstGeom>
+          <a:noFill/>
+        </p:spPr>
+        <p:txBody>
+          <a:bodyPr wrap="square">
+            <a:spAutoFit/>
+          </a:bodyPr>
+          <a:lstStyle/>
+          <a:p>
+            <a:pPr algn="just">
+              <a:buNone/>
+            </a:pPr>
+            <a:r>
+              <a:rPr lang="en-US" dirty="0"/>
+              <a:t>Which means there is no </a:t>
+            </a:r>
+            <a:r>
+              <a:rPr lang="en-US" dirty="0" err="1"/>
+              <a:t>wavelenght</a:t>
+            </a:r>
+            <a:r>
+              <a:rPr lang="en-US" dirty="0"/>
+              <a:t>-dependence interference; therefore, no periodic maxima or minima appear, and the transmission remains constant with wavelength. </a:t>
+            </a:r>
+          </a:p>
+        </p:txBody>
+      </p:sp>
+    </p:spTree>
+    <p:extLst>
+      <p:ext uri="{BB962C8B-B14F-4D97-AF65-F5344CB8AC3E}">
+        <p14:creationId xmlns:p14="http://schemas.microsoft.com/office/powerpoint/2010/main" val="236054401"/>
+      </p:ext>
+    </p:extLst>
+  </p:cSld>
+  <p:clrMapOvr>
+    <a:masterClrMapping/>
+  </p:clrMapOvr>
+</p:sld>
+</file>
+
+<file path=ppt/slides/slide5.xml><?xml version="1.0" encoding="utf-8"?>
+<p:sld xmlns:a="http://schemas.openxmlformats.org/drawingml/2006/main" xmlns:r="http://schemas.openxmlformats.org/officeDocument/2006/relationships" xmlns:p="http://schemas.openxmlformats.org/presentationml/2006/main">
+  <p:cSld>
+    <p:spTree>
+      <p:nvGrpSpPr>
+        <p:cNvPr id="1" name="">
+          <a:extLst>
+            <a:ext uri="{FF2B5EF4-FFF2-40B4-BE49-F238E27FC236}">
+              <a16:creationId xmlns:a16="http://schemas.microsoft.com/office/drawing/2014/main" id="{17C38921-A408-DF0A-5993-6DCE26679820}"/>
+            </a:ext>
+          </a:extLst>
+        </p:cNvPr>
+        <p:cNvGrpSpPr/>
+        <p:nvPr/>
+      </p:nvGrpSpPr>
+      <p:grpSpPr>
+        <a:xfrm>
+          <a:off x="0" y="0"/>
+          <a:ext cx="0" cy="0"/>
+          <a:chOff x="0" y="0"/>
+          <a:chExt cx="0" cy="0"/>
+        </a:xfrm>
+      </p:grpSpPr>
+      <p:pic>
+        <p:nvPicPr>
+          <p:cNvPr id="6" name="Picture 5">
+            <a:extLst>
+              <a:ext uri="{FF2B5EF4-FFF2-40B4-BE49-F238E27FC236}">
+                <a16:creationId xmlns:a16="http://schemas.microsoft.com/office/drawing/2014/main" id="{E44AA88A-859F-7185-C468-7648B2AE9BC0}"/>
+              </a:ext>
+            </a:extLst>
+          </p:cNvPr>
+          <p:cNvPicPr>
+            <a:picLocks noChangeAspect="1"/>
+          </p:cNvPicPr>
+          <p:nvPr/>
+        </p:nvPicPr>
+        <p:blipFill>
+          <a:blip r:embed="rId3">
+            <a:extLst>
+              <a:ext uri="{28A0092B-C50C-407E-A947-70E740481C1C}">
+                <a14:useLocalDpi xmlns:a14="http://schemas.microsoft.com/office/drawing/2010/main" val="0"/>
+              </a:ext>
+            </a:extLst>
+          </a:blip>
+          <a:stretch>
+            <a:fillRect/>
+          </a:stretch>
+        </p:blipFill>
+        <p:spPr>
+          <a:xfrm>
+            <a:off x="678094" y="1461423"/>
+            <a:ext cx="5349251" cy="4023368"/>
+          </a:xfrm>
+          <a:prstGeom prst="rect">
+            <a:avLst/>
+          </a:prstGeom>
+        </p:spPr>
+      </p:pic>
+      <p:pic>
+        <p:nvPicPr>
+          <p:cNvPr id="83" name="Gráfico 82">
+            <a:extLst>
+              <a:ext uri="{FF2B5EF4-FFF2-40B4-BE49-F238E27FC236}">
+                <a16:creationId xmlns:a16="http://schemas.microsoft.com/office/drawing/2014/main" id="{BD1A635A-2277-39E9-FDD8-C0C8ED46A243}"/>
+              </a:ext>
+            </a:extLst>
+          </p:cNvPr>
+          <p:cNvPicPr>
+            <a:picLocks noChangeAspect="1"/>
+          </p:cNvPicPr>
+          <p:nvPr/>
+        </p:nvPicPr>
+        <p:blipFill>
+          <a:blip r:embed="rId4">
+            <a:extLst>
+              <a:ext uri="{96DAC541-7B7A-43D3-8B79-37D633B846F1}">
+                <asvg:svgBlip xmlns:asvg="http://schemas.microsoft.com/office/drawing/2016/SVG/main" r:embed="rId5"/>
+              </a:ext>
+            </a:extLst>
+          </a:blip>
+          <a:stretch>
+            <a:fillRect/>
+          </a:stretch>
+        </p:blipFill>
+        <p:spPr>
+          <a:xfrm>
+            <a:off x="5045006" y="6356057"/>
+            <a:ext cx="6409575" cy="363174"/>
+          </a:xfrm>
+          <a:prstGeom prst="rect">
+            <a:avLst/>
+          </a:prstGeom>
+        </p:spPr>
+      </p:pic>
+      <p:sp>
+        <p:nvSpPr>
+          <p:cNvPr id="84" name="Marcador de número de diapositiva 83">
+            <a:extLst>
+              <a:ext uri="{FF2B5EF4-FFF2-40B4-BE49-F238E27FC236}">
+                <a16:creationId xmlns:a16="http://schemas.microsoft.com/office/drawing/2014/main" id="{CEA71AE3-7AA8-8066-9FA5-0256310C7075}"/>
+              </a:ext>
+            </a:extLst>
+          </p:cNvPr>
+          <p:cNvSpPr>
+            <a:spLocks noGrp="1"/>
+          </p:cNvSpPr>
+          <p:nvPr>
+            <p:ph type="sldNum" sz="quarter" idx="7"/>
+          </p:nvPr>
+        </p:nvSpPr>
+        <p:spPr/>
+        <p:txBody>
+          <a:bodyPr/>
+          <a:lstStyle/>
+          <a:p>
+            <a:fld id="{B6F15528-21DE-4FAA-801E-634DDDAF4B2B}" type="slidenum">
+              <a:rPr lang="es-ES" smtClean="0"/>
+              <a:t>5</a:t>
+            </a:fld>
+            <a:endParaRPr lang="es-ES"/>
+          </a:p>
+        </p:txBody>
+      </p:sp>
+      <p:sp>
+        <p:nvSpPr>
+          <p:cNvPr id="3" name="Marcador de pie de página 2">
+            <a:extLst>
+              <a:ext uri="{FF2B5EF4-FFF2-40B4-BE49-F238E27FC236}">
+                <a16:creationId xmlns:a16="http://schemas.microsoft.com/office/drawing/2014/main" id="{26589C12-F6DA-0851-7920-B486D6B055F4}"/>
+              </a:ext>
+            </a:extLst>
+          </p:cNvPr>
+          <p:cNvSpPr>
+            <a:spLocks noGrp="1"/>
+          </p:cNvSpPr>
+          <p:nvPr>
+            <p:ph type="ftr" sz="quarter" idx="5"/>
+          </p:nvPr>
+        </p:nvSpPr>
+        <p:spPr/>
+        <p:txBody>
+          <a:bodyPr/>
+          <a:lstStyle/>
+          <a:p>
+            <a:pPr marL="12700">
+              <a:spcBef>
+                <a:spcPts val="15"/>
+              </a:spcBef>
+            </a:pPr>
+            <a:r>
+              <a:rPr lang="es-ES" spc="-5"/>
+              <a:t>LAB 1.0. WAVEGUIDES</a:t>
+            </a:r>
+            <a:endParaRPr lang="es-ES" spc="-5" dirty="0"/>
+          </a:p>
+        </p:txBody>
+      </p:sp>
+      <p:sp>
+        <p:nvSpPr>
+          <p:cNvPr id="5" name="Rectángulo 4">
+            <a:extLst>
+              <a:ext uri="{FF2B5EF4-FFF2-40B4-BE49-F238E27FC236}">
+                <a16:creationId xmlns:a16="http://schemas.microsoft.com/office/drawing/2014/main" id="{ACD3BEAF-A84D-7241-2F94-F69626EF6CF4}"/>
+              </a:ext>
+            </a:extLst>
+          </p:cNvPr>
+          <p:cNvSpPr/>
+          <p:nvPr/>
+        </p:nvSpPr>
+        <p:spPr>
+          <a:xfrm>
+            <a:off x="609441" y="1463032"/>
+            <a:ext cx="5486559" cy="4023368"/>
+          </a:xfrm>
+          <a:prstGeom prst="rect">
+            <a:avLst/>
+          </a:prstGeom>
+          <a:noFill/>
+          <a:ln w="28575">
+            <a:solidFill>
+              <a:srgbClr val="E0700D"/>
+            </a:solidFill>
+          </a:ln>
+        </p:spPr>
+        <p:style>
+          <a:lnRef idx="2">
+            <a:schemeClr val="accent1">
+              <a:shade val="15000"/>
+            </a:schemeClr>
+          </a:lnRef>
+          <a:fillRef idx="1">
+            <a:schemeClr val="accent1"/>
+          </a:fillRef>
+          <a:effectRef idx="0">
+            <a:schemeClr val="accent1"/>
+          </a:effectRef>
+          <a:fontRef idx="minor">
+            <a:schemeClr val="lt1"/>
+          </a:fontRef>
+        </p:style>
+        <p:txBody>
+          <a:bodyPr rtlCol="0" anchor="ctr"/>
+          <a:lstStyle/>
+          <a:p>
+            <a:pPr algn="ctr"/>
+            <a:endParaRPr lang="en-US"/>
+          </a:p>
+        </p:txBody>
+      </p:sp>
+      <p:sp>
+        <p:nvSpPr>
+          <p:cNvPr id="8" name="object 16">
+            <a:extLst>
+              <a:ext uri="{FF2B5EF4-FFF2-40B4-BE49-F238E27FC236}">
+                <a16:creationId xmlns:a16="http://schemas.microsoft.com/office/drawing/2014/main" id="{A0E47921-9CAD-BE16-8766-F2637E477742}"/>
+              </a:ext>
+            </a:extLst>
+          </p:cNvPr>
+          <p:cNvSpPr txBox="1">
+            <a:spLocks noGrp="1"/>
+          </p:cNvSpPr>
+          <p:nvPr>
+            <p:ph type="title"/>
+          </p:nvPr>
+        </p:nvSpPr>
+        <p:spPr>
+          <a:xfrm>
+            <a:off x="631254" y="194877"/>
+            <a:ext cx="10994410" cy="782265"/>
+          </a:xfrm>
+          <a:prstGeom prst="rect">
+            <a:avLst/>
+          </a:prstGeom>
+        </p:spPr>
+        <p:txBody>
+          <a:bodyPr vert="horz" wrap="square" lIns="0" tIns="12700" rIns="0" bIns="0" rtlCol="0">
+            <a:spAutoFit/>
+          </a:bodyPr>
+          <a:lstStyle/>
+          <a:p>
+            <a:pPr marL="12700">
+              <a:lnSpc>
+                <a:spcPct val="100000"/>
+              </a:lnSpc>
+              <a:spcBef>
+                <a:spcPts val="100"/>
+              </a:spcBef>
+            </a:pPr>
+            <a:r>
+              <a:rPr lang="en-US" sz="2400" b="1" dirty="0"/>
+              <a:t>ASSESSMENT #1 </a:t>
+            </a:r>
+            <a:r>
+              <a:rPr lang="en-US" sz="2500" dirty="0"/>
+              <a:t>– Recap from theory – MZI configurations</a:t>
+            </a:r>
+            <a:br>
+              <a:rPr lang="es-ES" sz="2500" spc="-5" dirty="0">
+                <a:latin typeface="+mj-lt"/>
+                <a:cs typeface="Lucida Sans"/>
+              </a:rPr>
+            </a:br>
+            <a:endParaRPr sz="2500" b="0" dirty="0">
+              <a:latin typeface="+mj-lt"/>
+              <a:cs typeface="Lucida Sans"/>
+            </a:endParaRPr>
+          </a:p>
+        </p:txBody>
+      </p:sp>
+      <p:sp>
+        <p:nvSpPr>
+          <p:cNvPr id="12" name="TextBox 11">
+            <a:extLst>
+              <a:ext uri="{FF2B5EF4-FFF2-40B4-BE49-F238E27FC236}">
+                <a16:creationId xmlns:a16="http://schemas.microsoft.com/office/drawing/2014/main" id="{ABA48397-B8E2-0C0B-7C22-27A8D3DE4320}"/>
+              </a:ext>
+            </a:extLst>
+          </p:cNvPr>
+          <p:cNvSpPr txBox="1"/>
+          <p:nvPr/>
+        </p:nvSpPr>
+        <p:spPr>
+          <a:xfrm>
+            <a:off x="566336" y="828306"/>
+            <a:ext cx="6128794" cy="369332"/>
+          </a:xfrm>
+          <a:prstGeom prst="rect">
+            <a:avLst/>
+          </a:prstGeom>
+          <a:noFill/>
+        </p:spPr>
+        <p:txBody>
+          <a:bodyPr wrap="square">
+            <a:spAutoFit/>
+          </a:bodyPr>
+          <a:lstStyle/>
+          <a:p>
+            <a:r>
+              <a:rPr lang="en-US" sz="1800" dirty="0"/>
+              <a:t>SOI Balanced configuration</a:t>
+            </a:r>
+            <a:endParaRPr lang="es-CO" dirty="0"/>
+          </a:p>
+        </p:txBody>
+      </p:sp>
+      <p:sp>
+        <p:nvSpPr>
+          <p:cNvPr id="4" name="TextBox 3">
+            <a:extLst>
+              <a:ext uri="{FF2B5EF4-FFF2-40B4-BE49-F238E27FC236}">
+                <a16:creationId xmlns:a16="http://schemas.microsoft.com/office/drawing/2014/main" id="{EED4FD69-D330-5778-59DB-8ABD7DCC1663}"/>
+              </a:ext>
+            </a:extLst>
+          </p:cNvPr>
+          <p:cNvSpPr txBox="1"/>
+          <p:nvPr/>
+        </p:nvSpPr>
+        <p:spPr>
+          <a:xfrm>
+            <a:off x="6324600" y="1463032"/>
+            <a:ext cx="5638333" cy="646331"/>
+          </a:xfrm>
+          <a:prstGeom prst="rect">
+            <a:avLst/>
+          </a:prstGeom>
+          <a:noFill/>
+        </p:spPr>
+        <p:txBody>
+          <a:bodyPr wrap="square">
+            <a:spAutoFit/>
+          </a:bodyPr>
+          <a:lstStyle/>
+          <a:p>
+            <a:r>
+              <a:rPr lang="en-US" b="1" dirty="0"/>
+              <a:t>What happens to the output transmission if the coupling ratio deviates from 50:50?</a:t>
+            </a:r>
+          </a:p>
+        </p:txBody>
+      </p:sp>
+      <mc:AlternateContent xmlns:mc="http://schemas.openxmlformats.org/markup-compatibility/2006">
+        <mc:Choice xmlns:a14="http://schemas.microsoft.com/office/drawing/2010/main" Requires="a14">
+          <p:sp>
+            <p:nvSpPr>
+              <p:cNvPr id="9" name="TextBox 8">
+                <a:extLst>
+                  <a:ext uri="{FF2B5EF4-FFF2-40B4-BE49-F238E27FC236}">
+                    <a16:creationId xmlns:a16="http://schemas.microsoft.com/office/drawing/2014/main" id="{F6E18467-2092-57A6-0FAF-0678C97C1102}"/>
+                  </a:ext>
+                </a:extLst>
+              </p:cNvPr>
+              <p:cNvSpPr txBox="1"/>
+              <p:nvPr/>
+            </p:nvSpPr>
+            <p:spPr>
+              <a:xfrm>
+                <a:off x="6324600" y="2113151"/>
+                <a:ext cx="5637600" cy="3139321"/>
+              </a:xfrm>
+              <a:prstGeom prst="rect">
+                <a:avLst/>
+              </a:prstGeom>
+              <a:noFill/>
+            </p:spPr>
+            <p:txBody>
+              <a:bodyPr wrap="square">
+                <a:spAutoFit/>
+              </a:bodyPr>
+              <a:lstStyle/>
+              <a:p>
+                <a:pPr algn="just"/>
+                <a:r>
+                  <a:rPr lang="en-US" dirty="0"/>
+                  <a:t>In an ideal 50:50 Mach–Zehnder interferometer, interference can be fully constructive or fully destructive, resulting in a maximum extinction ratio. However, if the coupling coefficient </a:t>
+                </a:r>
+                <a14:m>
+                  <m:oMath xmlns:m="http://schemas.openxmlformats.org/officeDocument/2006/math">
+                    <m:r>
+                      <a:rPr lang="en-US" i="1" dirty="0" smtClean="0">
+                        <a:latin typeface="Cambria Math" panose="02040503050406030204" pitchFamily="18" charset="0"/>
+                      </a:rPr>
+                      <m:t>𝐾</m:t>
+                    </m:r>
+                  </m:oMath>
+                </a14:m>
+                <a:r>
+                  <a:rPr lang="en-US" dirty="0"/>
+                  <a:t> deviates from 0.5, the field amplitudes in the arms become unequal. As a result, complete destructive interference cannot be achieved, the maximum transmission is reduced, the minimum transmission increases, and the extinction ratio degrades. However, this can be useful if the desired application is a splitter or a combiner, and it can also be useful if signal attenuation is required.</a:t>
+                </a:r>
+              </a:p>
+            </p:txBody>
+          </p:sp>
+        </mc:Choice>
+        <mc:Fallback>
+          <p:sp>
+            <p:nvSpPr>
+              <p:cNvPr id="9" name="TextBox 8">
+                <a:extLst>
+                  <a:ext uri="{FF2B5EF4-FFF2-40B4-BE49-F238E27FC236}">
+                    <a16:creationId xmlns:a16="http://schemas.microsoft.com/office/drawing/2014/main" id="{F6E18467-2092-57A6-0FAF-0678C97C1102}"/>
+                  </a:ext>
+                </a:extLst>
+              </p:cNvPr>
+              <p:cNvSpPr txBox="1">
+                <a:spLocks noRot="1" noChangeAspect="1" noMove="1" noResize="1" noEditPoints="1" noAdjustHandles="1" noChangeArrowheads="1" noChangeShapeType="1" noTextEdit="1"/>
+              </p:cNvSpPr>
+              <p:nvPr/>
+            </p:nvSpPr>
+            <p:spPr>
+              <a:xfrm>
+                <a:off x="6324600" y="2113151"/>
+                <a:ext cx="5637600" cy="3139321"/>
+              </a:xfrm>
+              <a:prstGeom prst="rect">
+                <a:avLst/>
+              </a:prstGeom>
+              <a:blipFill>
+                <a:blip r:embed="rId6"/>
+                <a:stretch>
+                  <a:fillRect l="-974" t="-1165" r="-974" b="-2136"/>
+                </a:stretch>
+              </a:blipFill>
+            </p:spPr>
+            <p:txBody>
+              <a:bodyPr/>
+              <a:lstStyle/>
+              <a:p>
+                <a:r>
+                  <a:rPr lang="en-US">
+                    <a:noFill/>
+                  </a:rPr>
+                  <a:t> </a:t>
+                </a:r>
+              </a:p>
+            </p:txBody>
+          </p:sp>
+        </mc:Fallback>
+      </mc:AlternateContent>
+    </p:spTree>
+    <p:extLst>
+      <p:ext uri="{BB962C8B-B14F-4D97-AF65-F5344CB8AC3E}">
+        <p14:creationId xmlns:p14="http://schemas.microsoft.com/office/powerpoint/2010/main" val="2844045076"/>
+      </p:ext>
+    </p:extLst>
+  </p:cSld>
+  <p:clrMapOvr>
+    <a:masterClrMapping/>
+  </p:clrMapOvr>
+</p:sld>
+</file>
+
+<file path=ppt/slides/slide6.xml><?xml version="1.0" encoding="utf-8"?>
+<p:sld xmlns:a="http://schemas.openxmlformats.org/drawingml/2006/main" xmlns:r="http://schemas.openxmlformats.org/officeDocument/2006/relationships" xmlns:p="http://schemas.openxmlformats.org/presentationml/2006/main">
+  <p:cSld>
+    <p:spTree>
+      <p:nvGrpSpPr>
+        <p:cNvPr id="1" name="">
+          <a:extLst>
+            <a:ext uri="{FF2B5EF4-FFF2-40B4-BE49-F238E27FC236}">
+              <a16:creationId xmlns:a16="http://schemas.microsoft.com/office/drawing/2014/main" id="{0C462A6B-BF43-4BAF-760F-2939299A8033}"/>
+            </a:ext>
+          </a:extLst>
+        </p:cNvPr>
+        <p:cNvGrpSpPr/>
+        <p:nvPr/>
+      </p:nvGrpSpPr>
+      <p:grpSpPr>
+        <a:xfrm>
+          <a:off x="0" y="0"/>
+          <a:ext cx="0" cy="0"/>
+          <a:chOff x="0" y="0"/>
+          <a:chExt cx="0" cy="0"/>
+        </a:xfrm>
+      </p:grpSpPr>
+      <p:pic>
+        <p:nvPicPr>
+          <p:cNvPr id="9" name="Picture 8">
+            <a:extLst>
+              <a:ext uri="{FF2B5EF4-FFF2-40B4-BE49-F238E27FC236}">
+                <a16:creationId xmlns:a16="http://schemas.microsoft.com/office/drawing/2014/main" id="{CBBEF488-CB29-2CD7-6E73-96197E606D52}"/>
+              </a:ext>
+            </a:extLst>
+          </p:cNvPr>
+          <p:cNvPicPr>
+            <a:picLocks noChangeAspect="1"/>
+          </p:cNvPicPr>
+          <p:nvPr/>
+        </p:nvPicPr>
+        <p:blipFill>
+          <a:blip r:embed="rId3">
+            <a:extLst>
+              <a:ext uri="{28A0092B-C50C-407E-A947-70E740481C1C}">
+                <a14:useLocalDpi xmlns:a14="http://schemas.microsoft.com/office/drawing/2010/main" val="0"/>
+              </a:ext>
+            </a:extLst>
+          </a:blip>
+          <a:stretch>
+            <a:fillRect/>
+          </a:stretch>
+        </p:blipFill>
+        <p:spPr>
+          <a:xfrm>
+            <a:off x="678094" y="1463032"/>
+            <a:ext cx="5349251" cy="4023368"/>
+          </a:xfrm>
+          <a:prstGeom prst="rect">
+            <a:avLst/>
+          </a:prstGeom>
+        </p:spPr>
+      </p:pic>
+      <p:pic>
+        <p:nvPicPr>
+          <p:cNvPr id="83" name="Gráfico 82">
+            <a:extLst>
+              <a:ext uri="{FF2B5EF4-FFF2-40B4-BE49-F238E27FC236}">
+                <a16:creationId xmlns:a16="http://schemas.microsoft.com/office/drawing/2014/main" id="{3635A02F-60B7-0FD8-F575-33C1620C1963}"/>
+              </a:ext>
+            </a:extLst>
+          </p:cNvPr>
+          <p:cNvPicPr>
+            <a:picLocks noChangeAspect="1"/>
+          </p:cNvPicPr>
+          <p:nvPr/>
+        </p:nvPicPr>
+        <p:blipFill>
+          <a:blip r:embed="rId4">
+            <a:extLst>
+              <a:ext uri="{96DAC541-7B7A-43D3-8B79-37D633B846F1}">
+                <asvg:svgBlip xmlns:asvg="http://schemas.microsoft.com/office/drawing/2016/SVG/main" r:embed="rId5"/>
+              </a:ext>
+            </a:extLst>
+          </a:blip>
+          <a:stretch>
+            <a:fillRect/>
+          </a:stretch>
+        </p:blipFill>
+        <p:spPr>
+          <a:xfrm>
+            <a:off x="5045006" y="6356057"/>
+            <a:ext cx="6409575" cy="363174"/>
+          </a:xfrm>
+          <a:prstGeom prst="rect">
+            <a:avLst/>
+          </a:prstGeom>
+        </p:spPr>
+      </p:pic>
+      <p:sp>
+        <p:nvSpPr>
+          <p:cNvPr id="84" name="Marcador de número de diapositiva 83">
+            <a:extLst>
+              <a:ext uri="{FF2B5EF4-FFF2-40B4-BE49-F238E27FC236}">
+                <a16:creationId xmlns:a16="http://schemas.microsoft.com/office/drawing/2014/main" id="{618FD2E0-0817-E282-B12B-08F8608E9C10}"/>
+              </a:ext>
+            </a:extLst>
+          </p:cNvPr>
+          <p:cNvSpPr>
+            <a:spLocks noGrp="1"/>
+          </p:cNvSpPr>
+          <p:nvPr>
+            <p:ph type="sldNum" sz="quarter" idx="7"/>
+          </p:nvPr>
+        </p:nvSpPr>
+        <p:spPr/>
+        <p:txBody>
+          <a:bodyPr/>
+          <a:lstStyle/>
+          <a:p>
+            <a:fld id="{B6F15528-21DE-4FAA-801E-634DDDAF4B2B}" type="slidenum">
+              <a:rPr lang="es-ES" smtClean="0"/>
+              <a:t>6</a:t>
+            </a:fld>
+            <a:endParaRPr lang="es-ES"/>
+          </a:p>
+        </p:txBody>
+      </p:sp>
+      <p:sp>
+        <p:nvSpPr>
+          <p:cNvPr id="3" name="Marcador de pie de página 2">
+            <a:extLst>
+              <a:ext uri="{FF2B5EF4-FFF2-40B4-BE49-F238E27FC236}">
+                <a16:creationId xmlns:a16="http://schemas.microsoft.com/office/drawing/2014/main" id="{C9173549-51EC-02EB-0186-5057D991ADBD}"/>
+              </a:ext>
+            </a:extLst>
+          </p:cNvPr>
+          <p:cNvSpPr>
+            <a:spLocks noGrp="1"/>
+          </p:cNvSpPr>
+          <p:nvPr>
+            <p:ph type="ftr" sz="quarter" idx="5"/>
+          </p:nvPr>
+        </p:nvSpPr>
+        <p:spPr/>
+        <p:txBody>
+          <a:bodyPr/>
+          <a:lstStyle/>
+          <a:p>
+            <a:pPr marL="12700">
+              <a:spcBef>
+                <a:spcPts val="15"/>
+              </a:spcBef>
+            </a:pPr>
+            <a:r>
+              <a:rPr lang="es-ES" spc="-5"/>
+              <a:t>LAB 1.0. WAVEGUIDES</a:t>
+            </a:r>
+            <a:endParaRPr lang="es-ES" spc="-5" dirty="0"/>
+          </a:p>
+        </p:txBody>
+      </p:sp>
+      <p:sp>
+        <p:nvSpPr>
+          <p:cNvPr id="5" name="Rectángulo 4">
+            <a:extLst>
+              <a:ext uri="{FF2B5EF4-FFF2-40B4-BE49-F238E27FC236}">
+                <a16:creationId xmlns:a16="http://schemas.microsoft.com/office/drawing/2014/main" id="{9665459D-3514-0D93-23FF-255E97315890}"/>
+              </a:ext>
+            </a:extLst>
+          </p:cNvPr>
+          <p:cNvSpPr/>
+          <p:nvPr/>
+        </p:nvSpPr>
+        <p:spPr>
+          <a:xfrm>
+            <a:off x="609441" y="1463032"/>
+            <a:ext cx="5486559" cy="4023368"/>
+          </a:xfrm>
+          <a:prstGeom prst="rect">
+            <a:avLst/>
+          </a:prstGeom>
+          <a:noFill/>
+          <a:ln w="28575">
+            <a:solidFill>
+              <a:srgbClr val="E0700D"/>
+            </a:solidFill>
+          </a:ln>
+        </p:spPr>
+        <p:style>
+          <a:lnRef idx="2">
+            <a:schemeClr val="accent1">
+              <a:shade val="15000"/>
+            </a:schemeClr>
+          </a:lnRef>
+          <a:fillRef idx="1">
+            <a:schemeClr val="accent1"/>
+          </a:fillRef>
+          <a:effectRef idx="0">
+            <a:schemeClr val="accent1"/>
+          </a:effectRef>
+          <a:fontRef idx="minor">
+            <a:schemeClr val="lt1"/>
+          </a:fontRef>
+        </p:style>
+        <p:txBody>
+          <a:bodyPr rtlCol="0" anchor="ctr"/>
+          <a:lstStyle/>
+          <a:p>
+            <a:pPr algn="ctr"/>
+            <a:endParaRPr lang="en-US"/>
+          </a:p>
+        </p:txBody>
+      </p:sp>
+      <p:sp>
+        <p:nvSpPr>
+          <p:cNvPr id="8" name="object 16">
+            <a:extLst>
+              <a:ext uri="{FF2B5EF4-FFF2-40B4-BE49-F238E27FC236}">
+                <a16:creationId xmlns:a16="http://schemas.microsoft.com/office/drawing/2014/main" id="{70EF9925-31C6-ACC1-E26C-F977E5A5DDA0}"/>
+              </a:ext>
+            </a:extLst>
+          </p:cNvPr>
+          <p:cNvSpPr txBox="1">
+            <a:spLocks noGrp="1"/>
+          </p:cNvSpPr>
+          <p:nvPr>
+            <p:ph type="title"/>
+          </p:nvPr>
+        </p:nvSpPr>
+        <p:spPr>
+          <a:xfrm>
+            <a:off x="631254" y="194877"/>
+            <a:ext cx="10994410" cy="782265"/>
+          </a:xfrm>
+          <a:prstGeom prst="rect">
+            <a:avLst/>
+          </a:prstGeom>
+        </p:spPr>
+        <p:txBody>
+          <a:bodyPr vert="horz" wrap="square" lIns="0" tIns="12700" rIns="0" bIns="0" rtlCol="0">
+            <a:spAutoFit/>
+          </a:bodyPr>
+          <a:lstStyle/>
+          <a:p>
+            <a:pPr marL="12700">
+              <a:lnSpc>
+                <a:spcPct val="100000"/>
+              </a:lnSpc>
+              <a:spcBef>
+                <a:spcPts val="100"/>
+              </a:spcBef>
+            </a:pPr>
+            <a:r>
+              <a:rPr lang="en-US" sz="2400" b="1" dirty="0"/>
+              <a:t>ASSESSMENT #1 </a:t>
+            </a:r>
+            <a:r>
+              <a:rPr lang="en-US" sz="2500" dirty="0"/>
+              <a:t>– Recap from theory – MZI configurations</a:t>
+            </a:r>
+            <a:br>
+              <a:rPr lang="es-ES" sz="2500" spc="-5" dirty="0">
+                <a:latin typeface="+mj-lt"/>
+                <a:cs typeface="Lucida Sans"/>
+              </a:rPr>
+            </a:br>
+            <a:endParaRPr sz="2500" b="0" dirty="0">
+              <a:latin typeface="+mj-lt"/>
+              <a:cs typeface="Lucida Sans"/>
+            </a:endParaRPr>
+          </a:p>
+        </p:txBody>
+      </p:sp>
+      <p:sp>
+        <p:nvSpPr>
+          <p:cNvPr id="12" name="TextBox 11">
+            <a:extLst>
+              <a:ext uri="{FF2B5EF4-FFF2-40B4-BE49-F238E27FC236}">
+                <a16:creationId xmlns:a16="http://schemas.microsoft.com/office/drawing/2014/main" id="{69666EBE-747C-697A-AD99-7BF699A7870E}"/>
+              </a:ext>
+            </a:extLst>
+          </p:cNvPr>
+          <p:cNvSpPr txBox="1"/>
+          <p:nvPr/>
+        </p:nvSpPr>
+        <p:spPr>
+          <a:xfrm>
+            <a:off x="566336" y="828306"/>
+            <a:ext cx="6128794" cy="369332"/>
+          </a:xfrm>
+          <a:prstGeom prst="rect">
+            <a:avLst/>
+          </a:prstGeom>
+          <a:noFill/>
+        </p:spPr>
+        <p:txBody>
+          <a:bodyPr wrap="square">
+            <a:spAutoFit/>
+          </a:bodyPr>
+          <a:lstStyle/>
+          <a:p>
+            <a:r>
+              <a:rPr lang="en-US" sz="1800" dirty="0"/>
+              <a:t>SOI Balanced configuration</a:t>
+            </a:r>
+            <a:endParaRPr lang="es-CO" dirty="0"/>
+          </a:p>
+        </p:txBody>
+      </p:sp>
+      <mc:AlternateContent xmlns:mc="http://schemas.openxmlformats.org/markup-compatibility/2006">
+        <mc:Choice xmlns:a14="http://schemas.microsoft.com/office/drawing/2010/main" Requires="a14">
+          <p:sp>
+            <p:nvSpPr>
+              <p:cNvPr id="4" name="TextBox 3">
+                <a:extLst>
+                  <a:ext uri="{FF2B5EF4-FFF2-40B4-BE49-F238E27FC236}">
+                    <a16:creationId xmlns:a16="http://schemas.microsoft.com/office/drawing/2014/main" id="{CB34C45B-48C3-DAF3-CF92-59CB8093DF0F}"/>
+                  </a:ext>
+                </a:extLst>
+              </p:cNvPr>
+              <p:cNvSpPr txBox="1"/>
+              <p:nvPr/>
+            </p:nvSpPr>
+            <p:spPr>
+              <a:xfrm>
+                <a:off x="6324600" y="1463032"/>
+                <a:ext cx="5638333" cy="646331"/>
+              </a:xfrm>
+              <a:prstGeom prst="rect">
+                <a:avLst/>
+              </a:prstGeom>
+              <a:noFill/>
+            </p:spPr>
+            <p:txBody>
+              <a:bodyPr wrap="square">
+                <a:spAutoFit/>
+              </a:bodyPr>
+              <a:lstStyle/>
+              <a:p>
+                <a:r>
+                  <a:rPr lang="en-US" b="1" dirty="0"/>
+                  <a:t>How does excess loss </a:t>
+                </a:r>
+                <a14:m>
+                  <m:oMath xmlns:m="http://schemas.openxmlformats.org/officeDocument/2006/math">
+                    <m:r>
+                      <a:rPr lang="en-US" b="1" i="1" dirty="0" smtClean="0">
+                        <a:latin typeface="Cambria Math" panose="02040503050406030204" pitchFamily="18" charset="0"/>
+                      </a:rPr>
+                      <m:t>(</m:t>
+                    </m:r>
+                    <m:r>
+                      <a:rPr lang="en-US" b="1" i="1" dirty="0" smtClean="0">
+                        <a:latin typeface="Cambria Math" panose="02040503050406030204" pitchFamily="18" charset="0"/>
+                      </a:rPr>
+                      <m:t>𝜸</m:t>
+                    </m:r>
+                    <m:r>
+                      <a:rPr lang="en-US" b="1" i="1" dirty="0" smtClean="0">
+                        <a:latin typeface="Cambria Math" panose="02040503050406030204" pitchFamily="18" charset="0"/>
+                      </a:rPr>
+                      <m:t>≠</m:t>
+                    </m:r>
+                    <m:r>
+                      <a:rPr lang="en-US" b="1" i="1" dirty="0">
+                        <a:latin typeface="Cambria Math" panose="02040503050406030204" pitchFamily="18" charset="0"/>
+                      </a:rPr>
+                      <m:t>𝟎</m:t>
+                    </m:r>
+                  </m:oMath>
+                </a14:m>
+                <a:r>
+                  <a:rPr lang="en-US" b="1" dirty="0"/>
+                  <a:t>) affect the output ports in a balanced MZI?</a:t>
+                </a:r>
+              </a:p>
+            </p:txBody>
+          </p:sp>
+        </mc:Choice>
+        <mc:Fallback>
+          <p:sp>
+            <p:nvSpPr>
+              <p:cNvPr id="4" name="TextBox 3">
+                <a:extLst>
+                  <a:ext uri="{FF2B5EF4-FFF2-40B4-BE49-F238E27FC236}">
+                    <a16:creationId xmlns:a16="http://schemas.microsoft.com/office/drawing/2014/main" id="{CB34C45B-48C3-DAF3-CF92-59CB8093DF0F}"/>
+                  </a:ext>
+                </a:extLst>
+              </p:cNvPr>
+              <p:cNvSpPr txBox="1">
+                <a:spLocks noRot="1" noChangeAspect="1" noMove="1" noResize="1" noEditPoints="1" noAdjustHandles="1" noChangeArrowheads="1" noChangeShapeType="1" noTextEdit="1"/>
+              </p:cNvSpPr>
+              <p:nvPr/>
+            </p:nvSpPr>
+            <p:spPr>
+              <a:xfrm>
+                <a:off x="6324600" y="1463032"/>
+                <a:ext cx="5638333" cy="646331"/>
+              </a:xfrm>
+              <a:prstGeom prst="rect">
+                <a:avLst/>
+              </a:prstGeom>
+              <a:blipFill>
+                <a:blip r:embed="rId6"/>
+                <a:stretch>
+                  <a:fillRect l="-974" t="-5660" r="-974" b="-14151"/>
+                </a:stretch>
+              </a:blipFill>
+            </p:spPr>
+            <p:txBody>
+              <a:bodyPr/>
+              <a:lstStyle/>
+              <a:p>
+                <a:r>
+                  <a:rPr lang="en-US">
+                    <a:noFill/>
+                  </a:rPr>
+                  <a:t> </a:t>
+                </a:r>
+              </a:p>
+            </p:txBody>
+          </p:sp>
+        </mc:Fallback>
+      </mc:AlternateContent>
+      <p:sp>
+        <p:nvSpPr>
+          <p:cNvPr id="2" name="TextBox 1">
+            <a:extLst>
+              <a:ext uri="{FF2B5EF4-FFF2-40B4-BE49-F238E27FC236}">
+                <a16:creationId xmlns:a16="http://schemas.microsoft.com/office/drawing/2014/main" id="{A9B2ADFD-5E53-B3AD-D8EC-974E0F2D8BD9}"/>
+              </a:ext>
+            </a:extLst>
+          </p:cNvPr>
+          <p:cNvSpPr txBox="1"/>
+          <p:nvPr/>
+        </p:nvSpPr>
+        <p:spPr>
+          <a:xfrm>
+            <a:off x="6324600" y="2120655"/>
+            <a:ext cx="5637600" cy="1754326"/>
+          </a:xfrm>
+          <a:prstGeom prst="rect">
+            <a:avLst/>
+          </a:prstGeom>
+          <a:noFill/>
+        </p:spPr>
+        <p:txBody>
+          <a:bodyPr wrap="square">
+            <a:spAutoFit/>
+          </a:bodyPr>
+          <a:lstStyle/>
+          <a:p>
+            <a:r>
+              <a:rPr lang="en-US" dirty="0"/>
+              <a:t>If in some scenario one of the arms produces a different attenuation, as mentioned before, the amplitudes in the arms are not equal, and the same phenomenon observed when the couplers are not 50:50 occurs. There is no complete destructive interference, the maximum decreases, and the extinction ratio is reduced.</a:t>
+            </a:r>
+          </a:p>
+        </p:txBody>
+      </p:sp>
+    </p:spTree>
+    <p:extLst>
+      <p:ext uri="{BB962C8B-B14F-4D97-AF65-F5344CB8AC3E}">
+        <p14:creationId xmlns:p14="http://schemas.microsoft.com/office/powerpoint/2010/main" val="2593433815"/>
+      </p:ext>
+    </p:extLst>
+  </p:cSld>
+  <p:clrMapOvr>
+    <a:masterClrMapping/>
+  </p:clrMapOvr>
+</p:sld>
+</file>
+
+<file path=ppt/slides/slide7.xml><?xml version="1.0" encoding="utf-8"?>
+<p:sld xmlns:a="http://schemas.openxmlformats.org/drawingml/2006/main" xmlns:r="http://schemas.openxmlformats.org/officeDocument/2006/relationships" xmlns:p="http://schemas.openxmlformats.org/presentationml/2006/main">
+  <p:cSld>
+    <p:spTree>
+      <p:nvGrpSpPr>
+        <p:cNvPr id="1" name="">
+          <a:extLst>
+            <a:ext uri="{FF2B5EF4-FFF2-40B4-BE49-F238E27FC236}">
               <a16:creationId xmlns:a16="http://schemas.microsoft.com/office/drawing/2014/main" id="{1525AB88-A787-2C84-3A44-2B634D87FB5B}"/>
             </a:ext>
           </a:extLst>
@@ -5082,7 +7487,7 @@
           <a:p>
             <a:fld id="{B6F15528-21DE-4FAA-801E-634DDDAF4B2B}" type="slidenum">
               <a:rPr lang="es-ES" smtClean="0"/>
-              <a:t>4</a:t>
+              <a:t>7</a:t>
             </a:fld>
             <a:endParaRPr lang="es-ES"/>
           </a:p>
@@ -5531,7 +7936,7 @@
 </p:sld>
 </file>
 
-<file path=ppt/slides/slide5.xml><?xml version="1.0" encoding="utf-8"?>
+<file path=ppt/slides/slide8.xml><?xml version="1.0" encoding="utf-8"?>
 <p:sld xmlns:a="http://schemas.openxmlformats.org/drawingml/2006/main" xmlns:r="http://schemas.openxmlformats.org/officeDocument/2006/relationships" xmlns:p="http://schemas.openxmlformats.org/presentationml/2006/main">
   <p:cSld>
     <p:spTree>
@@ -5673,7 +8078,7 @@
           <a:p>
             <a:fld id="{B6F15528-21DE-4FAA-801E-634DDDAF4B2B}" type="slidenum">
               <a:rPr lang="es-ES" smtClean="0"/>
-              <a:t>5</a:t>
+              <a:t>8</a:t>
             </a:fld>
             <a:endParaRPr lang="es-ES"/>
           </a:p>
@@ -6259,7 +8664,7 @@
 </p:sld>
 </file>
 
-<file path=ppt/slides/slide6.xml><?xml version="1.0" encoding="utf-8"?>
+<file path=ppt/slides/slide9.xml><?xml version="1.0" encoding="utf-8"?>
 <p:sld xmlns:a="http://schemas.openxmlformats.org/drawingml/2006/main" xmlns:r="http://schemas.openxmlformats.org/officeDocument/2006/relationships" xmlns:p="http://schemas.openxmlformats.org/presentationml/2006/main">
   <p:cSld>
     <p:spTree>
@@ -6391,7 +8796,7 @@
           <a:p>
             <a:fld id="{B6F15528-21DE-4FAA-801E-634DDDAF4B2B}" type="slidenum">
               <a:rPr lang="es-ES" smtClean="0"/>
-              <a:t>6</a:t>
+              <a:t>9</a:t>
             </a:fld>
             <a:endParaRPr lang="es-ES"/>
           </a:p>
@@ -6681,159 +9086,6 @@
         <p14:creationId xmlns:p14="http://schemas.microsoft.com/office/powerpoint/2010/main" val="3660438245"/>
       </p:ext>
     </p:extLst>
-  </p:cSld>
-  <p:clrMapOvr>
-    <a:masterClrMapping/>
-  </p:clrMapOvr>
-</p:sld>
-</file>
-
-<file path=ppt/slides/slide7.xml><?xml version="1.0" encoding="utf-8"?>
-<p:sld xmlns:a="http://schemas.openxmlformats.org/drawingml/2006/main" xmlns:r="http://schemas.openxmlformats.org/officeDocument/2006/relationships" xmlns:p="http://schemas.openxmlformats.org/presentationml/2006/main">
-  <p:cSld>
-    <p:spTree>
-      <p:nvGrpSpPr>
-        <p:cNvPr id="1" name=""/>
-        <p:cNvGrpSpPr/>
-        <p:nvPr/>
-      </p:nvGrpSpPr>
-      <p:grpSpPr>
-        <a:xfrm>
-          <a:off x="0" y="0"/>
-          <a:ext cx="0" cy="0"/>
-          <a:chOff x="0" y="0"/>
-          <a:chExt cx="0" cy="0"/>
-        </a:xfrm>
-      </p:grpSpPr>
-      <p:sp>
-        <p:nvSpPr>
-          <p:cNvPr id="3" name="object 3"/>
-          <p:cNvSpPr/>
-          <p:nvPr/>
-        </p:nvSpPr>
-        <p:spPr>
-          <a:xfrm>
-            <a:off x="3945635" y="2636520"/>
-            <a:ext cx="8246363" cy="1584959"/>
-          </a:xfrm>
-          <a:prstGeom prst="rect">
-            <a:avLst/>
-          </a:prstGeom>
-          <a:blipFill>
-            <a:blip r:embed="rId2" cstate="print"/>
-            <a:stretch>
-              <a:fillRect/>
-            </a:stretch>
-          </a:blipFill>
-        </p:spPr>
-        <p:txBody>
-          <a:bodyPr wrap="square" lIns="0" tIns="0" rIns="0" bIns="0" rtlCol="0"/>
-          <a:lstStyle/>
-          <a:p>
-            <a:endParaRPr/>
-          </a:p>
-        </p:txBody>
-      </p:sp>
-      <p:sp>
-        <p:nvSpPr>
-          <p:cNvPr id="4" name="object 4"/>
-          <p:cNvSpPr txBox="1">
-            <a:spLocks noGrp="1"/>
-          </p:cNvSpPr>
-          <p:nvPr>
-            <p:ph type="title"/>
-          </p:nvPr>
-        </p:nvSpPr>
-        <p:spPr>
-          <a:xfrm>
-            <a:off x="4513326" y="3165729"/>
-            <a:ext cx="2233295" cy="513715"/>
-          </a:xfrm>
-          <a:prstGeom prst="rect">
-            <a:avLst/>
-          </a:prstGeom>
-        </p:spPr>
-        <p:txBody>
-          <a:bodyPr vert="horz" wrap="square" lIns="0" tIns="13335" rIns="0" bIns="0" rtlCol="0">
-            <a:spAutoFit/>
-          </a:bodyPr>
-          <a:lstStyle/>
-          <a:p>
-            <a:pPr marL="12700">
-              <a:lnSpc>
-                <a:spcPct val="100000"/>
-              </a:lnSpc>
-              <a:spcBef>
-                <a:spcPts val="105"/>
-              </a:spcBef>
-            </a:pPr>
-            <a:r>
-              <a:rPr sz="3200" b="1" spc="-5" dirty="0">
-                <a:solidFill>
-                  <a:srgbClr val="FFFFFF"/>
-                </a:solidFill>
-                <a:latin typeface="Lucida Sans"/>
-                <a:cs typeface="Lucida Sans"/>
-              </a:rPr>
-              <a:t>Thank</a:t>
-            </a:r>
-            <a:r>
-              <a:rPr sz="3200" b="1" spc="-55" dirty="0">
-                <a:solidFill>
-                  <a:srgbClr val="FFFFFF"/>
-                </a:solidFill>
-                <a:latin typeface="Lucida Sans"/>
-                <a:cs typeface="Lucida Sans"/>
-              </a:rPr>
-              <a:t> </a:t>
-            </a:r>
-            <a:r>
-              <a:rPr sz="3200" b="1" dirty="0">
-                <a:solidFill>
-                  <a:srgbClr val="FFFFFF"/>
-                </a:solidFill>
-                <a:latin typeface="Lucida Sans"/>
-                <a:cs typeface="Lucida Sans"/>
-              </a:rPr>
-              <a:t>you</a:t>
-            </a:r>
-            <a:endParaRPr sz="3200">
-              <a:latin typeface="Lucida Sans"/>
-              <a:cs typeface="Lucida Sans"/>
-            </a:endParaRPr>
-          </a:p>
-        </p:txBody>
-      </p:sp>
-      <p:sp>
-        <p:nvSpPr>
-          <p:cNvPr id="5" name="Marcador de número de diapositiva 4">
-            <a:extLst>
-              <a:ext uri="{FF2B5EF4-FFF2-40B4-BE49-F238E27FC236}">
-                <a16:creationId xmlns:a16="http://schemas.microsoft.com/office/drawing/2014/main" id="{B052DA19-AD24-7D24-2AE9-51F8F5A7F5E0}"/>
-              </a:ext>
-            </a:extLst>
-          </p:cNvPr>
-          <p:cNvSpPr>
-            <a:spLocks noGrp="1"/>
-          </p:cNvSpPr>
-          <p:nvPr>
-            <p:ph type="sldNum" sz="quarter" idx="7"/>
-          </p:nvPr>
-        </p:nvSpPr>
-        <p:spPr/>
-        <p:txBody>
-          <a:bodyPr/>
-          <a:lstStyle/>
-          <a:p>
-            <a:fld id="{B6F15528-21DE-4FAA-801E-634DDDAF4B2B}" type="slidenum">
-              <a:rPr lang="es-ES" smtClean="0"/>
-              <a:t>7</a:t>
-            </a:fld>
-            <a:endParaRPr lang="es-ES"/>
-          </a:p>
-        </p:txBody>
-      </p:sp>
-    </p:spTree>
   </p:cSld>
   <p:clrMapOvr>
     <a:masterClrMapping/>

--- a/LabBook_3.pptx
+++ b/LabBook_3.pptx
@@ -5,10 +5,10 @@
     <p:sldMasterId id="2147483648" r:id="rId1"/>
   </p:sldMasterIdLst>
   <p:notesMasterIdLst>
-    <p:notesMasterId r:id="rId12"/>
+    <p:notesMasterId r:id="rId14"/>
   </p:notesMasterIdLst>
   <p:handoutMasterIdLst>
-    <p:handoutMasterId r:id="rId13"/>
+    <p:handoutMasterId r:id="rId15"/>
   </p:handoutMasterIdLst>
   <p:sldIdLst>
     <p:sldId id="256" r:id="rId2"/>
@@ -17,10 +17,12 @@
     <p:sldId id="297" r:id="rId5"/>
     <p:sldId id="298" r:id="rId6"/>
     <p:sldId id="299" r:id="rId7"/>
-    <p:sldId id="295" r:id="rId8"/>
-    <p:sldId id="296" r:id="rId9"/>
-    <p:sldId id="293" r:id="rId10"/>
-    <p:sldId id="288" r:id="rId11"/>
+    <p:sldId id="302" r:id="rId8"/>
+    <p:sldId id="301" r:id="rId9"/>
+    <p:sldId id="295" r:id="rId10"/>
+    <p:sldId id="296" r:id="rId11"/>
+    <p:sldId id="293" r:id="rId12"/>
+    <p:sldId id="288" r:id="rId13"/>
   </p:sldIdLst>
   <p:sldSz cx="12192000" cy="6858000"/>
   <p:notesSz cx="12192000" cy="6858000"/>
@@ -1095,6 +1097,222 @@
         <p:cNvPr id="1" name="">
           <a:extLst>
             <a:ext uri="{FF2B5EF4-FFF2-40B4-BE49-F238E27FC236}">
+              <a16:creationId xmlns:a16="http://schemas.microsoft.com/office/drawing/2014/main" id="{F480DF4A-4DC1-3FBD-815E-55699DD9A357}"/>
+            </a:ext>
+          </a:extLst>
+        </p:cNvPr>
+        <p:cNvGrpSpPr/>
+        <p:nvPr/>
+      </p:nvGrpSpPr>
+      <p:grpSpPr>
+        <a:xfrm>
+          <a:off x="0" y="0"/>
+          <a:ext cx="0" cy="0"/>
+          <a:chOff x="0" y="0"/>
+          <a:chExt cx="0" cy="0"/>
+        </a:xfrm>
+      </p:grpSpPr>
+      <p:sp>
+        <p:nvSpPr>
+          <p:cNvPr id="2" name="Marcador de imagen de diapositiva 1">
+            <a:extLst>
+              <a:ext uri="{FF2B5EF4-FFF2-40B4-BE49-F238E27FC236}">
+                <a16:creationId xmlns:a16="http://schemas.microsoft.com/office/drawing/2014/main" id="{58D68894-585C-C9BD-FF52-8A29C2725D2C}"/>
+              </a:ext>
+            </a:extLst>
+          </p:cNvPr>
+          <p:cNvSpPr>
+            <a:spLocks noGrp="1" noRot="1" noChangeAspect="1"/>
+          </p:cNvSpPr>
+          <p:nvPr>
+            <p:ph type="sldImg"/>
+          </p:nvPr>
+        </p:nvSpPr>
+        <p:spPr/>
+      </p:sp>
+      <p:sp>
+        <p:nvSpPr>
+          <p:cNvPr id="3" name="Marcador de notas 2">
+            <a:extLst>
+              <a:ext uri="{FF2B5EF4-FFF2-40B4-BE49-F238E27FC236}">
+                <a16:creationId xmlns:a16="http://schemas.microsoft.com/office/drawing/2014/main" id="{33F032BD-A679-752B-79D6-3F70595CCF51}"/>
+              </a:ext>
+            </a:extLst>
+          </p:cNvPr>
+          <p:cNvSpPr>
+            <a:spLocks noGrp="1"/>
+          </p:cNvSpPr>
+          <p:nvPr>
+            <p:ph type="body" idx="1"/>
+          </p:nvPr>
+        </p:nvSpPr>
+        <p:spPr/>
+        <p:txBody>
+          <a:bodyPr/>
+          <a:lstStyle/>
+          <a:p>
+            <a:endParaRPr lang="es-ES" dirty="0"/>
+          </a:p>
+        </p:txBody>
+      </p:sp>
+      <p:sp>
+        <p:nvSpPr>
+          <p:cNvPr id="4" name="Marcador de número de diapositiva 3">
+            <a:extLst>
+              <a:ext uri="{FF2B5EF4-FFF2-40B4-BE49-F238E27FC236}">
+                <a16:creationId xmlns:a16="http://schemas.microsoft.com/office/drawing/2014/main" id="{6B6AFCEA-F6AE-6C8F-B0A8-220873D91381}"/>
+              </a:ext>
+            </a:extLst>
+          </p:cNvPr>
+          <p:cNvSpPr>
+            <a:spLocks noGrp="1"/>
+          </p:cNvSpPr>
+          <p:nvPr>
+            <p:ph type="sldNum" sz="quarter" idx="5"/>
+          </p:nvPr>
+        </p:nvSpPr>
+        <p:spPr/>
+        <p:txBody>
+          <a:bodyPr/>
+          <a:lstStyle/>
+          <a:p>
+            <a:fld id="{676223B9-C868-4436-87D9-1A3152E1157A}" type="slidenum">
+              <a:rPr lang="es-ES" smtClean="0"/>
+              <a:t>7</a:t>
+            </a:fld>
+            <a:endParaRPr lang="es-ES"/>
+          </a:p>
+        </p:txBody>
+      </p:sp>
+    </p:spTree>
+    <p:extLst>
+      <p:ext uri="{BB962C8B-B14F-4D97-AF65-F5344CB8AC3E}">
+        <p14:creationId xmlns:p14="http://schemas.microsoft.com/office/powerpoint/2010/main" val="2548641558"/>
+      </p:ext>
+    </p:extLst>
+  </p:cSld>
+  <p:clrMapOvr>
+    <a:masterClrMapping/>
+  </p:clrMapOvr>
+</p:notes>
+</file>
+
+<file path=ppt/notesSlides/notesSlide6.xml><?xml version="1.0" encoding="utf-8"?>
+<p:notes xmlns:a="http://schemas.openxmlformats.org/drawingml/2006/main" xmlns:r="http://schemas.openxmlformats.org/officeDocument/2006/relationships" xmlns:p="http://schemas.openxmlformats.org/presentationml/2006/main">
+  <p:cSld>
+    <p:spTree>
+      <p:nvGrpSpPr>
+        <p:cNvPr id="1" name="">
+          <a:extLst>
+            <a:ext uri="{FF2B5EF4-FFF2-40B4-BE49-F238E27FC236}">
+              <a16:creationId xmlns:a16="http://schemas.microsoft.com/office/drawing/2014/main" id="{91E9D6F1-D492-9472-2E2B-2B4893421CF8}"/>
+            </a:ext>
+          </a:extLst>
+        </p:cNvPr>
+        <p:cNvGrpSpPr/>
+        <p:nvPr/>
+      </p:nvGrpSpPr>
+      <p:grpSpPr>
+        <a:xfrm>
+          <a:off x="0" y="0"/>
+          <a:ext cx="0" cy="0"/>
+          <a:chOff x="0" y="0"/>
+          <a:chExt cx="0" cy="0"/>
+        </a:xfrm>
+      </p:grpSpPr>
+      <p:sp>
+        <p:nvSpPr>
+          <p:cNvPr id="2" name="Marcador de imagen de diapositiva 1">
+            <a:extLst>
+              <a:ext uri="{FF2B5EF4-FFF2-40B4-BE49-F238E27FC236}">
+                <a16:creationId xmlns:a16="http://schemas.microsoft.com/office/drawing/2014/main" id="{16C64C36-E3EB-0592-8A4A-8A6BB2D31DD4}"/>
+              </a:ext>
+            </a:extLst>
+          </p:cNvPr>
+          <p:cNvSpPr>
+            <a:spLocks noGrp="1" noRot="1" noChangeAspect="1"/>
+          </p:cNvSpPr>
+          <p:nvPr>
+            <p:ph type="sldImg"/>
+          </p:nvPr>
+        </p:nvSpPr>
+        <p:spPr/>
+      </p:sp>
+      <p:sp>
+        <p:nvSpPr>
+          <p:cNvPr id="3" name="Marcador de notas 2">
+            <a:extLst>
+              <a:ext uri="{FF2B5EF4-FFF2-40B4-BE49-F238E27FC236}">
+                <a16:creationId xmlns:a16="http://schemas.microsoft.com/office/drawing/2014/main" id="{67F79D21-FEEB-878A-512E-AF4852C4FC19}"/>
+              </a:ext>
+            </a:extLst>
+          </p:cNvPr>
+          <p:cNvSpPr>
+            <a:spLocks noGrp="1"/>
+          </p:cNvSpPr>
+          <p:nvPr>
+            <p:ph type="body" idx="1"/>
+          </p:nvPr>
+        </p:nvSpPr>
+        <p:spPr/>
+        <p:txBody>
+          <a:bodyPr/>
+          <a:lstStyle/>
+          <a:p>
+            <a:endParaRPr lang="es-ES" dirty="0"/>
+          </a:p>
+        </p:txBody>
+      </p:sp>
+      <p:sp>
+        <p:nvSpPr>
+          <p:cNvPr id="4" name="Marcador de número de diapositiva 3">
+            <a:extLst>
+              <a:ext uri="{FF2B5EF4-FFF2-40B4-BE49-F238E27FC236}">
+                <a16:creationId xmlns:a16="http://schemas.microsoft.com/office/drawing/2014/main" id="{639FD423-F6D2-2CFB-6C9E-D1287A7999C7}"/>
+              </a:ext>
+            </a:extLst>
+          </p:cNvPr>
+          <p:cNvSpPr>
+            <a:spLocks noGrp="1"/>
+          </p:cNvSpPr>
+          <p:nvPr>
+            <p:ph type="sldNum" sz="quarter" idx="5"/>
+          </p:nvPr>
+        </p:nvSpPr>
+        <p:spPr/>
+        <p:txBody>
+          <a:bodyPr/>
+          <a:lstStyle/>
+          <a:p>
+            <a:fld id="{676223B9-C868-4436-87D9-1A3152E1157A}" type="slidenum">
+              <a:rPr lang="es-ES" smtClean="0"/>
+              <a:t>8</a:t>
+            </a:fld>
+            <a:endParaRPr lang="es-ES"/>
+          </a:p>
+        </p:txBody>
+      </p:sp>
+    </p:spTree>
+    <p:extLst>
+      <p:ext uri="{BB962C8B-B14F-4D97-AF65-F5344CB8AC3E}">
+        <p14:creationId xmlns:p14="http://schemas.microsoft.com/office/powerpoint/2010/main" val="3312653969"/>
+      </p:ext>
+    </p:extLst>
+  </p:cSld>
+  <p:clrMapOvr>
+    <a:masterClrMapping/>
+  </p:clrMapOvr>
+</p:notes>
+</file>
+
+<file path=ppt/notesSlides/notesSlide7.xml><?xml version="1.0" encoding="utf-8"?>
+<p:notes xmlns:a="http://schemas.openxmlformats.org/drawingml/2006/main" xmlns:r="http://schemas.openxmlformats.org/officeDocument/2006/relationships" xmlns:p="http://schemas.openxmlformats.org/presentationml/2006/main">
+  <p:cSld>
+    <p:spTree>
+      <p:nvGrpSpPr>
+        <p:cNvPr id="1" name="">
+          <a:extLst>
+            <a:ext uri="{FF2B5EF4-FFF2-40B4-BE49-F238E27FC236}">
               <a16:creationId xmlns:a16="http://schemas.microsoft.com/office/drawing/2014/main" id="{812B2A21-C6A2-C5B9-2DCA-3754617037C3}"/>
             </a:ext>
           </a:extLst>
@@ -1176,7 +1394,7 @@
           <a:p>
             <a:fld id="{676223B9-C868-4436-87D9-1A3152E1157A}" type="slidenum">
               <a:rPr lang="es-ES" smtClean="0"/>
-              <a:t>7</a:t>
+              <a:t>9</a:t>
             </a:fld>
             <a:endParaRPr lang="es-ES"/>
           </a:p>
@@ -1195,7 +1413,7 @@
 </p:notes>
 </file>
 
-<file path=ppt/notesSlides/notesSlide6.xml><?xml version="1.0" encoding="utf-8"?>
+<file path=ppt/notesSlides/notesSlide8.xml><?xml version="1.0" encoding="utf-8"?>
 <p:notes xmlns:a="http://schemas.openxmlformats.org/drawingml/2006/main" xmlns:r="http://schemas.openxmlformats.org/officeDocument/2006/relationships" xmlns:p="http://schemas.openxmlformats.org/presentationml/2006/main">
   <p:cSld>
     <p:spTree>
@@ -1284,7 +1502,7 @@
           <a:p>
             <a:fld id="{676223B9-C868-4436-87D9-1A3152E1157A}" type="slidenum">
               <a:rPr lang="es-ES" smtClean="0"/>
-              <a:t>8</a:t>
+              <a:t>10</a:t>
             </a:fld>
             <a:endParaRPr lang="es-ES"/>
           </a:p>
@@ -1303,7 +1521,7 @@
 </p:notes>
 </file>
 
-<file path=ppt/notesSlides/notesSlide7.xml><?xml version="1.0" encoding="utf-8"?>
+<file path=ppt/notesSlides/notesSlide9.xml><?xml version="1.0" encoding="utf-8"?>
 <p:notes xmlns:a="http://schemas.openxmlformats.org/drawingml/2006/main" xmlns:r="http://schemas.openxmlformats.org/officeDocument/2006/relationships" xmlns:p="http://schemas.openxmlformats.org/presentationml/2006/main">
   <p:cSld>
     <p:spTree>
@@ -1392,7 +1610,7 @@
           <a:p>
             <a:fld id="{676223B9-C868-4436-87D9-1A3152E1157A}" type="slidenum">
               <a:rPr lang="es-ES" smtClean="0"/>
-              <a:t>9</a:t>
+              <a:t>11</a:t>
             </a:fld>
             <a:endParaRPr lang="es-ES"/>
           </a:p>
@@ -3057,6 +3275,1161 @@
   <p:cSld>
     <p:spTree>
       <p:nvGrpSpPr>
+        <p:cNvPr id="1" name="">
+          <a:extLst>
+            <a:ext uri="{FF2B5EF4-FFF2-40B4-BE49-F238E27FC236}">
+              <a16:creationId xmlns:a16="http://schemas.microsoft.com/office/drawing/2014/main" id="{98CB9552-DF22-1310-10FA-4D2D2AF77601}"/>
+            </a:ext>
+          </a:extLst>
+        </p:cNvPr>
+        <p:cNvGrpSpPr/>
+        <p:nvPr/>
+      </p:nvGrpSpPr>
+      <p:grpSpPr>
+        <a:xfrm>
+          <a:off x="0" y="0"/>
+          <a:ext cx="0" cy="0"/>
+          <a:chOff x="0" y="0"/>
+          <a:chExt cx="0" cy="0"/>
+        </a:xfrm>
+      </p:grpSpPr>
+      <p:pic>
+        <p:nvPicPr>
+          <p:cNvPr id="7" name="Picture 6">
+            <a:extLst>
+              <a:ext uri="{FF2B5EF4-FFF2-40B4-BE49-F238E27FC236}">
+                <a16:creationId xmlns:a16="http://schemas.microsoft.com/office/drawing/2014/main" id="{D2B1D355-5109-0E07-710B-F30BE837DDD7}"/>
+              </a:ext>
+            </a:extLst>
+          </p:cNvPr>
+          <p:cNvPicPr>
+            <a:picLocks noChangeAspect="1"/>
+          </p:cNvPicPr>
+          <p:nvPr/>
+        </p:nvPicPr>
+        <p:blipFill>
+          <a:blip r:embed="rId3">
+            <a:extLst>
+              <a:ext uri="{28A0092B-C50C-407E-A947-70E740481C1C}">
+                <a14:useLocalDpi xmlns:a14="http://schemas.microsoft.com/office/drawing/2010/main" val="0"/>
+              </a:ext>
+            </a:extLst>
+          </a:blip>
+          <a:stretch>
+            <a:fillRect/>
+          </a:stretch>
+        </p:blipFill>
+        <p:spPr>
+          <a:xfrm>
+            <a:off x="6404678" y="2178534"/>
+            <a:ext cx="5349251" cy="4023368"/>
+          </a:xfrm>
+          <a:prstGeom prst="rect">
+            <a:avLst/>
+          </a:prstGeom>
+        </p:spPr>
+      </p:pic>
+      <p:sp>
+        <p:nvSpPr>
+          <p:cNvPr id="16" name="object 16">
+            <a:extLst>
+              <a:ext uri="{FF2B5EF4-FFF2-40B4-BE49-F238E27FC236}">
+                <a16:creationId xmlns:a16="http://schemas.microsoft.com/office/drawing/2014/main" id="{B0632A48-0384-0EF1-389E-FBF3F9C3E7CE}"/>
+              </a:ext>
+            </a:extLst>
+          </p:cNvPr>
+          <p:cNvSpPr txBox="1">
+            <a:spLocks noGrp="1"/>
+          </p:cNvSpPr>
+          <p:nvPr>
+            <p:ph type="title"/>
+          </p:nvPr>
+        </p:nvSpPr>
+        <p:spPr>
+          <a:xfrm>
+            <a:off x="626089" y="177177"/>
+            <a:ext cx="10994410" cy="782265"/>
+          </a:xfrm>
+          <a:prstGeom prst="rect">
+            <a:avLst/>
+          </a:prstGeom>
+        </p:spPr>
+        <p:txBody>
+          <a:bodyPr vert="horz" wrap="square" lIns="0" tIns="12700" rIns="0" bIns="0" rtlCol="0">
+            <a:spAutoFit/>
+          </a:bodyPr>
+          <a:lstStyle/>
+          <a:p>
+            <a:pPr marL="12700">
+              <a:lnSpc>
+                <a:spcPct val="100000"/>
+              </a:lnSpc>
+              <a:spcBef>
+                <a:spcPts val="100"/>
+              </a:spcBef>
+            </a:pPr>
+            <a:r>
+              <a:rPr lang="en-US" sz="2400" b="1" dirty="0"/>
+              <a:t>ASSESSMENT #3 </a:t>
+            </a:r>
+            <a:r>
+              <a:rPr lang="en-US" sz="2500" dirty="0"/>
+              <a:t>– SAX implementation </a:t>
+            </a:r>
+            <a:br>
+              <a:rPr lang="es-ES" sz="2500" spc="-5" dirty="0">
+                <a:latin typeface="+mj-lt"/>
+                <a:cs typeface="Lucida Sans"/>
+              </a:rPr>
+            </a:br>
+            <a:endParaRPr sz="2500" b="0" dirty="0">
+              <a:latin typeface="+mj-lt"/>
+              <a:cs typeface="Lucida Sans"/>
+            </a:endParaRPr>
+          </a:p>
+        </p:txBody>
+      </p:sp>
+      <p:pic>
+        <p:nvPicPr>
+          <p:cNvPr id="83" name="Gráfico 82">
+            <a:extLst>
+              <a:ext uri="{FF2B5EF4-FFF2-40B4-BE49-F238E27FC236}">
+                <a16:creationId xmlns:a16="http://schemas.microsoft.com/office/drawing/2014/main" id="{1F43E6A6-5CC3-9B99-14AC-997478150C3D}"/>
+              </a:ext>
+            </a:extLst>
+          </p:cNvPr>
+          <p:cNvPicPr>
+            <a:picLocks noChangeAspect="1"/>
+          </p:cNvPicPr>
+          <p:nvPr/>
+        </p:nvPicPr>
+        <p:blipFill>
+          <a:blip r:embed="rId4">
+            <a:extLst>
+              <a:ext uri="{96DAC541-7B7A-43D3-8B79-37D633B846F1}">
+                <asvg:svgBlip xmlns:asvg="http://schemas.microsoft.com/office/drawing/2016/SVG/main" r:embed="rId5"/>
+              </a:ext>
+            </a:extLst>
+          </a:blip>
+          <a:stretch>
+            <a:fillRect/>
+          </a:stretch>
+        </p:blipFill>
+        <p:spPr>
+          <a:xfrm>
+            <a:off x="5045006" y="6356057"/>
+            <a:ext cx="6409575" cy="363174"/>
+          </a:xfrm>
+          <a:prstGeom prst="rect">
+            <a:avLst/>
+          </a:prstGeom>
+        </p:spPr>
+      </p:pic>
+      <p:sp>
+        <p:nvSpPr>
+          <p:cNvPr id="84" name="Marcador de número de diapositiva 83">
+            <a:extLst>
+              <a:ext uri="{FF2B5EF4-FFF2-40B4-BE49-F238E27FC236}">
+                <a16:creationId xmlns:a16="http://schemas.microsoft.com/office/drawing/2014/main" id="{DFC09DB6-1DF7-C8F9-7414-27BC280DEA0F}"/>
+              </a:ext>
+            </a:extLst>
+          </p:cNvPr>
+          <p:cNvSpPr>
+            <a:spLocks noGrp="1"/>
+          </p:cNvSpPr>
+          <p:nvPr>
+            <p:ph type="sldNum" sz="quarter" idx="7"/>
+          </p:nvPr>
+        </p:nvSpPr>
+        <p:spPr/>
+        <p:txBody>
+          <a:bodyPr/>
+          <a:lstStyle/>
+          <a:p>
+            <a:fld id="{B6F15528-21DE-4FAA-801E-634DDDAF4B2B}" type="slidenum">
+              <a:rPr lang="es-ES" smtClean="0"/>
+              <a:t>10</a:t>
+            </a:fld>
+            <a:endParaRPr lang="es-ES"/>
+          </a:p>
+        </p:txBody>
+      </p:sp>
+      <p:sp>
+        <p:nvSpPr>
+          <p:cNvPr id="4" name="Marcador de texto 2">
+            <a:extLst>
+              <a:ext uri="{FF2B5EF4-FFF2-40B4-BE49-F238E27FC236}">
+                <a16:creationId xmlns:a16="http://schemas.microsoft.com/office/drawing/2014/main" id="{EBC8DCFA-5565-A757-1F8D-F4CCCF573A63}"/>
+              </a:ext>
+            </a:extLst>
+          </p:cNvPr>
+          <p:cNvSpPr txBox="1">
+            <a:spLocks/>
+          </p:cNvSpPr>
+          <p:nvPr/>
+        </p:nvSpPr>
+        <p:spPr>
+          <a:xfrm>
+            <a:off x="571501" y="601104"/>
+            <a:ext cx="11048999" cy="4958137"/>
+          </a:xfrm>
+          <a:prstGeom prst="rect">
+            <a:avLst/>
+          </a:prstGeom>
+        </p:spPr>
+        <p:txBody>
+          <a:bodyPr>
+            <a:normAutofit/>
+          </a:bodyPr>
+          <a:lstStyle>
+            <a:lvl1pPr marL="0">
+              <a:defRPr>
+                <a:latin typeface="+mn-lt"/>
+                <a:ea typeface="+mn-ea"/>
+                <a:cs typeface="+mn-cs"/>
+              </a:defRPr>
+            </a:lvl1pPr>
+            <a:lvl2pPr marL="457200">
+              <a:defRPr>
+                <a:latin typeface="+mn-lt"/>
+                <a:ea typeface="+mn-ea"/>
+                <a:cs typeface="+mn-cs"/>
+              </a:defRPr>
+            </a:lvl2pPr>
+            <a:lvl3pPr marL="914400">
+              <a:defRPr>
+                <a:latin typeface="+mn-lt"/>
+                <a:ea typeface="+mn-ea"/>
+                <a:cs typeface="+mn-cs"/>
+              </a:defRPr>
+            </a:lvl3pPr>
+            <a:lvl4pPr marL="1371600">
+              <a:defRPr>
+                <a:latin typeface="+mn-lt"/>
+                <a:ea typeface="+mn-ea"/>
+                <a:cs typeface="+mn-cs"/>
+              </a:defRPr>
+            </a:lvl4pPr>
+            <a:lvl5pPr marL="1828800">
+              <a:defRPr>
+                <a:latin typeface="+mn-lt"/>
+                <a:ea typeface="+mn-ea"/>
+                <a:cs typeface="+mn-cs"/>
+              </a:defRPr>
+            </a:lvl5pPr>
+            <a:lvl6pPr marL="2286000">
+              <a:defRPr>
+                <a:latin typeface="+mn-lt"/>
+                <a:ea typeface="+mn-ea"/>
+                <a:cs typeface="+mn-cs"/>
+              </a:defRPr>
+            </a:lvl6pPr>
+            <a:lvl7pPr marL="2743200">
+              <a:defRPr>
+                <a:latin typeface="+mn-lt"/>
+                <a:ea typeface="+mn-ea"/>
+                <a:cs typeface="+mn-cs"/>
+              </a:defRPr>
+            </a:lvl7pPr>
+            <a:lvl8pPr marL="3200400">
+              <a:defRPr>
+                <a:latin typeface="+mn-lt"/>
+                <a:ea typeface="+mn-ea"/>
+                <a:cs typeface="+mn-cs"/>
+              </a:defRPr>
+            </a:lvl8pPr>
+            <a:lvl9pPr marL="3657600">
+              <a:defRPr>
+                <a:latin typeface="+mn-lt"/>
+                <a:ea typeface="+mn-ea"/>
+                <a:cs typeface="+mn-cs"/>
+              </a:defRPr>
+            </a:lvl9pPr>
+          </a:lstStyle>
+          <a:p>
+            <a:r>
+              <a:rPr lang="en-US" dirty="0"/>
+              <a:t>Now, we are going to implement the design parameters in the MZI model developed in SAX and compare the response obtained with the one simulated by mathematical formulation. This will help us to identify any error in the definition of the SAX model single components. </a:t>
+            </a:r>
+          </a:p>
+          <a:p>
+            <a:br>
+              <a:rPr lang="en-US" dirty="0"/>
+            </a:br>
+            <a:r>
+              <a:rPr lang="en-US" dirty="0"/>
+              <a:t>In order to implement the SAX model, take as example the following lines:</a:t>
+            </a:r>
+          </a:p>
+          <a:p>
+            <a:endParaRPr lang="en-US" dirty="0"/>
+          </a:p>
+          <a:p>
+            <a:pPr lvl="2">
+              <a:lnSpc>
+                <a:spcPts val="1425"/>
+              </a:lnSpc>
+            </a:pPr>
+            <a:r>
+              <a:rPr lang="es-ES" sz="1400" b="0" dirty="0">
+                <a:effectLst/>
+                <a:latin typeface="Courier New" panose="02070309020205020404" pitchFamily="49" charset="0"/>
+              </a:rPr>
+              <a:t> </a:t>
+            </a:r>
+            <a:r>
+              <a:rPr lang="es-ES" sz="1400" b="0" dirty="0" err="1">
+                <a:effectLst/>
+                <a:latin typeface="Courier New" panose="02070309020205020404" pitchFamily="49" charset="0"/>
+              </a:rPr>
+              <a:t>mzi_test</a:t>
+            </a:r>
+            <a:r>
+              <a:rPr lang="es-ES" sz="1400" b="0" dirty="0">
+                <a:effectLst/>
+                <a:latin typeface="Courier New" panose="02070309020205020404" pitchFamily="49" charset="0"/>
+              </a:rPr>
+              <a:t> = </a:t>
+            </a:r>
+            <a:r>
+              <a:rPr lang="es-ES" sz="1400" b="0" dirty="0" err="1">
+                <a:effectLst/>
+                <a:latin typeface="Courier New" panose="02070309020205020404" pitchFamily="49" charset="0"/>
+              </a:rPr>
+              <a:t>mzi</a:t>
+            </a:r>
+            <a:r>
+              <a:rPr lang="es-ES" sz="1400" b="0" dirty="0">
+                <a:effectLst/>
+                <a:latin typeface="Courier New" panose="02070309020205020404" pitchFamily="49" charset="0"/>
+              </a:rPr>
+              <a:t>(</a:t>
+            </a:r>
+            <a:r>
+              <a:rPr lang="es-ES" sz="1400" b="0" dirty="0" err="1">
+                <a:effectLst/>
+                <a:latin typeface="Courier New" panose="02070309020205020404" pitchFamily="49" charset="0"/>
+              </a:rPr>
+              <a:t>wl</a:t>
+            </a:r>
+            <a:r>
+              <a:rPr lang="es-ES" sz="1400" b="0" dirty="0">
+                <a:effectLst/>
+                <a:latin typeface="Courier New" panose="02070309020205020404" pitchFamily="49" charset="0"/>
+              </a:rPr>
+              <a:t>=</a:t>
+            </a:r>
+            <a:r>
+              <a:rPr lang="es-ES" sz="1400" b="0" dirty="0" err="1">
+                <a:effectLst/>
+                <a:latin typeface="Courier New" panose="02070309020205020404" pitchFamily="49" charset="0"/>
+              </a:rPr>
+              <a:t>wl</a:t>
+            </a:r>
+            <a:r>
+              <a:rPr lang="es-ES" sz="1400" b="0" dirty="0">
+                <a:effectLst/>
+                <a:latin typeface="Courier New" panose="02070309020205020404" pitchFamily="49" charset="0"/>
+              </a:rPr>
+              <a:t>, </a:t>
+            </a:r>
+          </a:p>
+          <a:p>
+            <a:pPr lvl="2">
+              <a:lnSpc>
+                <a:spcPts val="1425"/>
+              </a:lnSpc>
+            </a:pPr>
+            <a:r>
+              <a:rPr lang="es-ES" sz="1400" b="0" dirty="0">
+                <a:effectLst/>
+                <a:latin typeface="Courier New" panose="02070309020205020404" pitchFamily="49" charset="0"/>
+              </a:rPr>
+              <a:t>    </a:t>
+            </a:r>
+            <a:r>
+              <a:rPr lang="es-ES" sz="1400" b="0" dirty="0" err="1">
+                <a:effectLst/>
+                <a:latin typeface="Courier New" panose="02070309020205020404" pitchFamily="49" charset="0"/>
+              </a:rPr>
+              <a:t>coup_a</a:t>
+            </a:r>
+            <a:r>
+              <a:rPr lang="es-ES" sz="1400" b="0" dirty="0">
+                <a:effectLst/>
+                <a:latin typeface="Courier New" panose="02070309020205020404" pitchFamily="49" charset="0"/>
+              </a:rPr>
+              <a:t> = ...</a:t>
+            </a:r>
+          </a:p>
+          <a:p>
+            <a:pPr lvl="2">
+              <a:lnSpc>
+                <a:spcPts val="1425"/>
+              </a:lnSpc>
+            </a:pPr>
+            <a:r>
+              <a:rPr lang="es-ES" sz="1400" b="0" dirty="0">
+                <a:effectLst/>
+                <a:latin typeface="Courier New" panose="02070309020205020404" pitchFamily="49" charset="0"/>
+              </a:rPr>
+              <a:t>    </a:t>
+            </a:r>
+            <a:r>
+              <a:rPr lang="es-ES" sz="1400" b="0" dirty="0" err="1">
+                <a:effectLst/>
+                <a:latin typeface="Courier New" panose="02070309020205020404" pitchFamily="49" charset="0"/>
+              </a:rPr>
+              <a:t>wvg_d</a:t>
+            </a:r>
+            <a:r>
+              <a:rPr lang="es-ES" sz="1400" b="0" dirty="0">
+                <a:effectLst/>
+                <a:latin typeface="Courier New" panose="02070309020205020404" pitchFamily="49" charset="0"/>
+              </a:rPr>
+              <a:t>={"</a:t>
+            </a:r>
+            <a:r>
+              <a:rPr lang="es-ES" sz="1400" b="0" dirty="0" err="1">
+                <a:effectLst/>
+                <a:latin typeface="Courier New" panose="02070309020205020404" pitchFamily="49" charset="0"/>
+              </a:rPr>
+              <a:t>length</a:t>
+            </a:r>
+            <a:r>
+              <a:rPr lang="es-ES" sz="1400" b="0" dirty="0">
+                <a:effectLst/>
+                <a:latin typeface="Courier New" panose="02070309020205020404" pitchFamily="49" charset="0"/>
+              </a:rPr>
+              <a:t>": </a:t>
+            </a:r>
+            <a:r>
+              <a:rPr lang="es-ES" sz="1400" b="0" dirty="0" err="1">
+                <a:effectLst/>
+                <a:latin typeface="Courier New" panose="02070309020205020404" pitchFamily="49" charset="0"/>
+              </a:rPr>
+              <a:t>l_d</a:t>
+            </a:r>
+            <a:r>
+              <a:rPr lang="es-ES" sz="1400" b="0" dirty="0">
+                <a:effectLst/>
+                <a:latin typeface="Courier New" panose="02070309020205020404" pitchFamily="49" charset="0"/>
+              </a:rPr>
+              <a:t>, "</a:t>
+            </a:r>
+            <a:r>
+              <a:rPr lang="es-ES" sz="1400" b="0" dirty="0" err="1">
+                <a:effectLst/>
+                <a:latin typeface="Courier New" panose="02070309020205020404" pitchFamily="49" charset="0"/>
+              </a:rPr>
+              <a:t>neff</a:t>
+            </a:r>
+            <a:r>
+              <a:rPr lang="es-ES" sz="1400" b="0" dirty="0">
+                <a:effectLst/>
+                <a:latin typeface="Courier New" panose="02070309020205020404" pitchFamily="49" charset="0"/>
+              </a:rPr>
+              <a:t>": ...}, </a:t>
+            </a:r>
+          </a:p>
+          <a:p>
+            <a:pPr lvl="2">
+              <a:lnSpc>
+                <a:spcPts val="1425"/>
+              </a:lnSpc>
+            </a:pPr>
+            <a:r>
+              <a:rPr lang="es-ES" sz="1400" b="0" dirty="0">
+                <a:effectLst/>
+                <a:latin typeface="Courier New" panose="02070309020205020404" pitchFamily="49" charset="0"/>
+              </a:rPr>
+              <a:t>    </a:t>
+            </a:r>
+            <a:r>
+              <a:rPr lang="es-ES" sz="1400" b="0" dirty="0" err="1">
+                <a:effectLst/>
+                <a:latin typeface="Courier New" panose="02070309020205020404" pitchFamily="49" charset="0"/>
+              </a:rPr>
+              <a:t>wvg_u</a:t>
+            </a:r>
+            <a:r>
+              <a:rPr lang="es-ES" sz="1400" b="0" dirty="0">
+                <a:effectLst/>
+                <a:latin typeface="Courier New" panose="02070309020205020404" pitchFamily="49" charset="0"/>
+              </a:rPr>
+              <a:t>={"</a:t>
+            </a:r>
+            <a:r>
+              <a:rPr lang="es-ES" sz="1400" b="0" dirty="0" err="1">
+                <a:effectLst/>
+                <a:latin typeface="Courier New" panose="02070309020205020404" pitchFamily="49" charset="0"/>
+              </a:rPr>
+              <a:t>length</a:t>
+            </a:r>
+            <a:r>
+              <a:rPr lang="es-ES" sz="1400" b="0" dirty="0">
+                <a:effectLst/>
+                <a:latin typeface="Courier New" panose="02070309020205020404" pitchFamily="49" charset="0"/>
+              </a:rPr>
+              <a:t>": </a:t>
+            </a:r>
+            <a:r>
+              <a:rPr lang="es-ES" sz="1400" b="0" dirty="0" err="1">
+                <a:effectLst/>
+                <a:latin typeface="Courier New" panose="02070309020205020404" pitchFamily="49" charset="0"/>
+              </a:rPr>
+              <a:t>l_u</a:t>
+            </a:r>
+            <a:r>
+              <a:rPr lang="es-ES" sz="1400" b="0" dirty="0">
+                <a:effectLst/>
+                <a:latin typeface="Courier New" panose="02070309020205020404" pitchFamily="49" charset="0"/>
+              </a:rPr>
+              <a:t>, "</a:t>
+            </a:r>
+            <a:r>
+              <a:rPr lang="es-ES" sz="1400" b="0" dirty="0" err="1">
+                <a:effectLst/>
+                <a:latin typeface="Courier New" panose="02070309020205020404" pitchFamily="49" charset="0"/>
+              </a:rPr>
+              <a:t>neff</a:t>
+            </a:r>
+            <a:r>
+              <a:rPr lang="es-ES" sz="1400" b="0" dirty="0">
+                <a:effectLst/>
+                <a:latin typeface="Courier New" panose="02070309020205020404" pitchFamily="49" charset="0"/>
+              </a:rPr>
+              <a:t>": ...},</a:t>
+            </a:r>
+          </a:p>
+          <a:p>
+            <a:pPr lvl="2">
+              <a:lnSpc>
+                <a:spcPts val="1425"/>
+              </a:lnSpc>
+            </a:pPr>
+            <a:r>
+              <a:rPr lang="es-ES" sz="1400" b="0" dirty="0">
+                <a:effectLst/>
+                <a:latin typeface="Courier New" panose="02070309020205020404" pitchFamily="49" charset="0"/>
+              </a:rPr>
+              <a:t>    </a:t>
+            </a:r>
+            <a:r>
+              <a:rPr lang="es-ES" sz="1400" b="0" dirty="0" err="1">
+                <a:effectLst/>
+                <a:latin typeface="Courier New" panose="02070309020205020404" pitchFamily="49" charset="0"/>
+              </a:rPr>
+              <a:t>coup_b</a:t>
+            </a:r>
+            <a:r>
+              <a:rPr lang="es-ES" sz="1400" b="0" dirty="0">
+                <a:effectLst/>
+                <a:latin typeface="Courier New" panose="02070309020205020404" pitchFamily="49" charset="0"/>
+              </a:rPr>
+              <a:t> = ... )</a:t>
+            </a:r>
+          </a:p>
+          <a:p>
+            <a:pPr lvl="2">
+              <a:lnSpc>
+                <a:spcPts val="1425"/>
+              </a:lnSpc>
+            </a:pPr>
+            <a:br>
+              <a:rPr lang="es-ES" sz="1400" b="0" dirty="0">
+                <a:effectLst/>
+                <a:latin typeface="Courier New" panose="02070309020205020404" pitchFamily="49" charset="0"/>
+              </a:rPr>
+            </a:br>
+            <a:r>
+              <a:rPr lang="es-ES" sz="1400" b="0" dirty="0">
+                <a:effectLst/>
+                <a:latin typeface="Courier New" panose="02070309020205020404" pitchFamily="49" charset="0"/>
+              </a:rPr>
+              <a:t>    H00 = </a:t>
+            </a:r>
+            <a:r>
+              <a:rPr lang="es-ES" sz="1400" b="0" dirty="0" err="1">
+                <a:effectLst/>
+                <a:latin typeface="Courier New" panose="02070309020205020404" pitchFamily="49" charset="0"/>
+              </a:rPr>
+              <a:t>mzi_test</a:t>
+            </a:r>
+            <a:r>
+              <a:rPr lang="es-ES" sz="1400" b="0" dirty="0">
+                <a:effectLst/>
+                <a:latin typeface="Courier New" panose="02070309020205020404" pitchFamily="49" charset="0"/>
+              </a:rPr>
+              <a:t>["in0", "out0"]</a:t>
+            </a:r>
+          </a:p>
+          <a:p>
+            <a:endParaRPr lang="en-US" sz="2000" dirty="0"/>
+          </a:p>
+          <a:p>
+            <a:pPr algn="just"/>
+            <a:endParaRPr lang="en-US" sz="2000" dirty="0"/>
+          </a:p>
+          <a:p>
+            <a:pPr algn="just"/>
+            <a:endParaRPr lang="en-US" sz="2000" b="1" i="1" dirty="0"/>
+          </a:p>
+          <a:p>
+            <a:pPr algn="just"/>
+            <a:endParaRPr lang="en-US" sz="2000" kern="0" dirty="0">
+              <a:solidFill>
+                <a:sysClr val="windowText" lastClr="000000"/>
+              </a:solidFill>
+            </a:endParaRPr>
+          </a:p>
+          <a:p>
+            <a:endParaRPr lang="en-US" sz="2000" kern="0" dirty="0">
+              <a:solidFill>
+                <a:sysClr val="windowText" lastClr="000000"/>
+              </a:solidFill>
+            </a:endParaRPr>
+          </a:p>
+        </p:txBody>
+      </p:sp>
+      <p:sp>
+        <p:nvSpPr>
+          <p:cNvPr id="5" name="Marcador de pie de página 2">
+            <a:extLst>
+              <a:ext uri="{FF2B5EF4-FFF2-40B4-BE49-F238E27FC236}">
+                <a16:creationId xmlns:a16="http://schemas.microsoft.com/office/drawing/2014/main" id="{ED97C9D0-256C-D4CA-42E7-79330F040B30}"/>
+              </a:ext>
+            </a:extLst>
+          </p:cNvPr>
+          <p:cNvSpPr>
+            <a:spLocks noGrp="1"/>
+          </p:cNvSpPr>
+          <p:nvPr>
+            <p:ph type="ftr" sz="quarter" idx="5"/>
+          </p:nvPr>
+        </p:nvSpPr>
+        <p:spPr>
+          <a:xfrm>
+            <a:off x="609600" y="6457057"/>
+            <a:ext cx="2743200" cy="184666"/>
+          </a:xfrm>
+        </p:spPr>
+        <p:txBody>
+          <a:bodyPr/>
+          <a:lstStyle/>
+          <a:p>
+            <a:pPr marL="12700">
+              <a:spcBef>
+                <a:spcPts val="15"/>
+              </a:spcBef>
+            </a:pPr>
+            <a:r>
+              <a:rPr lang="es-ES" spc="-5"/>
+              <a:t>LAB 3. INTERFEROMETERS I</a:t>
+            </a:r>
+            <a:endParaRPr lang="es-ES" spc="-5" dirty="0"/>
+          </a:p>
+        </p:txBody>
+      </p:sp>
+      <p:sp>
+        <p:nvSpPr>
+          <p:cNvPr id="3" name="Rectángulo 4">
+            <a:extLst>
+              <a:ext uri="{FF2B5EF4-FFF2-40B4-BE49-F238E27FC236}">
+                <a16:creationId xmlns:a16="http://schemas.microsoft.com/office/drawing/2014/main" id="{2B912BD3-AD6F-13B9-B139-91E27A97A178}"/>
+              </a:ext>
+            </a:extLst>
+          </p:cNvPr>
+          <p:cNvSpPr/>
+          <p:nvPr/>
+        </p:nvSpPr>
+        <p:spPr>
+          <a:xfrm>
+            <a:off x="6272932" y="2227223"/>
+            <a:ext cx="5614427" cy="3925990"/>
+          </a:xfrm>
+          <a:prstGeom prst="rect">
+            <a:avLst/>
+          </a:prstGeom>
+          <a:noFill/>
+          <a:ln w="28575">
+            <a:solidFill>
+              <a:srgbClr val="E0700D"/>
+            </a:solidFill>
+          </a:ln>
+        </p:spPr>
+        <p:style>
+          <a:lnRef idx="2">
+            <a:schemeClr val="accent1">
+              <a:shade val="15000"/>
+            </a:schemeClr>
+          </a:lnRef>
+          <a:fillRef idx="1">
+            <a:schemeClr val="accent1"/>
+          </a:fillRef>
+          <a:effectRef idx="0">
+            <a:schemeClr val="accent1"/>
+          </a:effectRef>
+          <a:fontRef idx="minor">
+            <a:schemeClr val="lt1"/>
+          </a:fontRef>
+        </p:style>
+        <p:txBody>
+          <a:bodyPr rtlCol="0" anchor="ctr"/>
+          <a:lstStyle/>
+          <a:p>
+            <a:pPr algn="ctr"/>
+            <a:endParaRPr lang="en-US"/>
+          </a:p>
+        </p:txBody>
+      </p:sp>
+    </p:spTree>
+    <p:extLst>
+      <p:ext uri="{BB962C8B-B14F-4D97-AF65-F5344CB8AC3E}">
+        <p14:creationId xmlns:p14="http://schemas.microsoft.com/office/powerpoint/2010/main" val="3666436811"/>
+      </p:ext>
+    </p:extLst>
+  </p:cSld>
+  <p:clrMapOvr>
+    <a:masterClrMapping/>
+  </p:clrMapOvr>
+</p:sld>
+</file>
+
+<file path=ppt/slides/slide11.xml><?xml version="1.0" encoding="utf-8"?>
+<p:sld xmlns:a="http://schemas.openxmlformats.org/drawingml/2006/main" xmlns:r="http://schemas.openxmlformats.org/officeDocument/2006/relationships" xmlns:p="http://schemas.openxmlformats.org/presentationml/2006/main">
+  <p:cSld>
+    <p:spTree>
+      <p:nvGrpSpPr>
+        <p:cNvPr id="1" name="">
+          <a:extLst>
+            <a:ext uri="{FF2B5EF4-FFF2-40B4-BE49-F238E27FC236}">
+              <a16:creationId xmlns:a16="http://schemas.microsoft.com/office/drawing/2014/main" id="{25434E70-43B1-3881-1771-20FB4358471D}"/>
+            </a:ext>
+          </a:extLst>
+        </p:cNvPr>
+        <p:cNvGrpSpPr/>
+        <p:nvPr/>
+      </p:nvGrpSpPr>
+      <p:grpSpPr>
+        <a:xfrm>
+          <a:off x="0" y="0"/>
+          <a:ext cx="0" cy="0"/>
+          <a:chOff x="0" y="0"/>
+          <a:chExt cx="0" cy="0"/>
+        </a:xfrm>
+      </p:grpSpPr>
+      <p:sp>
+        <p:nvSpPr>
+          <p:cNvPr id="16" name="object 16">
+            <a:extLst>
+              <a:ext uri="{FF2B5EF4-FFF2-40B4-BE49-F238E27FC236}">
+                <a16:creationId xmlns:a16="http://schemas.microsoft.com/office/drawing/2014/main" id="{742C31CE-19F0-B995-0997-9A2D6A879BF7}"/>
+              </a:ext>
+            </a:extLst>
+          </p:cNvPr>
+          <p:cNvSpPr txBox="1">
+            <a:spLocks noGrp="1"/>
+          </p:cNvSpPr>
+          <p:nvPr>
+            <p:ph type="title"/>
+          </p:nvPr>
+        </p:nvSpPr>
+        <p:spPr>
+          <a:xfrm>
+            <a:off x="685800" y="408883"/>
+            <a:ext cx="10994410" cy="397545"/>
+          </a:xfrm>
+          <a:prstGeom prst="rect">
+            <a:avLst/>
+          </a:prstGeom>
+        </p:spPr>
+        <p:txBody>
+          <a:bodyPr vert="horz" wrap="square" lIns="0" tIns="12700" rIns="0" bIns="0" rtlCol="0">
+            <a:spAutoFit/>
+          </a:bodyPr>
+          <a:lstStyle/>
+          <a:p>
+            <a:pPr marL="12700">
+              <a:lnSpc>
+                <a:spcPct val="100000"/>
+              </a:lnSpc>
+              <a:spcBef>
+                <a:spcPts val="100"/>
+              </a:spcBef>
+            </a:pPr>
+            <a:r>
+              <a:rPr lang="en-US" sz="2500" dirty="0"/>
+              <a:t>Extra assessments </a:t>
+            </a:r>
+            <a:endParaRPr lang="en-US" sz="2500" b="0" dirty="0">
+              <a:latin typeface="+mj-lt"/>
+              <a:cs typeface="Lucida Sans"/>
+            </a:endParaRPr>
+          </a:p>
+        </p:txBody>
+      </p:sp>
+      <p:pic>
+        <p:nvPicPr>
+          <p:cNvPr id="83" name="Gráfico 82">
+            <a:extLst>
+              <a:ext uri="{FF2B5EF4-FFF2-40B4-BE49-F238E27FC236}">
+                <a16:creationId xmlns:a16="http://schemas.microsoft.com/office/drawing/2014/main" id="{D688A609-F3DC-EE34-C536-683E70F32EAE}"/>
+              </a:ext>
+            </a:extLst>
+          </p:cNvPr>
+          <p:cNvPicPr>
+            <a:picLocks noChangeAspect="1"/>
+          </p:cNvPicPr>
+          <p:nvPr/>
+        </p:nvPicPr>
+        <p:blipFill>
+          <a:blip r:embed="rId3">
+            <a:extLst>
+              <a:ext uri="{96DAC541-7B7A-43D3-8B79-37D633B846F1}">
+                <asvg:svgBlip xmlns:asvg="http://schemas.microsoft.com/office/drawing/2016/SVG/main" r:embed="rId4"/>
+              </a:ext>
+            </a:extLst>
+          </a:blip>
+          <a:stretch>
+            <a:fillRect/>
+          </a:stretch>
+        </p:blipFill>
+        <p:spPr>
+          <a:xfrm>
+            <a:off x="5045006" y="6356057"/>
+            <a:ext cx="6409575" cy="363174"/>
+          </a:xfrm>
+          <a:prstGeom prst="rect">
+            <a:avLst/>
+          </a:prstGeom>
+        </p:spPr>
+      </p:pic>
+      <p:sp>
+        <p:nvSpPr>
+          <p:cNvPr id="84" name="Marcador de número de diapositiva 83">
+            <a:extLst>
+              <a:ext uri="{FF2B5EF4-FFF2-40B4-BE49-F238E27FC236}">
+                <a16:creationId xmlns:a16="http://schemas.microsoft.com/office/drawing/2014/main" id="{B6C672C6-89D4-7E67-2B94-811D081786A7}"/>
+              </a:ext>
+            </a:extLst>
+          </p:cNvPr>
+          <p:cNvSpPr>
+            <a:spLocks noGrp="1"/>
+          </p:cNvSpPr>
+          <p:nvPr>
+            <p:ph type="sldNum" sz="quarter" idx="7"/>
+          </p:nvPr>
+        </p:nvSpPr>
+        <p:spPr/>
+        <p:txBody>
+          <a:bodyPr/>
+          <a:lstStyle/>
+          <a:p>
+            <a:fld id="{B6F15528-21DE-4FAA-801E-634DDDAF4B2B}" type="slidenum">
+              <a:rPr lang="es-ES" smtClean="0"/>
+              <a:t>11</a:t>
+            </a:fld>
+            <a:endParaRPr lang="es-ES"/>
+          </a:p>
+        </p:txBody>
+      </p:sp>
+      <p:sp>
+        <p:nvSpPr>
+          <p:cNvPr id="4" name="Marcador de texto 2">
+            <a:extLst>
+              <a:ext uri="{FF2B5EF4-FFF2-40B4-BE49-F238E27FC236}">
+                <a16:creationId xmlns:a16="http://schemas.microsoft.com/office/drawing/2014/main" id="{D838A93A-BFC8-0124-93CE-FDC193435A0C}"/>
+              </a:ext>
+            </a:extLst>
+          </p:cNvPr>
+          <p:cNvSpPr txBox="1">
+            <a:spLocks/>
+          </p:cNvSpPr>
+          <p:nvPr/>
+        </p:nvSpPr>
+        <p:spPr>
+          <a:xfrm>
+            <a:off x="608012" y="1295400"/>
+            <a:ext cx="11048999" cy="4958137"/>
+          </a:xfrm>
+          <a:prstGeom prst="rect">
+            <a:avLst/>
+          </a:prstGeom>
+        </p:spPr>
+        <p:txBody>
+          <a:bodyPr>
+            <a:normAutofit/>
+          </a:bodyPr>
+          <a:lstStyle>
+            <a:lvl1pPr marL="0">
+              <a:defRPr>
+                <a:latin typeface="+mn-lt"/>
+                <a:ea typeface="+mn-ea"/>
+                <a:cs typeface="+mn-cs"/>
+              </a:defRPr>
+            </a:lvl1pPr>
+            <a:lvl2pPr marL="457200">
+              <a:defRPr>
+                <a:latin typeface="+mn-lt"/>
+                <a:ea typeface="+mn-ea"/>
+                <a:cs typeface="+mn-cs"/>
+              </a:defRPr>
+            </a:lvl2pPr>
+            <a:lvl3pPr marL="914400">
+              <a:defRPr>
+                <a:latin typeface="+mn-lt"/>
+                <a:ea typeface="+mn-ea"/>
+                <a:cs typeface="+mn-cs"/>
+              </a:defRPr>
+            </a:lvl3pPr>
+            <a:lvl4pPr marL="1371600">
+              <a:defRPr>
+                <a:latin typeface="+mn-lt"/>
+                <a:ea typeface="+mn-ea"/>
+                <a:cs typeface="+mn-cs"/>
+              </a:defRPr>
+            </a:lvl4pPr>
+            <a:lvl5pPr marL="1828800">
+              <a:defRPr>
+                <a:latin typeface="+mn-lt"/>
+                <a:ea typeface="+mn-ea"/>
+                <a:cs typeface="+mn-cs"/>
+              </a:defRPr>
+            </a:lvl5pPr>
+            <a:lvl6pPr marL="2286000">
+              <a:defRPr>
+                <a:latin typeface="+mn-lt"/>
+                <a:ea typeface="+mn-ea"/>
+                <a:cs typeface="+mn-cs"/>
+              </a:defRPr>
+            </a:lvl6pPr>
+            <a:lvl7pPr marL="2743200">
+              <a:defRPr>
+                <a:latin typeface="+mn-lt"/>
+                <a:ea typeface="+mn-ea"/>
+                <a:cs typeface="+mn-cs"/>
+              </a:defRPr>
+            </a:lvl7pPr>
+            <a:lvl8pPr marL="3200400">
+              <a:defRPr>
+                <a:latin typeface="+mn-lt"/>
+                <a:ea typeface="+mn-ea"/>
+                <a:cs typeface="+mn-cs"/>
+              </a:defRPr>
+            </a:lvl8pPr>
+            <a:lvl9pPr marL="3657600">
+              <a:defRPr>
+                <a:latin typeface="+mn-lt"/>
+                <a:ea typeface="+mn-ea"/>
+                <a:cs typeface="+mn-cs"/>
+              </a:defRPr>
+            </a:lvl9pPr>
+          </a:lstStyle>
+          <a:p>
+            <a:pPr marL="0" indent="0">
+              <a:buNone/>
+            </a:pPr>
+            <a:r>
+              <a:rPr lang="en-US" b="1" dirty="0"/>
+              <a:t>Assessment 4</a:t>
+            </a:r>
+            <a:r>
+              <a:rPr lang="en-US" dirty="0"/>
+              <a:t>. Design an MZI for filtering at a specific wavelength. Calculate and adjust the arm lengths to configure the MZI to have a maximum transmission at 1550 nm.</a:t>
+            </a:r>
+          </a:p>
+          <a:p>
+            <a:endParaRPr lang="en-US" b="1" dirty="0"/>
+          </a:p>
+          <a:p>
+            <a:r>
+              <a:rPr lang="en-US" b="1" dirty="0"/>
+              <a:t>Assessment 5. </a:t>
+            </a:r>
+            <a:r>
+              <a:rPr lang="en-US" dirty="0"/>
+              <a:t>Let's see how the response of the MZI varies with the effective index. Vary the effective index of one of the arms and analyze how the spectrum shifts. To do this, you can use the data provided in the .txt files entitled ‘</a:t>
+            </a:r>
+            <a:r>
+              <a:rPr lang="en-US" dirty="0" err="1"/>
+              <a:t>SiN</a:t>
+            </a:r>
+            <a:r>
+              <a:rPr lang="en-US" dirty="0"/>
+              <a:t>’. Can you give an example of an application where this configuration is used?</a:t>
+            </a:r>
+          </a:p>
+          <a:p>
+            <a:pPr marL="0" indent="0">
+              <a:buNone/>
+            </a:pPr>
+            <a:endParaRPr lang="en-US" dirty="0"/>
+          </a:p>
+          <a:p>
+            <a:r>
+              <a:rPr lang="en-US" b="1" dirty="0"/>
+              <a:t>Advanced level assessment.</a:t>
+            </a:r>
+            <a:r>
+              <a:rPr lang="en-US" dirty="0"/>
+              <a:t> Explore how cascading two MZIs affects the transmission spectrum. To do so, design a system in which two MZIs are cascaded. Simulate and observe the spectrum, explaining how the transmission peaks behave</a:t>
+            </a:r>
+            <a:r>
+              <a:rPr lang="en-US" b="1" dirty="0"/>
+              <a:t>.</a:t>
+            </a:r>
+          </a:p>
+          <a:p>
+            <a:pPr algn="just"/>
+            <a:endParaRPr lang="en-US" sz="2000" kern="0" dirty="0">
+              <a:solidFill>
+                <a:sysClr val="windowText" lastClr="000000"/>
+              </a:solidFill>
+            </a:endParaRPr>
+          </a:p>
+        </p:txBody>
+      </p:sp>
+      <p:sp>
+        <p:nvSpPr>
+          <p:cNvPr id="2" name="CuadroTexto 1">
+            <a:extLst>
+              <a:ext uri="{FF2B5EF4-FFF2-40B4-BE49-F238E27FC236}">
+                <a16:creationId xmlns:a16="http://schemas.microsoft.com/office/drawing/2014/main" id="{FDE3A197-9508-F9F1-1FEB-FF883D78C151}"/>
+              </a:ext>
+            </a:extLst>
+          </p:cNvPr>
+          <p:cNvSpPr txBox="1"/>
+          <p:nvPr/>
+        </p:nvSpPr>
+        <p:spPr>
+          <a:xfrm>
+            <a:off x="609441" y="4860334"/>
+            <a:ext cx="11199971" cy="1200329"/>
+          </a:xfrm>
+          <a:prstGeom prst="rect">
+            <a:avLst/>
+          </a:prstGeom>
+          <a:solidFill>
+            <a:schemeClr val="bg1">
+              <a:lumMod val="95000"/>
+            </a:schemeClr>
+          </a:solidFill>
+          <a:ln w="28575">
+            <a:solidFill>
+              <a:srgbClr val="E0700D"/>
+            </a:solidFill>
+          </a:ln>
+        </p:spPr>
+        <p:txBody>
+          <a:bodyPr wrap="square" rtlCol="0">
+            <a:spAutoFit/>
+          </a:bodyPr>
+          <a:lstStyle/>
+          <a:p>
+            <a:pPr algn="just"/>
+            <a:r>
+              <a:rPr lang="en-US" sz="1200" dirty="0">
+                <a:latin typeface="Arial" panose="020B0604020202020204" pitchFamily="34" charset="0"/>
+                <a:cs typeface="Arial" panose="020B0604020202020204" pitchFamily="34" charset="0"/>
+              </a:rPr>
+              <a:t>Document all your results</a:t>
+            </a:r>
+          </a:p>
+          <a:p>
+            <a:pPr algn="just"/>
+            <a:endParaRPr lang="en-US" sz="1200" dirty="0">
+              <a:latin typeface="Arial" panose="020B0604020202020204" pitchFamily="34" charset="0"/>
+              <a:cs typeface="Arial" panose="020B0604020202020204" pitchFamily="34" charset="0"/>
+            </a:endParaRPr>
+          </a:p>
+          <a:p>
+            <a:pPr algn="just"/>
+            <a:endParaRPr lang="en-US" sz="1200" dirty="0">
+              <a:latin typeface="Arial" panose="020B0604020202020204" pitchFamily="34" charset="0"/>
+              <a:cs typeface="Arial" panose="020B0604020202020204" pitchFamily="34" charset="0"/>
+            </a:endParaRPr>
+          </a:p>
+          <a:p>
+            <a:pPr algn="just"/>
+            <a:endParaRPr lang="en-US" sz="1200" dirty="0">
+              <a:latin typeface="Arial" panose="020B0604020202020204" pitchFamily="34" charset="0"/>
+              <a:cs typeface="Arial" panose="020B0604020202020204" pitchFamily="34" charset="0"/>
+            </a:endParaRPr>
+          </a:p>
+          <a:p>
+            <a:pPr algn="just"/>
+            <a:endParaRPr lang="en-US" sz="1200" dirty="0">
+              <a:latin typeface="Arial" panose="020B0604020202020204" pitchFamily="34" charset="0"/>
+              <a:cs typeface="Arial" panose="020B0604020202020204" pitchFamily="34" charset="0"/>
+            </a:endParaRPr>
+          </a:p>
+          <a:p>
+            <a:pPr algn="just"/>
+            <a:endParaRPr lang="en-US" sz="1200" dirty="0">
+              <a:latin typeface="Arial" panose="020B0604020202020204" pitchFamily="34" charset="0"/>
+              <a:cs typeface="Arial" panose="020B0604020202020204" pitchFamily="34" charset="0"/>
+            </a:endParaRPr>
+          </a:p>
+        </p:txBody>
+      </p:sp>
+      <p:sp>
+        <p:nvSpPr>
+          <p:cNvPr id="6" name="Marcador de pie de página 2">
+            <a:extLst>
+              <a:ext uri="{FF2B5EF4-FFF2-40B4-BE49-F238E27FC236}">
+                <a16:creationId xmlns:a16="http://schemas.microsoft.com/office/drawing/2014/main" id="{04C1A7E9-6C33-172D-E7B9-CCF643221E6A}"/>
+              </a:ext>
+            </a:extLst>
+          </p:cNvPr>
+          <p:cNvSpPr>
+            <a:spLocks noGrp="1"/>
+          </p:cNvSpPr>
+          <p:nvPr>
+            <p:ph type="ftr" sz="quarter" idx="5"/>
+          </p:nvPr>
+        </p:nvSpPr>
+        <p:spPr>
+          <a:xfrm>
+            <a:off x="609600" y="6457057"/>
+            <a:ext cx="2743200" cy="184666"/>
+          </a:xfrm>
+        </p:spPr>
+        <p:txBody>
+          <a:bodyPr/>
+          <a:lstStyle/>
+          <a:p>
+            <a:pPr marL="12700">
+              <a:spcBef>
+                <a:spcPts val="15"/>
+              </a:spcBef>
+            </a:pPr>
+            <a:r>
+              <a:rPr lang="es-ES" spc="-5"/>
+              <a:t>LAB 3. INTERFEROMETERS I</a:t>
+            </a:r>
+            <a:endParaRPr lang="es-ES" spc="-5" dirty="0"/>
+          </a:p>
+        </p:txBody>
+      </p:sp>
+    </p:spTree>
+    <p:extLst>
+      <p:ext uri="{BB962C8B-B14F-4D97-AF65-F5344CB8AC3E}">
+        <p14:creationId xmlns:p14="http://schemas.microsoft.com/office/powerpoint/2010/main" val="3660438245"/>
+      </p:ext>
+    </p:extLst>
+  </p:cSld>
+  <p:clrMapOvr>
+    <a:masterClrMapping/>
+  </p:clrMapOvr>
+</p:sld>
+</file>
+
+<file path=ppt/slides/slide12.xml><?xml version="1.0" encoding="utf-8"?>
+<p:sld xmlns:a="http://schemas.openxmlformats.org/drawingml/2006/main" xmlns:r="http://schemas.openxmlformats.org/officeDocument/2006/relationships" xmlns:p="http://schemas.openxmlformats.org/presentationml/2006/main">
+  <p:cSld>
+    <p:spTree>
+      <p:nvGrpSpPr>
         <p:cNvPr id="1" name=""/>
         <p:cNvGrpSpPr/>
         <p:nvPr/>
@@ -3191,7 +4564,7 @@
           <a:p>
             <a:fld id="{B6F15528-21DE-4FAA-801E-634DDDAF4B2B}" type="slidenum">
               <a:rPr lang="es-ES" smtClean="0"/>
-              <a:t>10</a:t>
+              <a:t>12</a:t>
             </a:fld>
             <a:endParaRPr lang="es-ES"/>
           </a:p>
@@ -5667,8 +7040,8 @@
           </a:p>
         </p:txBody>
       </p:sp>
-      <mc:AlternateContent xmlns:mc="http://schemas.openxmlformats.org/markup-compatibility/2006">
-        <mc:Choice xmlns:a14="http://schemas.microsoft.com/office/drawing/2010/main" Requires="a14">
+      <mc:AlternateContent xmlns:mc="http://schemas.openxmlformats.org/markup-compatibility/2006" xmlns:a14="http://schemas.microsoft.com/office/drawing/2010/main">
+        <mc:Choice Requires="a14">
           <p:sp>
             <p:nvSpPr>
               <p:cNvPr id="4" name="TextBox 3">
@@ -5746,7 +7119,7 @@
             </p:txBody>
           </p:sp>
         </mc:Choice>
-        <mc:Fallback>
+        <mc:Fallback xmlns="">
           <p:sp>
             <p:nvSpPr>
               <p:cNvPr id="4" name="TextBox 3">
@@ -5829,8 +7202,8 @@
           </a:p>
         </p:txBody>
       </p:sp>
-      <mc:AlternateContent xmlns:mc="http://schemas.openxmlformats.org/markup-compatibility/2006">
-        <mc:Choice xmlns:a14="http://schemas.microsoft.com/office/drawing/2010/main" Requires="a14">
+      <mc:AlternateContent xmlns:mc="http://schemas.openxmlformats.org/markup-compatibility/2006" xmlns:a14="http://schemas.microsoft.com/office/drawing/2010/main">
+        <mc:Choice Requires="a14">
           <p:sp>
             <p:nvSpPr>
               <p:cNvPr id="11" name="TextBox 10">
@@ -6051,11 +7424,12 @@
                     </m:oMath>
                   </m:oMathPara>
                 </a14:m>
+                <a:endParaRPr/>
               </a:p>
             </p:txBody>
           </p:sp>
         </mc:Choice>
-        <mc:Fallback>
+        <mc:Fallback xmlns="">
           <p:sp>
             <p:nvSpPr>
               <p:cNvPr id="11" name="TextBox 10">
@@ -6138,8 +7512,8 @@
           </a:p>
         </p:txBody>
       </p:sp>
-      <mc:AlternateContent xmlns:mc="http://schemas.openxmlformats.org/markup-compatibility/2006">
-        <mc:Choice xmlns:a14="http://schemas.microsoft.com/office/drawing/2010/main" Requires="a14">
+      <mc:AlternateContent xmlns:mc="http://schemas.openxmlformats.org/markup-compatibility/2006" xmlns:a14="http://schemas.microsoft.com/office/drawing/2010/main">
+        <mc:Choice Requires="a14">
           <p:sp>
             <p:nvSpPr>
               <p:cNvPr id="16" name="TextBox 15">
@@ -6243,11 +7617,12 @@
                     </m:oMath>
                   </m:oMathPara>
                 </a14:m>
+                <a:endParaRPr/>
               </a:p>
             </p:txBody>
           </p:sp>
         </mc:Choice>
-        <mc:Fallback>
+        <mc:Fallback xmlns="">
           <p:sp>
             <p:nvSpPr>
               <p:cNvPr id="16" name="TextBox 15">
@@ -6692,8 +8067,8 @@
           </a:p>
         </p:txBody>
       </p:sp>
-      <mc:AlternateContent xmlns:mc="http://schemas.openxmlformats.org/markup-compatibility/2006">
-        <mc:Choice xmlns:a14="http://schemas.microsoft.com/office/drawing/2010/main" Requires="a14">
+      <mc:AlternateContent xmlns:mc="http://schemas.openxmlformats.org/markup-compatibility/2006" xmlns:a14="http://schemas.microsoft.com/office/drawing/2010/main">
+        <mc:Choice Requires="a14">
           <p:sp>
             <p:nvSpPr>
               <p:cNvPr id="9" name="TextBox 8">
@@ -6745,7 +8120,7 @@
             </p:txBody>
           </p:sp>
         </mc:Choice>
-        <mc:Fallback>
+        <mc:Fallback xmlns="">
           <p:sp>
             <p:nvSpPr>
               <p:cNvPr id="9" name="TextBox 8">
@@ -7109,8 +8484,8 @@
           </a:p>
         </p:txBody>
       </p:sp>
-      <mc:AlternateContent xmlns:mc="http://schemas.openxmlformats.org/markup-compatibility/2006">
-        <mc:Choice xmlns:a14="http://schemas.microsoft.com/office/drawing/2010/main" Requires="a14">
+      <mc:AlternateContent xmlns:mc="http://schemas.openxmlformats.org/markup-compatibility/2006" xmlns:a14="http://schemas.microsoft.com/office/drawing/2010/main">
+        <mc:Choice Requires="a14">
           <p:sp>
             <p:nvSpPr>
               <p:cNvPr id="4" name="TextBox 3">
@@ -7179,7 +8554,7 @@
             </p:txBody>
           </p:sp>
         </mc:Choice>
-        <mc:Fallback>
+        <mc:Fallback xmlns="">
           <p:sp>
             <p:nvSpPr>
               <p:cNvPr id="4" name="TextBox 3">
@@ -7280,6 +8655,2497 @@
         <p:cNvPr id="1" name="">
           <a:extLst>
             <a:ext uri="{FF2B5EF4-FFF2-40B4-BE49-F238E27FC236}">
+              <a16:creationId xmlns:a16="http://schemas.microsoft.com/office/drawing/2014/main" id="{96E8F6A0-0934-7E3C-123C-023B8E4DF04E}"/>
+            </a:ext>
+          </a:extLst>
+        </p:cNvPr>
+        <p:cNvGrpSpPr/>
+        <p:nvPr/>
+      </p:nvGrpSpPr>
+      <p:grpSpPr>
+        <a:xfrm>
+          <a:off x="0" y="0"/>
+          <a:ext cx="0" cy="0"/>
+          <a:chOff x="0" y="0"/>
+          <a:chExt cx="0" cy="0"/>
+        </a:xfrm>
+      </p:grpSpPr>
+      <p:pic>
+        <p:nvPicPr>
+          <p:cNvPr id="7" name="Picture 6">
+            <a:extLst>
+              <a:ext uri="{FF2B5EF4-FFF2-40B4-BE49-F238E27FC236}">
+                <a16:creationId xmlns:a16="http://schemas.microsoft.com/office/drawing/2014/main" id="{8B24E9B3-080D-2476-08F8-27B48FC4DE67}"/>
+              </a:ext>
+            </a:extLst>
+          </p:cNvPr>
+          <p:cNvPicPr>
+            <a:picLocks noChangeAspect="1"/>
+          </p:cNvPicPr>
+          <p:nvPr/>
+        </p:nvPicPr>
+        <p:blipFill>
+          <a:blip r:embed="rId3">
+            <a:extLst>
+              <a:ext uri="{28A0092B-C50C-407E-A947-70E740481C1C}">
+                <a14:useLocalDpi xmlns:a14="http://schemas.microsoft.com/office/drawing/2010/main" val="0"/>
+              </a:ext>
+            </a:extLst>
+          </a:blip>
+          <a:stretch>
+            <a:fillRect/>
+          </a:stretch>
+        </p:blipFill>
+        <p:spPr>
+          <a:xfrm>
+            <a:off x="661602" y="1544667"/>
+            <a:ext cx="5340107" cy="4023368"/>
+          </a:xfrm>
+          <a:prstGeom prst="rect">
+            <a:avLst/>
+          </a:prstGeom>
+        </p:spPr>
+      </p:pic>
+      <p:pic>
+        <p:nvPicPr>
+          <p:cNvPr id="83" name="Gráfico 82">
+            <a:extLst>
+              <a:ext uri="{FF2B5EF4-FFF2-40B4-BE49-F238E27FC236}">
+                <a16:creationId xmlns:a16="http://schemas.microsoft.com/office/drawing/2014/main" id="{F50F3CB7-3BC6-0EC4-EC0F-33008C169FE2}"/>
+              </a:ext>
+            </a:extLst>
+          </p:cNvPr>
+          <p:cNvPicPr>
+            <a:picLocks noChangeAspect="1"/>
+          </p:cNvPicPr>
+          <p:nvPr/>
+        </p:nvPicPr>
+        <p:blipFill>
+          <a:blip r:embed="rId4">
+            <a:extLst>
+              <a:ext uri="{96DAC541-7B7A-43D3-8B79-37D633B846F1}">
+                <asvg:svgBlip xmlns:asvg="http://schemas.microsoft.com/office/drawing/2016/SVG/main" r:embed="rId5"/>
+              </a:ext>
+            </a:extLst>
+          </a:blip>
+          <a:stretch>
+            <a:fillRect/>
+          </a:stretch>
+        </p:blipFill>
+        <p:spPr>
+          <a:xfrm>
+            <a:off x="5045006" y="6356057"/>
+            <a:ext cx="6409575" cy="363174"/>
+          </a:xfrm>
+          <a:prstGeom prst="rect">
+            <a:avLst/>
+          </a:prstGeom>
+        </p:spPr>
+      </p:pic>
+      <p:sp>
+        <p:nvSpPr>
+          <p:cNvPr id="84" name="Marcador de número de diapositiva 83">
+            <a:extLst>
+              <a:ext uri="{FF2B5EF4-FFF2-40B4-BE49-F238E27FC236}">
+                <a16:creationId xmlns:a16="http://schemas.microsoft.com/office/drawing/2014/main" id="{AE90B481-A687-D5EB-E5D3-AE8A9CDFC36B}"/>
+              </a:ext>
+            </a:extLst>
+          </p:cNvPr>
+          <p:cNvSpPr>
+            <a:spLocks noGrp="1"/>
+          </p:cNvSpPr>
+          <p:nvPr>
+            <p:ph type="sldNum" sz="quarter" idx="7"/>
+          </p:nvPr>
+        </p:nvSpPr>
+        <p:spPr/>
+        <p:txBody>
+          <a:bodyPr/>
+          <a:lstStyle/>
+          <a:p>
+            <a:fld id="{B6F15528-21DE-4FAA-801E-634DDDAF4B2B}" type="slidenum">
+              <a:rPr lang="es-ES" smtClean="0"/>
+              <a:t>7</a:t>
+            </a:fld>
+            <a:endParaRPr lang="es-ES"/>
+          </a:p>
+        </p:txBody>
+      </p:sp>
+      <p:sp>
+        <p:nvSpPr>
+          <p:cNvPr id="3" name="Marcador de pie de página 2">
+            <a:extLst>
+              <a:ext uri="{FF2B5EF4-FFF2-40B4-BE49-F238E27FC236}">
+                <a16:creationId xmlns:a16="http://schemas.microsoft.com/office/drawing/2014/main" id="{DD31C28F-0AE1-3EB6-9207-ED193003ADD5}"/>
+              </a:ext>
+            </a:extLst>
+          </p:cNvPr>
+          <p:cNvSpPr>
+            <a:spLocks noGrp="1"/>
+          </p:cNvSpPr>
+          <p:nvPr>
+            <p:ph type="ftr" sz="quarter" idx="5"/>
+          </p:nvPr>
+        </p:nvSpPr>
+        <p:spPr/>
+        <p:txBody>
+          <a:bodyPr/>
+          <a:lstStyle/>
+          <a:p>
+            <a:pPr marL="12700">
+              <a:spcBef>
+                <a:spcPts val="15"/>
+              </a:spcBef>
+            </a:pPr>
+            <a:r>
+              <a:rPr lang="es-ES" spc="-5"/>
+              <a:t>LAB 1.0. WAVEGUIDES</a:t>
+            </a:r>
+            <a:endParaRPr lang="es-ES" spc="-5" dirty="0"/>
+          </a:p>
+        </p:txBody>
+      </p:sp>
+      <p:sp>
+        <p:nvSpPr>
+          <p:cNvPr id="5" name="Rectángulo 4">
+            <a:extLst>
+              <a:ext uri="{FF2B5EF4-FFF2-40B4-BE49-F238E27FC236}">
+                <a16:creationId xmlns:a16="http://schemas.microsoft.com/office/drawing/2014/main" id="{BC0C5D93-FC12-6F4C-E1E2-62BBC5CAD5D0}"/>
+              </a:ext>
+            </a:extLst>
+          </p:cNvPr>
+          <p:cNvSpPr/>
+          <p:nvPr/>
+        </p:nvSpPr>
+        <p:spPr>
+          <a:xfrm>
+            <a:off x="609441" y="1463032"/>
+            <a:ext cx="5486559" cy="4023368"/>
+          </a:xfrm>
+          <a:prstGeom prst="rect">
+            <a:avLst/>
+          </a:prstGeom>
+          <a:noFill/>
+          <a:ln w="28575">
+            <a:solidFill>
+              <a:srgbClr val="E0700D"/>
+            </a:solidFill>
+          </a:ln>
+        </p:spPr>
+        <p:style>
+          <a:lnRef idx="2">
+            <a:schemeClr val="accent1">
+              <a:shade val="15000"/>
+            </a:schemeClr>
+          </a:lnRef>
+          <a:fillRef idx="1">
+            <a:schemeClr val="accent1"/>
+          </a:fillRef>
+          <a:effectRef idx="0">
+            <a:schemeClr val="accent1"/>
+          </a:effectRef>
+          <a:fontRef idx="minor">
+            <a:schemeClr val="lt1"/>
+          </a:fontRef>
+        </p:style>
+        <p:txBody>
+          <a:bodyPr rtlCol="0" anchor="ctr"/>
+          <a:lstStyle/>
+          <a:p>
+            <a:pPr algn="ctr"/>
+            <a:endParaRPr lang="en-US"/>
+          </a:p>
+        </p:txBody>
+      </p:sp>
+      <p:sp>
+        <p:nvSpPr>
+          <p:cNvPr id="8" name="object 16">
+            <a:extLst>
+              <a:ext uri="{FF2B5EF4-FFF2-40B4-BE49-F238E27FC236}">
+                <a16:creationId xmlns:a16="http://schemas.microsoft.com/office/drawing/2014/main" id="{2D41020E-58C4-2DBC-828A-530C2A55114D}"/>
+              </a:ext>
+            </a:extLst>
+          </p:cNvPr>
+          <p:cNvSpPr txBox="1">
+            <a:spLocks noGrp="1"/>
+          </p:cNvSpPr>
+          <p:nvPr>
+            <p:ph type="title"/>
+          </p:nvPr>
+        </p:nvSpPr>
+        <p:spPr>
+          <a:xfrm>
+            <a:off x="631254" y="194877"/>
+            <a:ext cx="10994410" cy="782265"/>
+          </a:xfrm>
+          <a:prstGeom prst="rect">
+            <a:avLst/>
+          </a:prstGeom>
+        </p:spPr>
+        <p:txBody>
+          <a:bodyPr vert="horz" wrap="square" lIns="0" tIns="12700" rIns="0" bIns="0" rtlCol="0">
+            <a:spAutoFit/>
+          </a:bodyPr>
+          <a:lstStyle/>
+          <a:p>
+            <a:pPr marL="12700">
+              <a:lnSpc>
+                <a:spcPct val="100000"/>
+              </a:lnSpc>
+              <a:spcBef>
+                <a:spcPts val="100"/>
+              </a:spcBef>
+            </a:pPr>
+            <a:r>
+              <a:rPr lang="en-US" sz="2400" b="1" dirty="0"/>
+              <a:t>ASSESSMENT #1 </a:t>
+            </a:r>
+            <a:r>
+              <a:rPr lang="en-US" sz="2500" dirty="0"/>
+              <a:t>– Recap from theory – MZI configurations</a:t>
+            </a:r>
+            <a:br>
+              <a:rPr lang="es-ES" sz="2500" spc="-5" dirty="0">
+                <a:latin typeface="+mj-lt"/>
+                <a:cs typeface="Lucida Sans"/>
+              </a:rPr>
+            </a:br>
+            <a:endParaRPr sz="2500" b="0" dirty="0">
+              <a:latin typeface="+mj-lt"/>
+              <a:cs typeface="Lucida Sans"/>
+            </a:endParaRPr>
+          </a:p>
+        </p:txBody>
+      </p:sp>
+      <p:sp>
+        <p:nvSpPr>
+          <p:cNvPr id="12" name="TextBox 11">
+            <a:extLst>
+              <a:ext uri="{FF2B5EF4-FFF2-40B4-BE49-F238E27FC236}">
+                <a16:creationId xmlns:a16="http://schemas.microsoft.com/office/drawing/2014/main" id="{BB511F07-62E8-593E-E6CA-57C6F9972F35}"/>
+              </a:ext>
+            </a:extLst>
+          </p:cNvPr>
+          <p:cNvSpPr txBox="1"/>
+          <p:nvPr/>
+        </p:nvSpPr>
+        <p:spPr>
+          <a:xfrm>
+            <a:off x="566336" y="828306"/>
+            <a:ext cx="6128794" cy="369332"/>
+          </a:xfrm>
+          <a:prstGeom prst="rect">
+            <a:avLst/>
+          </a:prstGeom>
+          <a:noFill/>
+        </p:spPr>
+        <p:txBody>
+          <a:bodyPr wrap="square">
+            <a:spAutoFit/>
+          </a:bodyPr>
+          <a:lstStyle/>
+          <a:p>
+            <a:r>
+              <a:rPr lang="en-US" sz="1800" dirty="0"/>
+              <a:t>SOI Unbalanced configuration, phase difference</a:t>
+            </a:r>
+            <a:endParaRPr lang="es-CO" dirty="0"/>
+          </a:p>
+        </p:txBody>
+      </p:sp>
+      <mc:AlternateContent xmlns:mc="http://schemas.openxmlformats.org/markup-compatibility/2006" xmlns:a14="http://schemas.microsoft.com/office/drawing/2010/main">
+        <mc:Choice Requires="a14">
+          <p:sp>
+            <p:nvSpPr>
+              <p:cNvPr id="4" name="TextBox 3">
+                <a:extLst>
+                  <a:ext uri="{FF2B5EF4-FFF2-40B4-BE49-F238E27FC236}">
+                    <a16:creationId xmlns:a16="http://schemas.microsoft.com/office/drawing/2014/main" id="{A4E21CB8-5CFD-2AAC-DC4E-C5DEF70C635E}"/>
+                  </a:ext>
+                </a:extLst>
+              </p:cNvPr>
+              <p:cNvSpPr txBox="1"/>
+              <p:nvPr/>
+            </p:nvSpPr>
+            <p:spPr>
+              <a:xfrm>
+                <a:off x="6324600" y="1463032"/>
+                <a:ext cx="5638333" cy="923330"/>
+              </a:xfrm>
+              <a:prstGeom prst="rect">
+                <a:avLst/>
+              </a:prstGeom>
+              <a:noFill/>
+            </p:spPr>
+            <p:txBody>
+              <a:bodyPr wrap="square">
+                <a:spAutoFit/>
+              </a:bodyPr>
+              <a:lstStyle/>
+              <a:p>
+                <a:pPr algn="just"/>
+                <a:r>
+                  <a:rPr lang="en-US" b="1" dirty="0"/>
+                  <a:t>If both arms have the same physical length but different propagation constants (</a:t>
+                </a:r>
+                <a14:m>
+                  <m:oMath xmlns:m="http://schemas.openxmlformats.org/officeDocument/2006/math">
+                    <m:sSub>
+                      <m:sSubPr>
+                        <m:ctrlPr>
+                          <a:rPr lang="en-US" b="1" i="1" dirty="0" smtClean="0">
+                            <a:latin typeface="Cambria Math" panose="02040503050406030204" pitchFamily="18" charset="0"/>
+                          </a:rPr>
+                        </m:ctrlPr>
+                      </m:sSubPr>
+                      <m:e>
+                        <m:r>
+                          <a:rPr lang="en-US" b="1" i="1" dirty="0" smtClean="0">
+                            <a:latin typeface="Cambria Math" panose="02040503050406030204" pitchFamily="18" charset="0"/>
+                          </a:rPr>
+                          <m:t>𝜷</m:t>
+                        </m:r>
+                      </m:e>
+                      <m:sub>
+                        <m:r>
+                          <a:rPr lang="en-US" b="1" i="1" dirty="0" err="1">
+                            <a:latin typeface="Cambria Math" panose="02040503050406030204" pitchFamily="18" charset="0"/>
+                          </a:rPr>
+                          <m:t>𝒖</m:t>
+                        </m:r>
+                      </m:sub>
+                    </m:sSub>
+                    <m:r>
+                      <a:rPr lang="en-US" b="1" i="1" dirty="0">
+                        <a:latin typeface="Cambria Math" panose="02040503050406030204" pitchFamily="18" charset="0"/>
+                      </a:rPr>
+                      <m:t>≠</m:t>
+                    </m:r>
+                    <m:sSub>
+                      <m:sSubPr>
+                        <m:ctrlPr>
+                          <a:rPr lang="en-US" b="1" i="1" dirty="0" err="1">
+                            <a:latin typeface="Cambria Math" panose="02040503050406030204" pitchFamily="18" charset="0"/>
+                          </a:rPr>
+                        </m:ctrlPr>
+                      </m:sSubPr>
+                      <m:e>
+                        <m:r>
+                          <a:rPr lang="en-US" b="1" i="1" dirty="0">
+                            <a:latin typeface="Cambria Math" panose="02040503050406030204" pitchFamily="18" charset="0"/>
+                          </a:rPr>
+                          <m:t>𝜷</m:t>
+                        </m:r>
+                      </m:e>
+                      <m:sub>
+                        <m:r>
+                          <a:rPr lang="en-US" b="1" i="1" dirty="0" err="1" smtClean="0">
+                            <a:latin typeface="Cambria Math" panose="02040503050406030204" pitchFamily="18" charset="0"/>
+                          </a:rPr>
+                          <m:t>𝒅</m:t>
+                        </m:r>
+                      </m:sub>
+                    </m:sSub>
+                  </m:oMath>
+                </a14:m>
+                <a:r>
+                  <a:rPr lang="en-US" b="1" dirty="0"/>
+                  <a:t>), what generates the phase difference?</a:t>
+                </a:r>
+              </a:p>
+            </p:txBody>
+          </p:sp>
+        </mc:Choice>
+        <mc:Fallback xmlns="">
+          <p:sp>
+            <p:nvSpPr>
+              <p:cNvPr id="4" name="TextBox 3">
+                <a:extLst>
+                  <a:ext uri="{FF2B5EF4-FFF2-40B4-BE49-F238E27FC236}">
+                    <a16:creationId xmlns:a16="http://schemas.microsoft.com/office/drawing/2014/main" id="{A4E21CB8-5CFD-2AAC-DC4E-C5DEF70C635E}"/>
+                  </a:ext>
+                </a:extLst>
+              </p:cNvPr>
+              <p:cNvSpPr txBox="1">
+                <a:spLocks noRot="1" noChangeAspect="1" noMove="1" noResize="1" noEditPoints="1" noAdjustHandles="1" noChangeArrowheads="1" noChangeShapeType="1" noTextEdit="1"/>
+              </p:cNvSpPr>
+              <p:nvPr/>
+            </p:nvSpPr>
+            <p:spPr>
+              <a:xfrm>
+                <a:off x="6324600" y="1463032"/>
+                <a:ext cx="5638333" cy="923330"/>
+              </a:xfrm>
+              <a:prstGeom prst="rect">
+                <a:avLst/>
+              </a:prstGeom>
+              <a:blipFill>
+                <a:blip r:embed="rId6"/>
+                <a:stretch>
+                  <a:fillRect l="-974" t="-3974" r="-974" b="-9934"/>
+                </a:stretch>
+              </a:blipFill>
+            </p:spPr>
+            <p:txBody>
+              <a:bodyPr/>
+              <a:lstStyle/>
+              <a:p>
+                <a:r>
+                  <a:rPr lang="en-US">
+                    <a:noFill/>
+                  </a:rPr>
+                  <a:t> </a:t>
+                </a:r>
+              </a:p>
+            </p:txBody>
+          </p:sp>
+        </mc:Fallback>
+      </mc:AlternateContent>
+      <p:sp>
+        <p:nvSpPr>
+          <p:cNvPr id="6" name="TextBox 5">
+            <a:extLst>
+              <a:ext uri="{FF2B5EF4-FFF2-40B4-BE49-F238E27FC236}">
+                <a16:creationId xmlns:a16="http://schemas.microsoft.com/office/drawing/2014/main" id="{13D73E82-1150-C696-D133-CBAD9A3AFE68}"/>
+              </a:ext>
+            </a:extLst>
+          </p:cNvPr>
+          <p:cNvSpPr txBox="1"/>
+          <p:nvPr/>
+        </p:nvSpPr>
+        <p:spPr>
+          <a:xfrm>
+            <a:off x="6324600" y="2453250"/>
+            <a:ext cx="5638333" cy="646331"/>
+          </a:xfrm>
+          <a:prstGeom prst="rect">
+            <a:avLst/>
+          </a:prstGeom>
+          <a:noFill/>
+        </p:spPr>
+        <p:txBody>
+          <a:bodyPr wrap="square">
+            <a:spAutoFit/>
+          </a:bodyPr>
+          <a:lstStyle/>
+          <a:p>
+            <a:pPr algn="just"/>
+            <a:r>
+              <a:rPr lang="en-US" dirty="0"/>
+              <a:t>As mentioned before the phase difference on a MZI comes from the following expression.</a:t>
+            </a:r>
+          </a:p>
+        </p:txBody>
+      </p:sp>
+      <mc:AlternateContent xmlns:mc="http://schemas.openxmlformats.org/markup-compatibility/2006" xmlns:a14="http://schemas.microsoft.com/office/drawing/2010/main">
+        <mc:Choice Requires="a14">
+          <p:sp>
+            <p:nvSpPr>
+              <p:cNvPr id="9" name="TextBox 8">
+                <a:extLst>
+                  <a:ext uri="{FF2B5EF4-FFF2-40B4-BE49-F238E27FC236}">
+                    <a16:creationId xmlns:a16="http://schemas.microsoft.com/office/drawing/2014/main" id="{8845C1DD-BB2F-0EE5-94E5-6B45D82C5BFF}"/>
+                  </a:ext>
+                </a:extLst>
+              </p:cNvPr>
+              <p:cNvSpPr txBox="1"/>
+              <p:nvPr/>
+            </p:nvSpPr>
+            <p:spPr>
+              <a:xfrm>
+                <a:off x="6858000" y="3212068"/>
+                <a:ext cx="4343400" cy="369332"/>
+              </a:xfrm>
+              <a:prstGeom prst="rect">
+                <a:avLst/>
+              </a:prstGeom>
+              <a:noFill/>
+            </p:spPr>
+            <p:txBody>
+              <a:bodyPr wrap="square">
+                <a:spAutoFit/>
+              </a:bodyPr>
+              <a:lstStyle/>
+              <a:p>
+                <a:pPr>
+                  <a:buNone/>
+                </a:pPr>
+                <a14:m>
+                  <m:oMathPara xmlns:m="http://schemas.openxmlformats.org/officeDocument/2006/math">
+                    <m:oMathParaPr>
+                      <m:jc m:val="centerGroup"/>
+                    </m:oMathParaPr>
+                    <m:oMath xmlns:m="http://schemas.openxmlformats.org/officeDocument/2006/math">
+                      <m:r>
+                        <m:rPr>
+                          <m:sty m:val="p"/>
+                        </m:rPr>
+                        <a:rPr lang="es-CO" i="0" dirty="0" smtClean="0">
+                          <a:latin typeface="Cambria Math" panose="02040503050406030204" pitchFamily="18" charset="0"/>
+                        </a:rPr>
+                        <m:t>Δ</m:t>
+                      </m:r>
+                      <m:sSub>
+                        <m:sSubPr>
+                          <m:ctrlPr>
+                            <a:rPr lang="es-CO" i="1" dirty="0" smtClean="0">
+                              <a:latin typeface="Cambria Math" panose="02040503050406030204" pitchFamily="18" charset="0"/>
+                            </a:rPr>
+                          </m:ctrlPr>
+                        </m:sSubPr>
+                        <m:e>
+                          <m:r>
+                            <a:rPr lang="es-CO" i="1" dirty="0" smtClean="0">
+                              <a:latin typeface="Cambria Math" panose="02040503050406030204" pitchFamily="18" charset="0"/>
+                            </a:rPr>
+                            <m:t>𝜙</m:t>
+                          </m:r>
+                        </m:e>
+                        <m:sub>
+                          <m:r>
+                            <a:rPr lang="es-CO" i="1" dirty="0" err="1" smtClean="0">
+                              <a:latin typeface="Cambria Math" panose="02040503050406030204" pitchFamily="18" charset="0"/>
+                            </a:rPr>
+                            <m:t>𝑢𝑑</m:t>
+                          </m:r>
+                        </m:sub>
+                      </m:sSub>
+                      <m:r>
+                        <a:rPr lang="es-CO" i="1" dirty="0" smtClean="0">
+                          <a:latin typeface="Cambria Math" panose="02040503050406030204" pitchFamily="18" charset="0"/>
+                        </a:rPr>
+                        <m:t>=</m:t>
+                      </m:r>
+                      <m:sSub>
+                        <m:sSubPr>
+                          <m:ctrlPr>
+                            <a:rPr lang="es-CO" i="1" dirty="0" err="1" smtClean="0">
+                              <a:latin typeface="Cambria Math" panose="02040503050406030204" pitchFamily="18" charset="0"/>
+                            </a:rPr>
+                          </m:ctrlPr>
+                        </m:sSubPr>
+                        <m:e>
+                          <m:r>
+                            <a:rPr lang="es-CO" i="1" dirty="0" smtClean="0">
+                              <a:latin typeface="Cambria Math" panose="02040503050406030204" pitchFamily="18" charset="0"/>
+                            </a:rPr>
+                            <m:t>𝛽</m:t>
+                          </m:r>
+                        </m:e>
+                        <m:sub>
+                          <m:r>
+                            <a:rPr lang="es-CO" i="1" dirty="0" err="1" smtClean="0">
+                              <a:latin typeface="Cambria Math" panose="02040503050406030204" pitchFamily="18" charset="0"/>
+                            </a:rPr>
+                            <m:t>𝑢</m:t>
+                          </m:r>
+                        </m:sub>
+                      </m:sSub>
+                      <m:d>
+                        <m:dPr>
+                          <m:ctrlPr>
+                            <a:rPr lang="es-CO" i="1" dirty="0" smtClean="0">
+                              <a:latin typeface="Cambria Math" panose="02040503050406030204" pitchFamily="18" charset="0"/>
+                            </a:rPr>
+                          </m:ctrlPr>
+                        </m:dPr>
+                        <m:e>
+                          <m:r>
+                            <a:rPr lang="es-CO" i="1" dirty="0" smtClean="0">
+                              <a:latin typeface="Cambria Math" panose="02040503050406030204" pitchFamily="18" charset="0"/>
+                            </a:rPr>
+                            <m:t>𝜆</m:t>
+                          </m:r>
+                        </m:e>
+                      </m:d>
+                      <m:sSub>
+                        <m:sSubPr>
+                          <m:ctrlPr>
+                            <a:rPr lang="es-CO" i="1" dirty="0" err="1" smtClean="0">
+                              <a:latin typeface="Cambria Math" panose="02040503050406030204" pitchFamily="18" charset="0"/>
+                            </a:rPr>
+                          </m:ctrlPr>
+                        </m:sSubPr>
+                        <m:e>
+                          <m:r>
+                            <a:rPr lang="es-CO" i="1" dirty="0" err="1" smtClean="0">
+                              <a:latin typeface="Cambria Math" panose="02040503050406030204" pitchFamily="18" charset="0"/>
+                            </a:rPr>
+                            <m:t>𝐿</m:t>
+                          </m:r>
+                        </m:e>
+                        <m:sub>
+                          <m:r>
+                            <a:rPr lang="es-CO" i="1" dirty="0" err="1" smtClean="0">
+                              <a:latin typeface="Cambria Math" panose="02040503050406030204" pitchFamily="18" charset="0"/>
+                            </a:rPr>
+                            <m:t>𝑢</m:t>
+                          </m:r>
+                        </m:sub>
+                      </m:sSub>
+                      <m:r>
+                        <a:rPr lang="es-CO" i="1" dirty="0" smtClean="0">
+                          <a:latin typeface="Cambria Math" panose="02040503050406030204" pitchFamily="18" charset="0"/>
+                        </a:rPr>
+                        <m:t>−</m:t>
+                      </m:r>
+                      <m:sSub>
+                        <m:sSubPr>
+                          <m:ctrlPr>
+                            <a:rPr lang="es-CO" i="1" dirty="0" err="1" smtClean="0">
+                              <a:latin typeface="Cambria Math" panose="02040503050406030204" pitchFamily="18" charset="0"/>
+                            </a:rPr>
+                          </m:ctrlPr>
+                        </m:sSubPr>
+                        <m:e>
+                          <m:r>
+                            <a:rPr lang="es-CO" i="1" dirty="0" smtClean="0">
+                              <a:latin typeface="Cambria Math" panose="02040503050406030204" pitchFamily="18" charset="0"/>
+                            </a:rPr>
+                            <m:t>𝛽</m:t>
+                          </m:r>
+                        </m:e>
+                        <m:sub>
+                          <m:r>
+                            <a:rPr lang="es-CO" i="1" dirty="0" err="1" smtClean="0">
+                              <a:latin typeface="Cambria Math" panose="02040503050406030204" pitchFamily="18" charset="0"/>
+                            </a:rPr>
+                            <m:t>𝑑</m:t>
+                          </m:r>
+                        </m:sub>
+                      </m:sSub>
+                      <m:d>
+                        <m:dPr>
+                          <m:ctrlPr>
+                            <a:rPr lang="es-CO" i="1" dirty="0" smtClean="0">
+                              <a:latin typeface="Cambria Math" panose="02040503050406030204" pitchFamily="18" charset="0"/>
+                            </a:rPr>
+                          </m:ctrlPr>
+                        </m:dPr>
+                        <m:e>
+                          <m:r>
+                            <a:rPr lang="es-CO" i="1" dirty="0" smtClean="0">
+                              <a:latin typeface="Cambria Math" panose="02040503050406030204" pitchFamily="18" charset="0"/>
+                            </a:rPr>
+                            <m:t>𝜆</m:t>
+                          </m:r>
+                        </m:e>
+                      </m:d>
+                      <m:sSub>
+                        <m:sSubPr>
+                          <m:ctrlPr>
+                            <a:rPr lang="es-CO" i="1" dirty="0" err="1" smtClean="0">
+                              <a:latin typeface="Cambria Math" panose="02040503050406030204" pitchFamily="18" charset="0"/>
+                            </a:rPr>
+                          </m:ctrlPr>
+                        </m:sSubPr>
+                        <m:e>
+                          <m:r>
+                            <a:rPr lang="es-CO" i="1" dirty="0" err="1" smtClean="0">
+                              <a:latin typeface="Cambria Math" panose="02040503050406030204" pitchFamily="18" charset="0"/>
+                            </a:rPr>
+                            <m:t>𝐿</m:t>
+                          </m:r>
+                        </m:e>
+                        <m:sub>
+                          <m:r>
+                            <a:rPr lang="es-CO" i="1" dirty="0" err="1" smtClean="0">
+                              <a:latin typeface="Cambria Math" panose="02040503050406030204" pitchFamily="18" charset="0"/>
+                            </a:rPr>
+                            <m:t>𝑑</m:t>
+                          </m:r>
+                        </m:sub>
+                      </m:sSub>
+                    </m:oMath>
+                  </m:oMathPara>
+                </a14:m>
+                <a:endParaRPr/>
+              </a:p>
+            </p:txBody>
+          </p:sp>
+        </mc:Choice>
+        <mc:Fallback xmlns="">
+          <p:sp>
+            <p:nvSpPr>
+              <p:cNvPr id="9" name="TextBox 8">
+                <a:extLst>
+                  <a:ext uri="{FF2B5EF4-FFF2-40B4-BE49-F238E27FC236}">
+                    <a16:creationId xmlns:a16="http://schemas.microsoft.com/office/drawing/2014/main" id="{8845C1DD-BB2F-0EE5-94E5-6B45D82C5BFF}"/>
+                  </a:ext>
+                </a:extLst>
+              </p:cNvPr>
+              <p:cNvSpPr txBox="1">
+                <a:spLocks noRot="1" noChangeAspect="1" noMove="1" noResize="1" noEditPoints="1" noAdjustHandles="1" noChangeArrowheads="1" noChangeShapeType="1" noTextEdit="1"/>
+              </p:cNvSpPr>
+              <p:nvPr/>
+            </p:nvSpPr>
+            <p:spPr>
+              <a:xfrm>
+                <a:off x="6858000" y="3212068"/>
+                <a:ext cx="4343400" cy="369332"/>
+              </a:xfrm>
+              <a:prstGeom prst="rect">
+                <a:avLst/>
+              </a:prstGeom>
+              <a:blipFill>
+                <a:blip r:embed="rId7"/>
+                <a:stretch>
+                  <a:fillRect t="-11475" b="-22951"/>
+                </a:stretch>
+              </a:blipFill>
+            </p:spPr>
+            <p:txBody>
+              <a:bodyPr/>
+              <a:lstStyle/>
+              <a:p>
+                <a:r>
+                  <a:rPr lang="en-US">
+                    <a:noFill/>
+                  </a:rPr>
+                  <a:t> </a:t>
+                </a:r>
+              </a:p>
+            </p:txBody>
+          </p:sp>
+        </mc:Fallback>
+      </mc:AlternateContent>
+      <mc:AlternateContent xmlns:mc="http://schemas.openxmlformats.org/markup-compatibility/2006">
+        <mc:Choice xmlns:a14="http://schemas.microsoft.com/office/drawing/2010/main" Requires="a14">
+          <p:sp>
+            <p:nvSpPr>
+              <p:cNvPr id="11" name="TextBox 10">
+                <a:extLst>
+                  <a:ext uri="{FF2B5EF4-FFF2-40B4-BE49-F238E27FC236}">
+                    <a16:creationId xmlns:a16="http://schemas.microsoft.com/office/drawing/2014/main" id="{F3CC5BE4-31E0-D757-0CFD-8F2307A3B2B4}"/>
+                  </a:ext>
+                </a:extLst>
+              </p:cNvPr>
+              <p:cNvSpPr txBox="1"/>
+              <p:nvPr/>
+            </p:nvSpPr>
+            <p:spPr>
+              <a:xfrm>
+                <a:off x="6304384" y="3753601"/>
+                <a:ext cx="5637600" cy="646331"/>
+              </a:xfrm>
+              <a:prstGeom prst="rect">
+                <a:avLst/>
+              </a:prstGeom>
+              <a:noFill/>
+            </p:spPr>
+            <p:txBody>
+              <a:bodyPr wrap="square">
+                <a:spAutoFit/>
+              </a:bodyPr>
+              <a:lstStyle/>
+              <a:p>
+                <a:pPr algn="just">
+                  <a:buNone/>
+                </a:pPr>
+                <a:r>
+                  <a:rPr lang="en-US" dirty="0"/>
+                  <a:t>If both lengths are equal </a:t>
+                </a:r>
+                <a14:m>
+                  <m:oMath xmlns:m="http://schemas.openxmlformats.org/officeDocument/2006/math">
+                    <m:sSub>
+                      <m:sSubPr>
+                        <m:ctrlPr>
+                          <a:rPr lang="en-US" i="1" dirty="0" smtClean="0">
+                            <a:latin typeface="Cambria Math" panose="02040503050406030204" pitchFamily="18" charset="0"/>
+                          </a:rPr>
+                        </m:ctrlPr>
+                      </m:sSubPr>
+                      <m:e>
+                        <m:r>
+                          <a:rPr lang="en-US" i="1" dirty="0" smtClean="0">
+                            <a:latin typeface="Cambria Math" panose="02040503050406030204" pitchFamily="18" charset="0"/>
+                          </a:rPr>
+                          <m:t>𝐿</m:t>
+                        </m:r>
+                      </m:e>
+                      <m:sub>
+                        <m:r>
+                          <a:rPr lang="en-US" i="1" dirty="0" smtClean="0">
+                            <a:latin typeface="Cambria Math" panose="02040503050406030204" pitchFamily="18" charset="0"/>
+                          </a:rPr>
+                          <m:t>𝑢</m:t>
+                        </m:r>
+                      </m:sub>
+                    </m:sSub>
+                    <m:r>
+                      <a:rPr lang="en-US" i="1" dirty="0">
+                        <a:latin typeface="Cambria Math" panose="02040503050406030204" pitchFamily="18" charset="0"/>
+                      </a:rPr>
+                      <m:t>=</m:t>
+                    </m:r>
+                    <m:sSub>
+                      <m:sSubPr>
+                        <m:ctrlPr>
+                          <a:rPr lang="en-US" i="1" dirty="0" err="1">
+                            <a:latin typeface="Cambria Math" panose="02040503050406030204" pitchFamily="18" charset="0"/>
+                          </a:rPr>
+                        </m:ctrlPr>
+                      </m:sSubPr>
+                      <m:e>
+                        <m:r>
+                          <a:rPr lang="en-US" i="1" dirty="0" err="1">
+                            <a:latin typeface="Cambria Math" panose="02040503050406030204" pitchFamily="18" charset="0"/>
+                          </a:rPr>
+                          <m:t>𝐿</m:t>
+                        </m:r>
+                      </m:e>
+                      <m:sub>
+                        <m:r>
+                          <a:rPr lang="en-US" i="1" dirty="0" err="1">
+                            <a:latin typeface="Cambria Math" panose="02040503050406030204" pitchFamily="18" charset="0"/>
+                          </a:rPr>
+                          <m:t>𝑑</m:t>
+                        </m:r>
+                      </m:sub>
+                    </m:sSub>
+                    <m:r>
+                      <a:rPr lang="en-US" i="1" dirty="0">
+                        <a:latin typeface="Cambria Math" panose="02040503050406030204" pitchFamily="18" charset="0"/>
+                      </a:rPr>
+                      <m:t>=</m:t>
+                    </m:r>
+                    <m:r>
+                      <a:rPr lang="en-US" i="1" dirty="0">
+                        <a:latin typeface="Cambria Math" panose="02040503050406030204" pitchFamily="18" charset="0"/>
+                      </a:rPr>
+                      <m:t>𝐿</m:t>
+                    </m:r>
+                    <m:r>
+                      <a:rPr lang="es-MX" b="0" i="1" dirty="0" smtClean="0">
+                        <a:latin typeface="Cambria Math" panose="02040503050406030204" pitchFamily="18" charset="0"/>
+                      </a:rPr>
+                      <m:t> </m:t>
+                    </m:r>
+                  </m:oMath>
+                </a14:m>
+                <a:r>
+                  <a:rPr lang="en-US" dirty="0"/>
+                  <a:t>the equation still is affected by the differences on </a:t>
+                </a:r>
+                <a14:m>
+                  <m:oMath xmlns:m="http://schemas.openxmlformats.org/officeDocument/2006/math">
+                    <m:r>
+                      <a:rPr lang="en-US" i="1" dirty="0" smtClean="0">
+                        <a:latin typeface="Cambria Math" panose="02040503050406030204" pitchFamily="18" charset="0"/>
+                      </a:rPr>
+                      <m:t>𝛽</m:t>
+                    </m:r>
+                  </m:oMath>
+                </a14:m>
+                <a:r>
+                  <a:rPr lang="en-US" dirty="0"/>
+                  <a:t>.</a:t>
+                </a:r>
+              </a:p>
+            </p:txBody>
+          </p:sp>
+        </mc:Choice>
+        <mc:Fallback>
+          <p:sp>
+            <p:nvSpPr>
+              <p:cNvPr id="11" name="TextBox 10">
+                <a:extLst>
+                  <a:ext uri="{FF2B5EF4-FFF2-40B4-BE49-F238E27FC236}">
+                    <a16:creationId xmlns:a16="http://schemas.microsoft.com/office/drawing/2014/main" id="{F3CC5BE4-31E0-D757-0CFD-8F2307A3B2B4}"/>
+                  </a:ext>
+                </a:extLst>
+              </p:cNvPr>
+              <p:cNvSpPr txBox="1">
+                <a:spLocks noRot="1" noChangeAspect="1" noMove="1" noResize="1" noEditPoints="1" noAdjustHandles="1" noChangeArrowheads="1" noChangeShapeType="1" noTextEdit="1"/>
+              </p:cNvSpPr>
+              <p:nvPr/>
+            </p:nvSpPr>
+            <p:spPr>
+              <a:xfrm>
+                <a:off x="6304384" y="3753601"/>
+                <a:ext cx="5637600" cy="646331"/>
+              </a:xfrm>
+              <a:prstGeom prst="rect">
+                <a:avLst/>
+              </a:prstGeom>
+              <a:blipFill>
+                <a:blip r:embed="rId8"/>
+                <a:stretch>
+                  <a:fillRect l="-865" t="-5660" r="-973" b="-14151"/>
+                </a:stretch>
+              </a:blipFill>
+            </p:spPr>
+            <p:txBody>
+              <a:bodyPr/>
+              <a:lstStyle/>
+              <a:p>
+                <a:r>
+                  <a:rPr lang="en-US">
+                    <a:noFill/>
+                  </a:rPr>
+                  <a:t> </a:t>
+                </a:r>
+              </a:p>
+            </p:txBody>
+          </p:sp>
+        </mc:Fallback>
+      </mc:AlternateContent>
+      <mc:AlternateContent xmlns:mc="http://schemas.openxmlformats.org/markup-compatibility/2006" xmlns:a14="http://schemas.microsoft.com/office/drawing/2010/main">
+        <mc:Choice Requires="a14">
+          <p:sp>
+            <p:nvSpPr>
+              <p:cNvPr id="14" name="TextBox 13">
+                <a:extLst>
+                  <a:ext uri="{FF2B5EF4-FFF2-40B4-BE49-F238E27FC236}">
+                    <a16:creationId xmlns:a16="http://schemas.microsoft.com/office/drawing/2014/main" id="{5C51E6E0-B2B0-98B3-4392-2BAEC0AA14A9}"/>
+                  </a:ext>
+                </a:extLst>
+              </p:cNvPr>
+              <p:cNvSpPr txBox="1"/>
+              <p:nvPr/>
+            </p:nvSpPr>
+            <p:spPr>
+              <a:xfrm>
+                <a:off x="6701350" y="4522162"/>
+                <a:ext cx="4343400" cy="404983"/>
+              </a:xfrm>
+              <a:prstGeom prst="rect">
+                <a:avLst/>
+              </a:prstGeom>
+              <a:noFill/>
+            </p:spPr>
+            <p:txBody>
+              <a:bodyPr wrap="square">
+                <a:spAutoFit/>
+              </a:bodyPr>
+              <a:lstStyle/>
+              <a:p>
+                <a:pPr>
+                  <a:buNone/>
+                </a:pPr>
+                <a14:m>
+                  <m:oMathPara xmlns:m="http://schemas.openxmlformats.org/officeDocument/2006/math">
+                    <m:oMathParaPr>
+                      <m:jc m:val="centerGroup"/>
+                    </m:oMathParaPr>
+                    <m:oMath xmlns:m="http://schemas.openxmlformats.org/officeDocument/2006/math">
+                      <m:r>
+                        <m:rPr>
+                          <m:sty m:val="p"/>
+                        </m:rPr>
+                        <a:rPr lang="es-CO" i="0" dirty="0" smtClean="0">
+                          <a:latin typeface="Cambria Math" panose="02040503050406030204" pitchFamily="18" charset="0"/>
+                        </a:rPr>
+                        <m:t>Δ</m:t>
+                      </m:r>
+                      <m:sSub>
+                        <m:sSubPr>
+                          <m:ctrlPr>
+                            <a:rPr lang="es-CO" i="1" dirty="0" smtClean="0">
+                              <a:latin typeface="Cambria Math" panose="02040503050406030204" pitchFamily="18" charset="0"/>
+                            </a:rPr>
+                          </m:ctrlPr>
+                        </m:sSubPr>
+                        <m:e>
+                          <m:r>
+                            <a:rPr lang="es-CO" i="1" dirty="0" smtClean="0">
+                              <a:latin typeface="Cambria Math" panose="02040503050406030204" pitchFamily="18" charset="0"/>
+                            </a:rPr>
+                            <m:t>𝜙</m:t>
+                          </m:r>
+                        </m:e>
+                        <m:sub>
+                          <m:r>
+                            <a:rPr lang="es-CO" i="1" dirty="0" err="1">
+                              <a:latin typeface="Cambria Math" panose="02040503050406030204" pitchFamily="18" charset="0"/>
+                            </a:rPr>
+                            <m:t>𝑢𝑑</m:t>
+                          </m:r>
+                        </m:sub>
+                      </m:sSub>
+                      <m:r>
+                        <a:rPr lang="es-CO" i="1" dirty="0">
+                          <a:latin typeface="Cambria Math" panose="02040503050406030204" pitchFamily="18" charset="0"/>
+                        </a:rPr>
+                        <m:t>=</m:t>
+                      </m:r>
+                      <m:d>
+                        <m:dPr>
+                          <m:ctrlPr>
+                            <a:rPr lang="es-CO" i="1" dirty="0">
+                              <a:latin typeface="Cambria Math" panose="02040503050406030204" pitchFamily="18" charset="0"/>
+                            </a:rPr>
+                          </m:ctrlPr>
+                        </m:dPr>
+                        <m:e>
+                          <m:sSub>
+                            <m:sSubPr>
+                              <m:ctrlPr>
+                                <a:rPr lang="es-CO" i="1" dirty="0" err="1">
+                                  <a:latin typeface="Cambria Math" panose="02040503050406030204" pitchFamily="18" charset="0"/>
+                                </a:rPr>
+                              </m:ctrlPr>
+                            </m:sSubPr>
+                            <m:e>
+                              <m:r>
+                                <a:rPr lang="es-CO" i="1" dirty="0">
+                                  <a:latin typeface="Cambria Math" panose="02040503050406030204" pitchFamily="18" charset="0"/>
+                                </a:rPr>
+                                <m:t>𝛽</m:t>
+                              </m:r>
+                            </m:e>
+                            <m:sub>
+                              <m:r>
+                                <a:rPr lang="es-CO" i="1" dirty="0" err="1">
+                                  <a:latin typeface="Cambria Math" panose="02040503050406030204" pitchFamily="18" charset="0"/>
+                                </a:rPr>
+                                <m:t>𝑢</m:t>
+                              </m:r>
+                            </m:sub>
+                          </m:sSub>
+                          <m:d>
+                            <m:dPr>
+                              <m:ctrlPr>
+                                <a:rPr lang="es-CO" i="1" dirty="0">
+                                  <a:latin typeface="Cambria Math" panose="02040503050406030204" pitchFamily="18" charset="0"/>
+                                </a:rPr>
+                              </m:ctrlPr>
+                            </m:dPr>
+                            <m:e>
+                              <m:r>
+                                <a:rPr lang="es-CO" i="1" dirty="0">
+                                  <a:latin typeface="Cambria Math" panose="02040503050406030204" pitchFamily="18" charset="0"/>
+                                </a:rPr>
+                                <m:t>𝜆</m:t>
+                              </m:r>
+                            </m:e>
+                          </m:d>
+                          <m:r>
+                            <a:rPr lang="es-CO" i="1" dirty="0">
+                              <a:latin typeface="Cambria Math" panose="02040503050406030204" pitchFamily="18" charset="0"/>
+                            </a:rPr>
+                            <m:t>−</m:t>
+                          </m:r>
+                          <m:sSub>
+                            <m:sSubPr>
+                              <m:ctrlPr>
+                                <a:rPr lang="es-CO" i="1" dirty="0" err="1">
+                                  <a:latin typeface="Cambria Math" panose="02040503050406030204" pitchFamily="18" charset="0"/>
+                                </a:rPr>
+                              </m:ctrlPr>
+                            </m:sSubPr>
+                            <m:e>
+                              <m:r>
+                                <a:rPr lang="es-CO" i="1" dirty="0">
+                                  <a:latin typeface="Cambria Math" panose="02040503050406030204" pitchFamily="18" charset="0"/>
+                                </a:rPr>
+                                <m:t>𝛽</m:t>
+                              </m:r>
+                            </m:e>
+                            <m:sub>
+                              <m:r>
+                                <a:rPr lang="es-CO" i="1" dirty="0" err="1">
+                                  <a:latin typeface="Cambria Math" panose="02040503050406030204" pitchFamily="18" charset="0"/>
+                                </a:rPr>
+                                <m:t>𝑑</m:t>
+                              </m:r>
+                            </m:sub>
+                          </m:sSub>
+                          <m:d>
+                            <m:dPr>
+                              <m:ctrlPr>
+                                <a:rPr lang="es-CO" i="1" dirty="0">
+                                  <a:latin typeface="Cambria Math" panose="02040503050406030204" pitchFamily="18" charset="0"/>
+                                </a:rPr>
+                              </m:ctrlPr>
+                            </m:dPr>
+                            <m:e>
+                              <m:r>
+                                <a:rPr lang="es-CO" i="1" dirty="0">
+                                  <a:latin typeface="Cambria Math" panose="02040503050406030204" pitchFamily="18" charset="0"/>
+                                </a:rPr>
+                                <m:t>𝜆</m:t>
+                              </m:r>
+                            </m:e>
+                          </m:d>
+                        </m:e>
+                      </m:d>
+                      <m:r>
+                        <a:rPr lang="es-CO" i="1" dirty="0">
+                          <a:latin typeface="Cambria Math" panose="02040503050406030204" pitchFamily="18" charset="0"/>
+                        </a:rPr>
+                        <m:t>𝐿</m:t>
+                      </m:r>
+                    </m:oMath>
+                  </m:oMathPara>
+                </a14:m>
+                <a:endParaRPr/>
+              </a:p>
+            </p:txBody>
+          </p:sp>
+        </mc:Choice>
+        <mc:Fallback xmlns="">
+          <p:sp>
+            <p:nvSpPr>
+              <p:cNvPr id="14" name="TextBox 13">
+                <a:extLst>
+                  <a:ext uri="{FF2B5EF4-FFF2-40B4-BE49-F238E27FC236}">
+                    <a16:creationId xmlns:a16="http://schemas.microsoft.com/office/drawing/2014/main" id="{5C51E6E0-B2B0-98B3-4392-2BAEC0AA14A9}"/>
+                  </a:ext>
+                </a:extLst>
+              </p:cNvPr>
+              <p:cNvSpPr txBox="1">
+                <a:spLocks noRot="1" noChangeAspect="1" noMove="1" noResize="1" noEditPoints="1" noAdjustHandles="1" noChangeArrowheads="1" noChangeShapeType="1" noTextEdit="1"/>
+              </p:cNvSpPr>
+              <p:nvPr/>
+            </p:nvSpPr>
+            <p:spPr>
+              <a:xfrm>
+                <a:off x="6701350" y="4522162"/>
+                <a:ext cx="4343400" cy="404983"/>
+              </a:xfrm>
+              <a:prstGeom prst="rect">
+                <a:avLst/>
+              </a:prstGeom>
+              <a:blipFill>
+                <a:blip r:embed="rId9"/>
+                <a:stretch>
+                  <a:fillRect t="-6061" b="-18182"/>
+                </a:stretch>
+              </a:blipFill>
+            </p:spPr>
+            <p:txBody>
+              <a:bodyPr/>
+              <a:lstStyle/>
+              <a:p>
+                <a:r>
+                  <a:rPr lang="en-US">
+                    <a:noFill/>
+                  </a:rPr>
+                  <a:t> </a:t>
+                </a:r>
+              </a:p>
+            </p:txBody>
+          </p:sp>
+        </mc:Fallback>
+      </mc:AlternateContent>
+      <p:sp>
+        <p:nvSpPr>
+          <p:cNvPr id="10" name="TextBox 9">
+            <a:extLst>
+              <a:ext uri="{FF2B5EF4-FFF2-40B4-BE49-F238E27FC236}">
+                <a16:creationId xmlns:a16="http://schemas.microsoft.com/office/drawing/2014/main" id="{83BAA782-7140-E833-40BF-9C391EA5CDEF}"/>
+              </a:ext>
+            </a:extLst>
+          </p:cNvPr>
+          <p:cNvSpPr txBox="1"/>
+          <p:nvPr/>
+        </p:nvSpPr>
+        <p:spPr>
+          <a:xfrm>
+            <a:off x="6324600" y="5077589"/>
+            <a:ext cx="5637600" cy="646331"/>
+          </a:xfrm>
+          <a:prstGeom prst="rect">
+            <a:avLst/>
+          </a:prstGeom>
+          <a:noFill/>
+        </p:spPr>
+        <p:txBody>
+          <a:bodyPr wrap="square">
+            <a:spAutoFit/>
+          </a:bodyPr>
+          <a:lstStyle/>
+          <a:p>
+            <a:r>
+              <a:rPr lang="en-US" dirty="0"/>
+              <a:t>For this example, one branch of the MZI has a cladding of SOI and the other branch has its core exposed to air.</a:t>
+            </a:r>
+          </a:p>
+        </p:txBody>
+      </p:sp>
+    </p:spTree>
+    <p:extLst>
+      <p:ext uri="{BB962C8B-B14F-4D97-AF65-F5344CB8AC3E}">
+        <p14:creationId xmlns:p14="http://schemas.microsoft.com/office/powerpoint/2010/main" val="3040931528"/>
+      </p:ext>
+    </p:extLst>
+  </p:cSld>
+  <p:clrMapOvr>
+    <a:masterClrMapping/>
+  </p:clrMapOvr>
+</p:sld>
+</file>
+
+<file path=ppt/slides/slide8.xml><?xml version="1.0" encoding="utf-8"?>
+<p:sld xmlns:a="http://schemas.openxmlformats.org/drawingml/2006/main" xmlns:r="http://schemas.openxmlformats.org/officeDocument/2006/relationships" xmlns:p="http://schemas.openxmlformats.org/presentationml/2006/main">
+  <p:cSld>
+    <p:spTree>
+      <p:nvGrpSpPr>
+        <p:cNvPr id="1" name="">
+          <a:extLst>
+            <a:ext uri="{FF2B5EF4-FFF2-40B4-BE49-F238E27FC236}">
+              <a16:creationId xmlns:a16="http://schemas.microsoft.com/office/drawing/2014/main" id="{6784B3C4-2D48-25F2-E188-CC55F3B0A01E}"/>
+            </a:ext>
+          </a:extLst>
+        </p:cNvPr>
+        <p:cNvGrpSpPr/>
+        <p:nvPr/>
+      </p:nvGrpSpPr>
+      <p:grpSpPr>
+        <a:xfrm>
+          <a:off x="0" y="0"/>
+          <a:ext cx="0" cy="0"/>
+          <a:chOff x="0" y="0"/>
+          <a:chExt cx="0" cy="0"/>
+        </a:xfrm>
+      </p:grpSpPr>
+      <p:pic>
+        <p:nvPicPr>
+          <p:cNvPr id="83" name="Gráfico 82">
+            <a:extLst>
+              <a:ext uri="{FF2B5EF4-FFF2-40B4-BE49-F238E27FC236}">
+                <a16:creationId xmlns:a16="http://schemas.microsoft.com/office/drawing/2014/main" id="{D5C8EFDB-A807-6A15-CE02-2C5FBFA26D33}"/>
+              </a:ext>
+            </a:extLst>
+          </p:cNvPr>
+          <p:cNvPicPr>
+            <a:picLocks noChangeAspect="1"/>
+          </p:cNvPicPr>
+          <p:nvPr/>
+        </p:nvPicPr>
+        <p:blipFill>
+          <a:blip r:embed="rId3">
+            <a:extLst>
+              <a:ext uri="{96DAC541-7B7A-43D3-8B79-37D633B846F1}">
+                <asvg:svgBlip xmlns:asvg="http://schemas.microsoft.com/office/drawing/2016/SVG/main" r:embed="rId4"/>
+              </a:ext>
+            </a:extLst>
+          </a:blip>
+          <a:stretch>
+            <a:fillRect/>
+          </a:stretch>
+        </p:blipFill>
+        <p:spPr>
+          <a:xfrm>
+            <a:off x="5045006" y="6356057"/>
+            <a:ext cx="6409575" cy="363174"/>
+          </a:xfrm>
+          <a:prstGeom prst="rect">
+            <a:avLst/>
+          </a:prstGeom>
+        </p:spPr>
+      </p:pic>
+      <p:sp>
+        <p:nvSpPr>
+          <p:cNvPr id="84" name="Marcador de número de diapositiva 83">
+            <a:extLst>
+              <a:ext uri="{FF2B5EF4-FFF2-40B4-BE49-F238E27FC236}">
+                <a16:creationId xmlns:a16="http://schemas.microsoft.com/office/drawing/2014/main" id="{62ACF6CB-A817-CAE3-C662-FE8FEE0282CA}"/>
+              </a:ext>
+            </a:extLst>
+          </p:cNvPr>
+          <p:cNvSpPr>
+            <a:spLocks noGrp="1"/>
+          </p:cNvSpPr>
+          <p:nvPr>
+            <p:ph type="sldNum" sz="quarter" idx="7"/>
+          </p:nvPr>
+        </p:nvSpPr>
+        <p:spPr/>
+        <p:txBody>
+          <a:bodyPr/>
+          <a:lstStyle/>
+          <a:p>
+            <a:fld id="{B6F15528-21DE-4FAA-801E-634DDDAF4B2B}" type="slidenum">
+              <a:rPr lang="es-ES" smtClean="0"/>
+              <a:t>8</a:t>
+            </a:fld>
+            <a:endParaRPr lang="es-ES"/>
+          </a:p>
+        </p:txBody>
+      </p:sp>
+      <p:sp>
+        <p:nvSpPr>
+          <p:cNvPr id="3" name="Marcador de pie de página 2">
+            <a:extLst>
+              <a:ext uri="{FF2B5EF4-FFF2-40B4-BE49-F238E27FC236}">
+                <a16:creationId xmlns:a16="http://schemas.microsoft.com/office/drawing/2014/main" id="{E03FEE72-24D9-9AB0-1594-332613008321}"/>
+              </a:ext>
+            </a:extLst>
+          </p:cNvPr>
+          <p:cNvSpPr>
+            <a:spLocks noGrp="1"/>
+          </p:cNvSpPr>
+          <p:nvPr>
+            <p:ph type="ftr" sz="quarter" idx="5"/>
+          </p:nvPr>
+        </p:nvSpPr>
+        <p:spPr/>
+        <p:txBody>
+          <a:bodyPr/>
+          <a:lstStyle/>
+          <a:p>
+            <a:pPr marL="12700">
+              <a:spcBef>
+                <a:spcPts val="15"/>
+              </a:spcBef>
+            </a:pPr>
+            <a:r>
+              <a:rPr lang="es-ES" spc="-5"/>
+              <a:t>LAB 1.0. WAVEGUIDES</a:t>
+            </a:r>
+            <a:endParaRPr lang="es-ES" spc="-5" dirty="0"/>
+          </a:p>
+        </p:txBody>
+      </p:sp>
+      <p:sp>
+        <p:nvSpPr>
+          <p:cNvPr id="5" name="Rectángulo 4">
+            <a:extLst>
+              <a:ext uri="{FF2B5EF4-FFF2-40B4-BE49-F238E27FC236}">
+                <a16:creationId xmlns:a16="http://schemas.microsoft.com/office/drawing/2014/main" id="{A8BD6827-ACAF-A362-FFEA-F50C8BAB8523}"/>
+              </a:ext>
+            </a:extLst>
+          </p:cNvPr>
+          <p:cNvSpPr/>
+          <p:nvPr/>
+        </p:nvSpPr>
+        <p:spPr>
+          <a:xfrm>
+            <a:off x="6247526" y="1332402"/>
+            <a:ext cx="5638333" cy="4697291"/>
+          </a:xfrm>
+          <a:prstGeom prst="rect">
+            <a:avLst/>
+          </a:prstGeom>
+          <a:solidFill>
+            <a:srgbClr val="F2F2F2"/>
+          </a:solidFill>
+          <a:ln w="28575">
+            <a:solidFill>
+              <a:srgbClr val="E0700D"/>
+            </a:solidFill>
+          </a:ln>
+        </p:spPr>
+        <p:style>
+          <a:lnRef idx="2">
+            <a:schemeClr val="accent1">
+              <a:shade val="15000"/>
+            </a:schemeClr>
+          </a:lnRef>
+          <a:fillRef idx="1">
+            <a:schemeClr val="accent1"/>
+          </a:fillRef>
+          <a:effectRef idx="0">
+            <a:schemeClr val="accent1"/>
+          </a:effectRef>
+          <a:fontRef idx="minor">
+            <a:schemeClr val="lt1"/>
+          </a:fontRef>
+        </p:style>
+        <p:txBody>
+          <a:bodyPr rtlCol="0" anchor="ctr"/>
+          <a:lstStyle/>
+          <a:p>
+            <a:pPr algn="ctr"/>
+            <a:endParaRPr lang="en-US"/>
+          </a:p>
+        </p:txBody>
+      </p:sp>
+      <p:sp>
+        <p:nvSpPr>
+          <p:cNvPr id="8" name="object 16">
+            <a:extLst>
+              <a:ext uri="{FF2B5EF4-FFF2-40B4-BE49-F238E27FC236}">
+                <a16:creationId xmlns:a16="http://schemas.microsoft.com/office/drawing/2014/main" id="{3B7ECF9B-D4CA-4CD8-095F-046B685E5471}"/>
+              </a:ext>
+            </a:extLst>
+          </p:cNvPr>
+          <p:cNvSpPr txBox="1">
+            <a:spLocks noGrp="1"/>
+          </p:cNvSpPr>
+          <p:nvPr>
+            <p:ph type="title"/>
+          </p:nvPr>
+        </p:nvSpPr>
+        <p:spPr>
+          <a:xfrm>
+            <a:off x="631254" y="194877"/>
+            <a:ext cx="10994410" cy="782265"/>
+          </a:xfrm>
+          <a:prstGeom prst="rect">
+            <a:avLst/>
+          </a:prstGeom>
+        </p:spPr>
+        <p:txBody>
+          <a:bodyPr vert="horz" wrap="square" lIns="0" tIns="12700" rIns="0" bIns="0" rtlCol="0">
+            <a:spAutoFit/>
+          </a:bodyPr>
+          <a:lstStyle/>
+          <a:p>
+            <a:pPr marL="12700">
+              <a:lnSpc>
+                <a:spcPct val="100000"/>
+              </a:lnSpc>
+              <a:spcBef>
+                <a:spcPts val="100"/>
+              </a:spcBef>
+            </a:pPr>
+            <a:r>
+              <a:rPr lang="en-US" sz="2400" b="1" dirty="0"/>
+              <a:t>ASSESSMENT #1 </a:t>
+            </a:r>
+            <a:r>
+              <a:rPr lang="en-US" sz="2500" dirty="0"/>
+              <a:t>– Recap from theory – MZI configurations</a:t>
+            </a:r>
+            <a:br>
+              <a:rPr lang="es-ES" sz="2500" spc="-5" dirty="0">
+                <a:latin typeface="+mj-lt"/>
+                <a:cs typeface="Lucida Sans"/>
+              </a:rPr>
+            </a:br>
+            <a:endParaRPr sz="2500" b="0" dirty="0">
+              <a:latin typeface="+mj-lt"/>
+              <a:cs typeface="Lucida Sans"/>
+            </a:endParaRPr>
+          </a:p>
+        </p:txBody>
+      </p:sp>
+      <p:sp>
+        <p:nvSpPr>
+          <p:cNvPr id="12" name="TextBox 11">
+            <a:extLst>
+              <a:ext uri="{FF2B5EF4-FFF2-40B4-BE49-F238E27FC236}">
+                <a16:creationId xmlns:a16="http://schemas.microsoft.com/office/drawing/2014/main" id="{D271DC2E-47DA-C7A7-A1C9-8C55C9A7A57B}"/>
+              </a:ext>
+            </a:extLst>
+          </p:cNvPr>
+          <p:cNvSpPr txBox="1"/>
+          <p:nvPr/>
+        </p:nvSpPr>
+        <p:spPr>
+          <a:xfrm>
+            <a:off x="566336" y="828306"/>
+            <a:ext cx="6128794" cy="369332"/>
+          </a:xfrm>
+          <a:prstGeom prst="rect">
+            <a:avLst/>
+          </a:prstGeom>
+          <a:noFill/>
+        </p:spPr>
+        <p:txBody>
+          <a:bodyPr wrap="square">
+            <a:spAutoFit/>
+          </a:bodyPr>
+          <a:lstStyle/>
+          <a:p>
+            <a:r>
+              <a:rPr lang="en-US" sz="1800" dirty="0"/>
+              <a:t>SOI Unbalanced configuration, phase difference</a:t>
+            </a:r>
+            <a:endParaRPr lang="es-CO" dirty="0"/>
+          </a:p>
+        </p:txBody>
+      </p:sp>
+      <p:sp>
+        <p:nvSpPr>
+          <p:cNvPr id="4" name="TextBox 3">
+            <a:extLst>
+              <a:ext uri="{FF2B5EF4-FFF2-40B4-BE49-F238E27FC236}">
+                <a16:creationId xmlns:a16="http://schemas.microsoft.com/office/drawing/2014/main" id="{F730DB8B-EFB2-BF77-6C3D-887CDFCEFD13}"/>
+              </a:ext>
+            </a:extLst>
+          </p:cNvPr>
+          <p:cNvSpPr txBox="1"/>
+          <p:nvPr/>
+        </p:nvSpPr>
+        <p:spPr>
+          <a:xfrm>
+            <a:off x="6324600" y="1463032"/>
+            <a:ext cx="5638333" cy="646331"/>
+          </a:xfrm>
+          <a:prstGeom prst="rect">
+            <a:avLst/>
+          </a:prstGeom>
+          <a:noFill/>
+        </p:spPr>
+        <p:txBody>
+          <a:bodyPr wrap="square">
+            <a:spAutoFit/>
+          </a:bodyPr>
+          <a:lstStyle/>
+          <a:p>
+            <a:r>
+              <a:rPr lang="en-US" b="1" dirty="0"/>
+              <a:t>Under what condition can the MZI behave as a tunable power coupler rather than a wavelength filter?</a:t>
+            </a:r>
+          </a:p>
+        </p:txBody>
+      </p:sp>
+      <mc:AlternateContent xmlns:mc="http://schemas.openxmlformats.org/markup-compatibility/2006">
+        <mc:Choice xmlns:a14="http://schemas.microsoft.com/office/drawing/2010/main" Requires="a14">
+          <p:sp>
+            <p:nvSpPr>
+              <p:cNvPr id="2" name="TextBox 1">
+                <a:extLst>
+                  <a:ext uri="{FF2B5EF4-FFF2-40B4-BE49-F238E27FC236}">
+                    <a16:creationId xmlns:a16="http://schemas.microsoft.com/office/drawing/2014/main" id="{D0857FE8-5BC8-642E-C404-843DD1D93F79}"/>
+                  </a:ext>
+                </a:extLst>
+              </p:cNvPr>
+              <p:cNvSpPr txBox="1"/>
+              <p:nvPr/>
+            </p:nvSpPr>
+            <p:spPr>
+              <a:xfrm>
+                <a:off x="6248400" y="2073515"/>
+                <a:ext cx="5638333" cy="3693319"/>
+              </a:xfrm>
+              <a:prstGeom prst="rect">
+                <a:avLst/>
+              </a:prstGeom>
+              <a:noFill/>
+            </p:spPr>
+            <p:txBody>
+              <a:bodyPr wrap="square">
+                <a:spAutoFit/>
+              </a:bodyPr>
+              <a:lstStyle/>
+              <a:p>
+                <a:pPr algn="just"/>
+                <a:r>
+                  <a:rPr lang="en-US" dirty="0"/>
+                  <a:t>If the phase difference depends on the wavelength, the device operates as a wavelength filter. However, if the phase difference does not depend on the wavelength and can be externally controlled, the device can operate as a tunable power coupler. Since making the interferometer arms physically longer or shorter is not practical, the phase difference is typically controlled by modifying the propagation constant </a:t>
+                </a:r>
+                <a14:m>
+                  <m:oMath xmlns:m="http://schemas.openxmlformats.org/officeDocument/2006/math">
+                    <m:r>
+                      <a:rPr lang="en-US" i="1" dirty="0" smtClean="0">
+                        <a:latin typeface="Cambria Math" panose="02040503050406030204" pitchFamily="18" charset="0"/>
+                      </a:rPr>
+                      <m:t>𝛽</m:t>
+                    </m:r>
+                  </m:oMath>
+                </a14:m>
+                <a:r>
+                  <a:rPr lang="en-US" dirty="0"/>
+                  <a:t>. This can be achieved by changing the effective index of one of the waveguides, for example through temperature variations (thermo-optic effect), carrier injection, or by exposing the core of the fiber to an external medium that modifies the effective index of the waveguide.</a:t>
+                </a:r>
+              </a:p>
+            </p:txBody>
+          </p:sp>
+        </mc:Choice>
+        <mc:Fallback>
+          <p:sp>
+            <p:nvSpPr>
+              <p:cNvPr id="2" name="TextBox 1">
+                <a:extLst>
+                  <a:ext uri="{FF2B5EF4-FFF2-40B4-BE49-F238E27FC236}">
+                    <a16:creationId xmlns:a16="http://schemas.microsoft.com/office/drawing/2014/main" id="{D0857FE8-5BC8-642E-C404-843DD1D93F79}"/>
+                  </a:ext>
+                </a:extLst>
+              </p:cNvPr>
+              <p:cNvSpPr txBox="1">
+                <a:spLocks noRot="1" noChangeAspect="1" noMove="1" noResize="1" noEditPoints="1" noAdjustHandles="1" noChangeArrowheads="1" noChangeShapeType="1" noTextEdit="1"/>
+              </p:cNvSpPr>
+              <p:nvPr/>
+            </p:nvSpPr>
+            <p:spPr>
+              <a:xfrm>
+                <a:off x="6248400" y="2073515"/>
+                <a:ext cx="5638333" cy="3693319"/>
+              </a:xfrm>
+              <a:prstGeom prst="rect">
+                <a:avLst/>
+              </a:prstGeom>
+              <a:blipFill>
+                <a:blip r:embed="rId5"/>
+                <a:stretch>
+                  <a:fillRect l="-865" t="-825" r="-865" b="-1650"/>
+                </a:stretch>
+              </a:blipFill>
+            </p:spPr>
+            <p:txBody>
+              <a:bodyPr/>
+              <a:lstStyle/>
+              <a:p>
+                <a:r>
+                  <a:rPr lang="en-US">
+                    <a:noFill/>
+                  </a:rPr>
+                  <a:t> </a:t>
+                </a:r>
+              </a:p>
+            </p:txBody>
+          </p:sp>
+        </mc:Fallback>
+      </mc:AlternateContent>
+      <p:sp>
+        <p:nvSpPr>
+          <p:cNvPr id="7" name="Rectángulo 4">
+            <a:extLst>
+              <a:ext uri="{FF2B5EF4-FFF2-40B4-BE49-F238E27FC236}">
+                <a16:creationId xmlns:a16="http://schemas.microsoft.com/office/drawing/2014/main" id="{B957F2A5-6684-576D-7F71-CB780C8219B0}"/>
+              </a:ext>
+            </a:extLst>
+          </p:cNvPr>
+          <p:cNvSpPr/>
+          <p:nvPr/>
+        </p:nvSpPr>
+        <p:spPr>
+          <a:xfrm>
+            <a:off x="402771" y="1332402"/>
+            <a:ext cx="5638333" cy="4697291"/>
+          </a:xfrm>
+          <a:prstGeom prst="rect">
+            <a:avLst/>
+          </a:prstGeom>
+          <a:solidFill>
+            <a:srgbClr val="F2F2F2"/>
+          </a:solidFill>
+          <a:ln w="28575">
+            <a:solidFill>
+              <a:srgbClr val="E0700D"/>
+            </a:solidFill>
+          </a:ln>
+        </p:spPr>
+        <p:style>
+          <a:lnRef idx="2">
+            <a:schemeClr val="accent1">
+              <a:shade val="15000"/>
+            </a:schemeClr>
+          </a:lnRef>
+          <a:fillRef idx="1">
+            <a:schemeClr val="accent1"/>
+          </a:fillRef>
+          <a:effectRef idx="0">
+            <a:schemeClr val="accent1"/>
+          </a:effectRef>
+          <a:fontRef idx="minor">
+            <a:schemeClr val="lt1"/>
+          </a:fontRef>
+        </p:style>
+        <p:txBody>
+          <a:bodyPr rtlCol="0" anchor="ctr"/>
+          <a:lstStyle/>
+          <a:p>
+            <a:pPr algn="ctr"/>
+            <a:endParaRPr lang="en-US"/>
+          </a:p>
+        </p:txBody>
+      </p:sp>
+      <mc:AlternateContent xmlns:mc="http://schemas.openxmlformats.org/markup-compatibility/2006">
+        <mc:Choice xmlns:a14="http://schemas.microsoft.com/office/drawing/2010/main" Requires="a14">
+          <p:sp>
+            <p:nvSpPr>
+              <p:cNvPr id="9" name="TextBox 8">
+                <a:extLst>
+                  <a:ext uri="{FF2B5EF4-FFF2-40B4-BE49-F238E27FC236}">
+                    <a16:creationId xmlns:a16="http://schemas.microsoft.com/office/drawing/2014/main" id="{8B30AED1-52C1-B776-93DB-B9FD5574705A}"/>
+                  </a:ext>
+                </a:extLst>
+              </p:cNvPr>
+              <p:cNvSpPr txBox="1"/>
+              <p:nvPr/>
+            </p:nvSpPr>
+            <p:spPr>
+              <a:xfrm>
+                <a:off x="454557" y="1453701"/>
+                <a:ext cx="5638333" cy="646331"/>
+              </a:xfrm>
+              <a:prstGeom prst="rect">
+                <a:avLst/>
+              </a:prstGeom>
+              <a:noFill/>
+            </p:spPr>
+            <p:txBody>
+              <a:bodyPr wrap="square">
+                <a:spAutoFit/>
+              </a:bodyPr>
+              <a:lstStyle/>
+              <a:p>
+                <a:r>
+                  <a:rPr lang="en-US" b="1" dirty="0"/>
+                  <a:t>Why are the two output ports complementary (</a:t>
+                </a:r>
+                <a14:m>
+                  <m:oMath xmlns:m="http://schemas.openxmlformats.org/officeDocument/2006/math">
+                    <m:sSub>
+                      <m:sSubPr>
+                        <m:ctrlPr>
+                          <a:rPr lang="en-US" b="1" i="1" dirty="0" smtClean="0">
+                            <a:latin typeface="Cambria Math" panose="02040503050406030204" pitchFamily="18" charset="0"/>
+                          </a:rPr>
+                        </m:ctrlPr>
+                      </m:sSubPr>
+                      <m:e>
+                        <m:r>
+                          <a:rPr lang="en-US" b="1" i="1" dirty="0" smtClean="0">
+                            <a:latin typeface="Cambria Math" panose="02040503050406030204" pitchFamily="18" charset="0"/>
+                          </a:rPr>
+                          <m:t>𝑯</m:t>
+                        </m:r>
+                      </m:e>
+                      <m:sub>
+                        <m:r>
+                          <a:rPr lang="en-US" b="1" i="1" dirty="0">
+                            <a:latin typeface="Cambria Math" panose="02040503050406030204" pitchFamily="18" charset="0"/>
+                          </a:rPr>
+                          <m:t>𝟐𝟏</m:t>
+                        </m:r>
+                      </m:sub>
+                    </m:sSub>
+                    <m:r>
+                      <a:rPr lang="en-US" b="1" i="1" dirty="0">
+                        <a:latin typeface="Cambria Math" panose="02040503050406030204" pitchFamily="18" charset="0"/>
+                      </a:rPr>
+                      <m:t>=</m:t>
+                    </m:r>
+                    <m:func>
+                      <m:funcPr>
+                        <m:ctrlPr>
+                          <a:rPr lang="en-US" b="1" i="1" dirty="0">
+                            <a:latin typeface="Cambria Math" panose="02040503050406030204" pitchFamily="18" charset="0"/>
+                          </a:rPr>
+                        </m:ctrlPr>
+                      </m:funcPr>
+                      <m:fName>
+                        <m:sSup>
+                          <m:sSupPr>
+                            <m:ctrlPr>
+                              <a:rPr lang="en-US" b="1" i="1" dirty="0">
+                                <a:latin typeface="Cambria Math" panose="02040503050406030204" pitchFamily="18" charset="0"/>
+                              </a:rPr>
+                            </m:ctrlPr>
+                          </m:sSupPr>
+                          <m:e>
+                            <m:r>
+                              <a:rPr lang="en-US" b="1" i="0" dirty="0">
+                                <a:latin typeface="Cambria Math" panose="02040503050406030204" pitchFamily="18" charset="0"/>
+                              </a:rPr>
+                              <m:t>𝐜𝐨𝐬</m:t>
+                            </m:r>
+                          </m:e>
+                          <m:sup>
+                            <m:r>
+                              <a:rPr lang="en-US" b="1" i="1" dirty="0">
+                                <a:latin typeface="Cambria Math" panose="02040503050406030204" pitchFamily="18" charset="0"/>
+                              </a:rPr>
+                              <m:t>𝟐</m:t>
+                            </m:r>
+                          </m:sup>
+                        </m:sSup>
+                      </m:fName>
+                      <m:e>
+                        <m:d>
+                          <m:dPr>
+                            <m:ctrlPr>
+                              <a:rPr lang="en-US" b="1" i="1" dirty="0">
+                                <a:latin typeface="Cambria Math" panose="02040503050406030204" pitchFamily="18" charset="0"/>
+                              </a:rPr>
+                            </m:ctrlPr>
+                          </m:dPr>
+                          <m:e>
+                            <m:r>
+                              <a:rPr lang="en-US" b="1" i="0" dirty="0">
+                                <a:latin typeface="Cambria Math" panose="02040503050406030204" pitchFamily="18" charset="0"/>
+                              </a:rPr>
+                              <m:t>𝚫</m:t>
+                            </m:r>
+                            <m:r>
+                              <a:rPr lang="en-US" b="1" i="1" dirty="0">
+                                <a:latin typeface="Cambria Math" panose="02040503050406030204" pitchFamily="18" charset="0"/>
+                              </a:rPr>
+                              <m:t>𝝓</m:t>
+                            </m:r>
+                            <m:r>
+                              <m:rPr>
+                                <m:lit/>
+                              </m:rPr>
+                              <a:rPr lang="en-US" b="1" i="1" dirty="0">
+                                <a:latin typeface="Cambria Math" panose="02040503050406030204" pitchFamily="18" charset="0"/>
+                              </a:rPr>
+                              <m:t>/</m:t>
+                            </m:r>
+                            <m:r>
+                              <a:rPr lang="en-US" b="1" i="1" dirty="0">
+                                <a:latin typeface="Cambria Math" panose="02040503050406030204" pitchFamily="18" charset="0"/>
+                              </a:rPr>
+                              <m:t>𝟐</m:t>
+                            </m:r>
+                          </m:e>
+                        </m:d>
+                      </m:e>
+                    </m:func>
+                    <m:r>
+                      <a:rPr lang="en-US" b="1" i="1" dirty="0">
+                        <a:latin typeface="Cambria Math" panose="02040503050406030204" pitchFamily="18" charset="0"/>
+                      </a:rPr>
+                      <m:t>,</m:t>
+                    </m:r>
+                    <m:sSub>
+                      <m:sSubPr>
+                        <m:ctrlPr>
+                          <a:rPr lang="en-US" b="1" i="1" dirty="0">
+                            <a:latin typeface="Cambria Math" panose="02040503050406030204" pitchFamily="18" charset="0"/>
+                          </a:rPr>
+                        </m:ctrlPr>
+                      </m:sSubPr>
+                      <m:e>
+                        <m:r>
+                          <a:rPr lang="en-US" b="1" i="1" dirty="0">
+                            <a:latin typeface="Cambria Math" panose="02040503050406030204" pitchFamily="18" charset="0"/>
+                          </a:rPr>
+                          <m:t>𝑯</m:t>
+                        </m:r>
+                      </m:e>
+                      <m:sub>
+                        <m:r>
+                          <a:rPr lang="en-US" b="1" i="1" dirty="0">
+                            <a:latin typeface="Cambria Math" panose="02040503050406030204" pitchFamily="18" charset="0"/>
+                          </a:rPr>
+                          <m:t>𝟐𝟐</m:t>
+                        </m:r>
+                      </m:sub>
+                    </m:sSub>
+                    <m:r>
+                      <a:rPr lang="en-US" b="1" i="1" dirty="0">
+                        <a:latin typeface="Cambria Math" panose="02040503050406030204" pitchFamily="18" charset="0"/>
+                      </a:rPr>
+                      <m:t>=</m:t>
+                    </m:r>
+                    <m:func>
+                      <m:funcPr>
+                        <m:ctrlPr>
+                          <a:rPr lang="en-US" b="1" i="1" dirty="0">
+                            <a:latin typeface="Cambria Math" panose="02040503050406030204" pitchFamily="18" charset="0"/>
+                          </a:rPr>
+                        </m:ctrlPr>
+                      </m:funcPr>
+                      <m:fName>
+                        <m:sSup>
+                          <m:sSupPr>
+                            <m:ctrlPr>
+                              <a:rPr lang="en-US" b="1" i="1" dirty="0">
+                                <a:latin typeface="Cambria Math" panose="02040503050406030204" pitchFamily="18" charset="0"/>
+                              </a:rPr>
+                            </m:ctrlPr>
+                          </m:sSupPr>
+                          <m:e>
+                            <m:r>
+                              <a:rPr lang="en-US" b="1" i="0" dirty="0">
+                                <a:latin typeface="Cambria Math" panose="02040503050406030204" pitchFamily="18" charset="0"/>
+                              </a:rPr>
+                              <m:t>𝐬𝐢𝐧</m:t>
+                            </m:r>
+                          </m:e>
+                          <m:sup>
+                            <m:r>
+                              <a:rPr lang="en-US" b="1" i="1" dirty="0">
+                                <a:latin typeface="Cambria Math" panose="02040503050406030204" pitchFamily="18" charset="0"/>
+                              </a:rPr>
+                              <m:t>𝟐</m:t>
+                            </m:r>
+                          </m:sup>
+                        </m:sSup>
+                      </m:fName>
+                      <m:e>
+                        <m:d>
+                          <m:dPr>
+                            <m:ctrlPr>
+                              <a:rPr lang="en-US" b="1" i="1" dirty="0">
+                                <a:latin typeface="Cambria Math" panose="02040503050406030204" pitchFamily="18" charset="0"/>
+                              </a:rPr>
+                            </m:ctrlPr>
+                          </m:dPr>
+                          <m:e>
+                            <m:r>
+                              <a:rPr lang="en-US" b="1" i="0" dirty="0">
+                                <a:latin typeface="Cambria Math" panose="02040503050406030204" pitchFamily="18" charset="0"/>
+                              </a:rPr>
+                              <m:t>𝚫</m:t>
+                            </m:r>
+                            <m:r>
+                              <a:rPr lang="en-US" b="1" i="1" dirty="0">
+                                <a:latin typeface="Cambria Math" panose="02040503050406030204" pitchFamily="18" charset="0"/>
+                              </a:rPr>
+                              <m:t>𝝓</m:t>
+                            </m:r>
+                            <m:r>
+                              <m:rPr>
+                                <m:lit/>
+                              </m:rPr>
+                              <a:rPr lang="en-US" b="1" i="1" dirty="0">
+                                <a:latin typeface="Cambria Math" panose="02040503050406030204" pitchFamily="18" charset="0"/>
+                              </a:rPr>
+                              <m:t>/</m:t>
+                            </m:r>
+                            <m:r>
+                              <a:rPr lang="en-US" b="1" i="1" dirty="0">
+                                <a:latin typeface="Cambria Math" panose="02040503050406030204" pitchFamily="18" charset="0"/>
+                              </a:rPr>
+                              <m:t>𝟐</m:t>
+                            </m:r>
+                          </m:e>
+                        </m:d>
+                      </m:e>
+                    </m:func>
+                  </m:oMath>
+                </a14:m>
+                <a:r>
+                  <a:rPr lang="en-US" b="1" dirty="0"/>
+                  <a:t>)?</a:t>
+                </a:r>
+              </a:p>
+            </p:txBody>
+          </p:sp>
+        </mc:Choice>
+        <mc:Fallback>
+          <p:sp>
+            <p:nvSpPr>
+              <p:cNvPr id="9" name="TextBox 8">
+                <a:extLst>
+                  <a:ext uri="{FF2B5EF4-FFF2-40B4-BE49-F238E27FC236}">
+                    <a16:creationId xmlns:a16="http://schemas.microsoft.com/office/drawing/2014/main" id="{8B30AED1-52C1-B776-93DB-B9FD5574705A}"/>
+                  </a:ext>
+                </a:extLst>
+              </p:cNvPr>
+              <p:cNvSpPr txBox="1">
+                <a:spLocks noRot="1" noChangeAspect="1" noMove="1" noResize="1" noEditPoints="1" noAdjustHandles="1" noChangeArrowheads="1" noChangeShapeType="1" noTextEdit="1"/>
+              </p:cNvSpPr>
+              <p:nvPr/>
+            </p:nvSpPr>
+            <p:spPr>
+              <a:xfrm>
+                <a:off x="454557" y="1453701"/>
+                <a:ext cx="5638333" cy="646331"/>
+              </a:xfrm>
+              <a:prstGeom prst="rect">
+                <a:avLst/>
+              </a:prstGeom>
+              <a:blipFill>
+                <a:blip r:embed="rId6"/>
+                <a:stretch>
+                  <a:fillRect l="-974" t="-4717" b="-15094"/>
+                </a:stretch>
+              </a:blipFill>
+            </p:spPr>
+            <p:txBody>
+              <a:bodyPr/>
+              <a:lstStyle/>
+              <a:p>
+                <a:r>
+                  <a:rPr lang="en-US">
+                    <a:noFill/>
+                  </a:rPr>
+                  <a:t> </a:t>
+                </a:r>
+              </a:p>
+            </p:txBody>
+          </p:sp>
+        </mc:Fallback>
+      </mc:AlternateContent>
+      <p:sp>
+        <p:nvSpPr>
+          <p:cNvPr id="10" name="TextBox 9">
+            <a:extLst>
+              <a:ext uri="{FF2B5EF4-FFF2-40B4-BE49-F238E27FC236}">
+                <a16:creationId xmlns:a16="http://schemas.microsoft.com/office/drawing/2014/main" id="{756BD6C3-AC93-3FC7-4AE6-EDFB67927299}"/>
+              </a:ext>
+            </a:extLst>
+          </p:cNvPr>
+          <p:cNvSpPr txBox="1"/>
+          <p:nvPr/>
+        </p:nvSpPr>
+        <p:spPr>
+          <a:xfrm>
+            <a:off x="454557" y="2121915"/>
+            <a:ext cx="5637600" cy="646331"/>
+          </a:xfrm>
+          <a:prstGeom prst="rect">
+            <a:avLst/>
+          </a:prstGeom>
+          <a:noFill/>
+        </p:spPr>
+        <p:txBody>
+          <a:bodyPr wrap="square">
+            <a:spAutoFit/>
+          </a:bodyPr>
+          <a:lstStyle/>
+          <a:p>
+            <a:r>
+              <a:rPr lang="en-US" dirty="0"/>
+              <a:t>To understand why are complementary we can make use of the following identity:</a:t>
+            </a:r>
+          </a:p>
+        </p:txBody>
+      </p:sp>
+      <mc:AlternateContent xmlns:mc="http://schemas.openxmlformats.org/markup-compatibility/2006">
+        <mc:Choice xmlns:a14="http://schemas.microsoft.com/office/drawing/2010/main" Requires="a14">
+          <p:sp>
+            <p:nvSpPr>
+              <p:cNvPr id="11" name="TextBox 10">
+                <a:extLst>
+                  <a:ext uri="{FF2B5EF4-FFF2-40B4-BE49-F238E27FC236}">
+                    <a16:creationId xmlns:a16="http://schemas.microsoft.com/office/drawing/2014/main" id="{03F96C73-120A-E838-33C0-AC1F6850DC8A}"/>
+                  </a:ext>
+                </a:extLst>
+              </p:cNvPr>
+              <p:cNvSpPr txBox="1"/>
+              <p:nvPr/>
+            </p:nvSpPr>
+            <p:spPr>
+              <a:xfrm>
+                <a:off x="1597557" y="2815522"/>
+                <a:ext cx="3490426" cy="369332"/>
+              </a:xfrm>
+              <a:prstGeom prst="rect">
+                <a:avLst/>
+              </a:prstGeom>
+              <a:noFill/>
+            </p:spPr>
+            <p:txBody>
+              <a:bodyPr wrap="square">
+                <a:spAutoFit/>
+              </a:bodyPr>
+              <a:lstStyle/>
+              <a:p>
+                <a:pPr lvl="1"/>
+                <a14:m>
+                  <m:oMathPara xmlns:m="http://schemas.openxmlformats.org/officeDocument/2006/math">
+                    <m:oMathParaPr>
+                      <m:jc m:val="centerGroup"/>
+                    </m:oMathParaPr>
+                    <m:oMath xmlns:m="http://schemas.openxmlformats.org/officeDocument/2006/math">
+                      <m:func>
+                        <m:funcPr>
+                          <m:ctrlPr>
+                            <a:rPr lang="es-MX" i="1" dirty="0" smtClean="0">
+                              <a:latin typeface="Cambria Math" panose="02040503050406030204" pitchFamily="18" charset="0"/>
+                            </a:rPr>
+                          </m:ctrlPr>
+                        </m:funcPr>
+                        <m:fName>
+                          <m:sSup>
+                            <m:sSupPr>
+                              <m:ctrlPr>
+                                <a:rPr lang="es-MX" i="1" dirty="0" smtClean="0">
+                                  <a:latin typeface="Cambria Math" panose="02040503050406030204" pitchFamily="18" charset="0"/>
+                                </a:rPr>
+                              </m:ctrlPr>
+                            </m:sSupPr>
+                            <m:e>
+                              <m:r>
+                                <m:rPr>
+                                  <m:sty m:val="p"/>
+                                </m:rPr>
+                                <a:rPr lang="es-MX" i="0" dirty="0" smtClean="0">
+                                  <a:latin typeface="Cambria Math" panose="02040503050406030204" pitchFamily="18" charset="0"/>
+                                </a:rPr>
+                                <m:t>cos</m:t>
+                              </m:r>
+                            </m:e>
+                            <m:sup>
+                              <m:r>
+                                <a:rPr lang="es-MX" i="1" dirty="0" smtClean="0">
+                                  <a:latin typeface="Cambria Math" panose="02040503050406030204" pitchFamily="18" charset="0"/>
+                                </a:rPr>
+                                <m:t>2</m:t>
+                              </m:r>
+                            </m:sup>
+                          </m:sSup>
+                        </m:fName>
+                        <m:e>
+                          <m:d>
+                            <m:dPr>
+                              <m:ctrlPr>
+                                <a:rPr lang="es-MX" i="1" dirty="0" smtClean="0">
+                                  <a:latin typeface="Cambria Math" panose="02040503050406030204" pitchFamily="18" charset="0"/>
+                                </a:rPr>
+                              </m:ctrlPr>
+                            </m:dPr>
+                            <m:e>
+                              <m:r>
+                                <a:rPr lang="es-MX" i="1" dirty="0" smtClean="0">
+                                  <a:latin typeface="Cambria Math" panose="02040503050406030204" pitchFamily="18" charset="0"/>
+                                </a:rPr>
+                                <m:t>𝑥</m:t>
+                              </m:r>
+                            </m:e>
+                          </m:d>
+                        </m:e>
+                      </m:func>
+                      <m:r>
+                        <a:rPr lang="es-MX" i="1" dirty="0" smtClean="0">
+                          <a:latin typeface="Cambria Math" panose="02040503050406030204" pitchFamily="18" charset="0"/>
+                        </a:rPr>
+                        <m:t>+</m:t>
+                      </m:r>
+                      <m:func>
+                        <m:funcPr>
+                          <m:ctrlPr>
+                            <a:rPr lang="es-MX" i="1" dirty="0" smtClean="0">
+                              <a:latin typeface="Cambria Math" panose="02040503050406030204" pitchFamily="18" charset="0"/>
+                            </a:rPr>
+                          </m:ctrlPr>
+                        </m:funcPr>
+                        <m:fName>
+                          <m:sSup>
+                            <m:sSupPr>
+                              <m:ctrlPr>
+                                <a:rPr lang="es-MX" i="1" dirty="0" smtClean="0">
+                                  <a:latin typeface="Cambria Math" panose="02040503050406030204" pitchFamily="18" charset="0"/>
+                                </a:rPr>
+                              </m:ctrlPr>
+                            </m:sSupPr>
+                            <m:e>
+                              <m:r>
+                                <m:rPr>
+                                  <m:sty m:val="p"/>
+                                </m:rPr>
+                                <a:rPr lang="es-MX" i="0" dirty="0" smtClean="0">
+                                  <a:latin typeface="Cambria Math" panose="02040503050406030204" pitchFamily="18" charset="0"/>
+                                </a:rPr>
+                                <m:t>sin</m:t>
+                              </m:r>
+                            </m:e>
+                            <m:sup>
+                              <m:r>
+                                <a:rPr lang="es-MX" i="1" dirty="0" smtClean="0">
+                                  <a:latin typeface="Cambria Math" panose="02040503050406030204" pitchFamily="18" charset="0"/>
+                                </a:rPr>
+                                <m:t>2</m:t>
+                              </m:r>
+                            </m:sup>
+                          </m:sSup>
+                        </m:fName>
+                        <m:e>
+                          <m:d>
+                            <m:dPr>
+                              <m:ctrlPr>
+                                <a:rPr lang="es-MX" i="1" dirty="0" smtClean="0">
+                                  <a:latin typeface="Cambria Math" panose="02040503050406030204" pitchFamily="18" charset="0"/>
+                                </a:rPr>
+                              </m:ctrlPr>
+                            </m:dPr>
+                            <m:e>
+                              <m:r>
+                                <a:rPr lang="es-MX" i="1" dirty="0" smtClean="0">
+                                  <a:latin typeface="Cambria Math" panose="02040503050406030204" pitchFamily="18" charset="0"/>
+                                </a:rPr>
+                                <m:t>𝑥</m:t>
+                              </m:r>
+                            </m:e>
+                          </m:d>
+                        </m:e>
+                      </m:func>
+                      <m:r>
+                        <a:rPr lang="es-MX" i="1" dirty="0" smtClean="0">
+                          <a:latin typeface="Cambria Math" panose="02040503050406030204" pitchFamily="18" charset="0"/>
+                        </a:rPr>
+                        <m:t>=1</m:t>
+                      </m:r>
+                    </m:oMath>
+                  </m:oMathPara>
+                </a14:m>
+              </a:p>
+            </p:txBody>
+          </p:sp>
+        </mc:Choice>
+        <mc:Fallback>
+          <p:sp>
+            <p:nvSpPr>
+              <p:cNvPr id="11" name="TextBox 10">
+                <a:extLst>
+                  <a:ext uri="{FF2B5EF4-FFF2-40B4-BE49-F238E27FC236}">
+                    <a16:creationId xmlns:a16="http://schemas.microsoft.com/office/drawing/2014/main" id="{03F96C73-120A-E838-33C0-AC1F6850DC8A}"/>
+                  </a:ext>
+                </a:extLst>
+              </p:cNvPr>
+              <p:cNvSpPr txBox="1">
+                <a:spLocks noRot="1" noChangeAspect="1" noMove="1" noResize="1" noEditPoints="1" noAdjustHandles="1" noChangeArrowheads="1" noChangeShapeType="1" noTextEdit="1"/>
+              </p:cNvSpPr>
+              <p:nvPr/>
+            </p:nvSpPr>
+            <p:spPr>
+              <a:xfrm>
+                <a:off x="1597557" y="2815522"/>
+                <a:ext cx="3490426" cy="369332"/>
+              </a:xfrm>
+              <a:prstGeom prst="rect">
+                <a:avLst/>
+              </a:prstGeom>
+              <a:blipFill>
+                <a:blip r:embed="rId7"/>
+                <a:stretch>
+                  <a:fillRect t="-11667" b="-25000"/>
+                </a:stretch>
+              </a:blipFill>
+            </p:spPr>
+            <p:txBody>
+              <a:bodyPr/>
+              <a:lstStyle/>
+              <a:p>
+                <a:r>
+                  <a:rPr lang="en-US">
+                    <a:noFill/>
+                  </a:rPr>
+                  <a:t> </a:t>
+                </a:r>
+              </a:p>
+            </p:txBody>
+          </p:sp>
+        </mc:Fallback>
+      </mc:AlternateContent>
+      <p:sp>
+        <p:nvSpPr>
+          <p:cNvPr id="13" name="TextBox 12">
+            <a:extLst>
+              <a:ext uri="{FF2B5EF4-FFF2-40B4-BE49-F238E27FC236}">
+                <a16:creationId xmlns:a16="http://schemas.microsoft.com/office/drawing/2014/main" id="{A408C32B-8598-177A-3BA2-A7E0A5C94C90}"/>
+              </a:ext>
+            </a:extLst>
+          </p:cNvPr>
+          <p:cNvSpPr txBox="1"/>
+          <p:nvPr/>
+        </p:nvSpPr>
+        <p:spPr>
+          <a:xfrm>
+            <a:off x="423455" y="3308258"/>
+            <a:ext cx="5637600" cy="646331"/>
+          </a:xfrm>
+          <a:prstGeom prst="rect">
+            <a:avLst/>
+          </a:prstGeom>
+          <a:noFill/>
+        </p:spPr>
+        <p:txBody>
+          <a:bodyPr wrap="square">
+            <a:spAutoFit/>
+          </a:bodyPr>
+          <a:lstStyle/>
+          <a:p>
+            <a:pPr algn="just"/>
+            <a:r>
+              <a:rPr lang="en-US" dirty="0"/>
+              <a:t>Which means that our outputs have the following behavior:</a:t>
+            </a:r>
+          </a:p>
+        </p:txBody>
+      </p:sp>
+      <mc:AlternateContent xmlns:mc="http://schemas.openxmlformats.org/markup-compatibility/2006">
+        <mc:Choice xmlns:a14="http://schemas.microsoft.com/office/drawing/2010/main" Requires="a14">
+          <p:sp>
+            <p:nvSpPr>
+              <p:cNvPr id="14" name="TextBox 13">
+                <a:extLst>
+                  <a:ext uri="{FF2B5EF4-FFF2-40B4-BE49-F238E27FC236}">
+                    <a16:creationId xmlns:a16="http://schemas.microsoft.com/office/drawing/2014/main" id="{2AB8D56C-D0AB-8E99-084F-56C5CF409FD8}"/>
+                  </a:ext>
+                </a:extLst>
+              </p:cNvPr>
+              <p:cNvSpPr txBox="1"/>
+              <p:nvPr/>
+            </p:nvSpPr>
+            <p:spPr>
+              <a:xfrm>
+                <a:off x="1445157" y="3912056"/>
+                <a:ext cx="3124280" cy="369332"/>
+              </a:xfrm>
+              <a:prstGeom prst="rect">
+                <a:avLst/>
+              </a:prstGeom>
+              <a:noFill/>
+            </p:spPr>
+            <p:txBody>
+              <a:bodyPr wrap="square">
+                <a:spAutoFit/>
+              </a:bodyPr>
+              <a:lstStyle/>
+              <a:p>
+                <a:pPr>
+                  <a:buNone/>
+                </a:pPr>
+                <a14:m>
+                  <m:oMathPara xmlns:m="http://schemas.openxmlformats.org/officeDocument/2006/math">
+                    <m:oMathParaPr>
+                      <m:jc m:val="centerGroup"/>
+                    </m:oMathParaPr>
+                    <m:oMath xmlns:m="http://schemas.openxmlformats.org/officeDocument/2006/math">
+                      <m:sSub>
+                        <m:sSubPr>
+                          <m:ctrlPr>
+                            <a:rPr lang="pt-BR" i="1" dirty="0" smtClean="0">
+                              <a:latin typeface="Cambria Math" panose="02040503050406030204" pitchFamily="18" charset="0"/>
+                            </a:rPr>
+                          </m:ctrlPr>
+                        </m:sSubPr>
+                        <m:e>
+                          <m:r>
+                            <a:rPr lang="pt-BR" i="1" dirty="0" smtClean="0">
+                              <a:latin typeface="Cambria Math" panose="02040503050406030204" pitchFamily="18" charset="0"/>
+                            </a:rPr>
+                            <m:t>𝐻</m:t>
+                          </m:r>
+                        </m:e>
+                        <m:sub>
+                          <m:r>
+                            <a:rPr lang="pt-BR" i="1" dirty="0" smtClean="0">
+                              <a:latin typeface="Cambria Math" panose="02040503050406030204" pitchFamily="18" charset="0"/>
+                            </a:rPr>
+                            <m:t>21</m:t>
+                          </m:r>
+                        </m:sub>
+                      </m:sSub>
+                      <m:r>
+                        <a:rPr lang="pt-BR" i="1" dirty="0" smtClean="0">
+                          <a:latin typeface="Cambria Math" panose="02040503050406030204" pitchFamily="18" charset="0"/>
+                        </a:rPr>
+                        <m:t>+</m:t>
+                      </m:r>
+                      <m:sSub>
+                        <m:sSubPr>
+                          <m:ctrlPr>
+                            <a:rPr lang="pt-BR" i="1" dirty="0" smtClean="0">
+                              <a:latin typeface="Cambria Math" panose="02040503050406030204" pitchFamily="18" charset="0"/>
+                            </a:rPr>
+                          </m:ctrlPr>
+                        </m:sSubPr>
+                        <m:e>
+                          <m:r>
+                            <a:rPr lang="pt-BR" i="1" dirty="0" smtClean="0">
+                              <a:latin typeface="Cambria Math" panose="02040503050406030204" pitchFamily="18" charset="0"/>
+                            </a:rPr>
+                            <m:t>𝐻</m:t>
+                          </m:r>
+                        </m:e>
+                        <m:sub>
+                          <m:r>
+                            <a:rPr lang="pt-BR" i="1" dirty="0" smtClean="0">
+                              <a:latin typeface="Cambria Math" panose="02040503050406030204" pitchFamily="18" charset="0"/>
+                            </a:rPr>
+                            <m:t>22</m:t>
+                          </m:r>
+                        </m:sub>
+                      </m:sSub>
+                      <m:r>
+                        <a:rPr lang="pt-BR" i="1" dirty="0" smtClean="0">
+                          <a:latin typeface="Cambria Math" panose="02040503050406030204" pitchFamily="18" charset="0"/>
+                        </a:rPr>
+                        <m:t>=1</m:t>
+                      </m:r>
+                    </m:oMath>
+                  </m:oMathPara>
+                </a14:m>
+                <a:endParaRPr lang="pt-BR" dirty="0"/>
+              </a:p>
+            </p:txBody>
+          </p:sp>
+        </mc:Choice>
+        <mc:Fallback>
+          <p:sp>
+            <p:nvSpPr>
+              <p:cNvPr id="14" name="TextBox 13">
+                <a:extLst>
+                  <a:ext uri="{FF2B5EF4-FFF2-40B4-BE49-F238E27FC236}">
+                    <a16:creationId xmlns:a16="http://schemas.microsoft.com/office/drawing/2014/main" id="{2AB8D56C-D0AB-8E99-084F-56C5CF409FD8}"/>
+                  </a:ext>
+                </a:extLst>
+              </p:cNvPr>
+              <p:cNvSpPr txBox="1">
+                <a:spLocks noRot="1" noChangeAspect="1" noMove="1" noResize="1" noEditPoints="1" noAdjustHandles="1" noChangeArrowheads="1" noChangeShapeType="1" noTextEdit="1"/>
+              </p:cNvSpPr>
+              <p:nvPr/>
+            </p:nvSpPr>
+            <p:spPr>
+              <a:xfrm>
+                <a:off x="1445157" y="3912056"/>
+                <a:ext cx="3124280" cy="369332"/>
+              </a:xfrm>
+              <a:prstGeom prst="rect">
+                <a:avLst/>
+              </a:prstGeom>
+              <a:blipFill>
+                <a:blip r:embed="rId8"/>
+                <a:stretch>
+                  <a:fillRect/>
+                </a:stretch>
+              </a:blipFill>
+            </p:spPr>
+            <p:txBody>
+              <a:bodyPr/>
+              <a:lstStyle/>
+              <a:p>
+                <a:r>
+                  <a:rPr lang="en-US">
+                    <a:noFill/>
+                  </a:rPr>
+                  <a:t> </a:t>
+                </a:r>
+              </a:p>
+            </p:txBody>
+          </p:sp>
+        </mc:Fallback>
+      </mc:AlternateContent>
+      <p:sp>
+        <p:nvSpPr>
+          <p:cNvPr id="15" name="TextBox 14">
+            <a:extLst>
+              <a:ext uri="{FF2B5EF4-FFF2-40B4-BE49-F238E27FC236}">
+                <a16:creationId xmlns:a16="http://schemas.microsoft.com/office/drawing/2014/main" id="{BC311DE0-5B99-6152-7552-B70727127515}"/>
+              </a:ext>
+            </a:extLst>
+          </p:cNvPr>
+          <p:cNvSpPr txBox="1"/>
+          <p:nvPr/>
+        </p:nvSpPr>
+        <p:spPr>
+          <a:xfrm>
+            <a:off x="423455" y="4317209"/>
+            <a:ext cx="5637600" cy="1477328"/>
+          </a:xfrm>
+          <a:prstGeom prst="rect">
+            <a:avLst/>
+          </a:prstGeom>
+          <a:noFill/>
+        </p:spPr>
+        <p:txBody>
+          <a:bodyPr wrap="square">
+            <a:spAutoFit/>
+          </a:bodyPr>
+          <a:lstStyle/>
+          <a:p>
+            <a:r>
+              <a:rPr lang="en-US" dirty="0"/>
+              <a:t>This means that the power that does not exit through one port exits through the other port. When one output reaches a maximum, the other reaches a minimum. The MZI does not generate power; it only redistributes the optical power between the two output ports.</a:t>
+            </a:r>
+          </a:p>
+        </p:txBody>
+      </p:sp>
+    </p:spTree>
+    <p:extLst>
+      <p:ext uri="{BB962C8B-B14F-4D97-AF65-F5344CB8AC3E}">
+        <p14:creationId xmlns:p14="http://schemas.microsoft.com/office/powerpoint/2010/main" val="3171893976"/>
+      </p:ext>
+    </p:extLst>
+  </p:cSld>
+  <p:clrMapOvr>
+    <a:masterClrMapping/>
+  </p:clrMapOvr>
+</p:sld>
+</file>
+
+<file path=ppt/slides/slide9.xml><?xml version="1.0" encoding="utf-8"?>
+<p:sld xmlns:a="http://schemas.openxmlformats.org/drawingml/2006/main" xmlns:r="http://schemas.openxmlformats.org/officeDocument/2006/relationships" xmlns:p="http://schemas.openxmlformats.org/presentationml/2006/main">
+  <p:cSld>
+    <p:spTree>
+      <p:nvGrpSpPr>
+        <p:cNvPr id="1" name="">
+          <a:extLst>
+            <a:ext uri="{FF2B5EF4-FFF2-40B4-BE49-F238E27FC236}">
               <a16:creationId xmlns:a16="http://schemas.microsoft.com/office/drawing/2014/main" id="{1525AB88-A787-2C84-3A44-2B634D87FB5B}"/>
             </a:ext>
           </a:extLst>
@@ -7295,8 +11161,44 @@
           <a:chExt cx="0" cy="0"/>
         </a:xfrm>
       </p:grpSpPr>
-      <mc:AlternateContent xmlns:mc="http://schemas.openxmlformats.org/markup-compatibility/2006" xmlns:a14="http://schemas.microsoft.com/office/drawing/2010/main">
-        <mc:Choice Requires="a14">
+      <p:pic>
+        <p:nvPicPr>
+          <p:cNvPr id="7" name="Picture 6">
+            <a:extLst>
+              <a:ext uri="{FF2B5EF4-FFF2-40B4-BE49-F238E27FC236}">
+                <a16:creationId xmlns:a16="http://schemas.microsoft.com/office/drawing/2014/main" id="{03F10149-70FF-9C7B-09CF-B86DE20664E5}"/>
+              </a:ext>
+            </a:extLst>
+          </p:cNvPr>
+          <p:cNvPicPr>
+            <a:picLocks noChangeAspect="1"/>
+          </p:cNvPicPr>
+          <p:nvPr/>
+        </p:nvPicPr>
+        <p:blipFill>
+          <a:blip r:embed="rId3">
+            <a:extLst>
+              <a:ext uri="{28A0092B-C50C-407E-A947-70E740481C1C}">
+                <a14:useLocalDpi xmlns:a14="http://schemas.microsoft.com/office/drawing/2010/main" val="0"/>
+              </a:ext>
+            </a:extLst>
+          </a:blip>
+          <a:stretch>
+            <a:fillRect/>
+          </a:stretch>
+        </p:blipFill>
+        <p:spPr>
+          <a:xfrm>
+            <a:off x="6272932" y="2227223"/>
+            <a:ext cx="5614427" cy="3950216"/>
+          </a:xfrm>
+          <a:prstGeom prst="rect">
+            <a:avLst/>
+          </a:prstGeom>
+        </p:spPr>
+      </p:pic>
+      <mc:AlternateContent xmlns:mc="http://schemas.openxmlformats.org/markup-compatibility/2006">
+        <mc:Choice xmlns:a14="http://schemas.microsoft.com/office/drawing/2010/main" Requires="a14">
           <p:sp>
             <p:nvSpPr>
               <p:cNvPr id="16" name="object 16">
@@ -7315,7 +11217,7 @@
             </p:nvSpPr>
             <p:spPr>
               <a:xfrm>
-                <a:off x="685800" y="408883"/>
+                <a:off x="609600" y="216277"/>
                 <a:ext cx="10994410" cy="782265"/>
               </a:xfrm>
               <a:prstGeom prst="rect">
@@ -7381,7 +11283,7 @@
             </p:txBody>
           </p:sp>
         </mc:Choice>
-        <mc:Fallback xmlns="">
+        <mc:Fallback>
           <p:sp>
             <p:nvSpPr>
               <p:cNvPr id="16" name="object 16">
@@ -7400,16 +11302,16 @@
             </p:nvSpPr>
             <p:spPr>
               <a:xfrm>
-                <a:off x="685800" y="408883"/>
+                <a:off x="609600" y="216277"/>
                 <a:ext cx="10994410" cy="782265"/>
               </a:xfrm>
               <a:prstGeom prst="rect">
                 <a:avLst/>
               </a:prstGeom>
               <a:blipFill>
-                <a:blip r:embed="rId3"/>
+                <a:blip r:embed="rId4"/>
                 <a:stretch>
-                  <a:fillRect l="-1608" t="-10156"/>
+                  <a:fillRect l="-1552" t="-9302"/>
                 </a:stretch>
               </a:blipFill>
             </p:spPr>
@@ -7418,7 +11320,7 @@
               <a:lstStyle/>
               <a:p>
                 <a:r>
-                  <a:rPr lang="es-ES">
+                  <a:rPr lang="en-US">
                     <a:noFill/>
                   </a:rPr>
                   <a:t> </a:t>
@@ -7443,10 +11345,10 @@
           <p:nvPr/>
         </p:nvPicPr>
         <p:blipFill>
-          <a:blip r:embed="rId4">
+          <a:blip r:embed="rId5">
             <a:extLst>
               <a:ext uri="{96DAC541-7B7A-43D3-8B79-37D633B846F1}">
-                <asvg:svgBlip xmlns:asvg="http://schemas.microsoft.com/office/drawing/2016/SVG/main" r:embed="rId5"/>
+                <asvg:svgBlip xmlns:asvg="http://schemas.microsoft.com/office/drawing/2016/SVG/main" r:embed="rId6"/>
               </a:ext>
             </a:extLst>
           </a:blip>
@@ -7487,14 +11389,14 @@
           <a:p>
             <a:fld id="{B6F15528-21DE-4FAA-801E-634DDDAF4B2B}" type="slidenum">
               <a:rPr lang="es-ES" smtClean="0"/>
-              <a:t>7</a:t>
+              <a:t>9</a:t>
             </a:fld>
             <a:endParaRPr lang="es-ES"/>
           </a:p>
         </p:txBody>
       </p:sp>
-      <mc:AlternateContent xmlns:mc="http://schemas.openxmlformats.org/markup-compatibility/2006" xmlns:a14="http://schemas.microsoft.com/office/drawing/2010/main">
-        <mc:Choice Requires="a14">
+      <mc:AlternateContent xmlns:mc="http://schemas.openxmlformats.org/markup-compatibility/2006">
+        <mc:Choice xmlns:a14="http://schemas.microsoft.com/office/drawing/2010/main" Requires="a14">
           <p:sp>
             <p:nvSpPr>
               <p:cNvPr id="4" name="Marcador de texto 2">
@@ -7511,7 +11413,7 @@
             </p:nvSpPr>
             <p:spPr>
               <a:xfrm>
-                <a:off x="608012" y="1295400"/>
+                <a:off x="533400" y="607409"/>
                 <a:ext cx="11048999" cy="4958137"/>
               </a:xfrm>
               <a:prstGeom prst="rect">
@@ -7749,7 +11651,7 @@
             </p:txBody>
           </p:sp>
         </mc:Choice>
-        <mc:Fallback xmlns="">
+        <mc:Fallback>
           <p:sp>
             <p:nvSpPr>
               <p:cNvPr id="4" name="Marcador de texto 2">
@@ -7766,14 +11668,14 @@
             </p:nvSpPr>
             <p:spPr>
               <a:xfrm>
-                <a:off x="608012" y="1295400"/>
+                <a:off x="533400" y="607409"/>
                 <a:ext cx="11048999" cy="4958137"/>
               </a:xfrm>
               <a:prstGeom prst="rect">
                 <a:avLst/>
               </a:prstGeom>
               <a:blipFill>
-                <a:blip r:embed="rId6"/>
+                <a:blip r:embed="rId7"/>
                 <a:stretch>
                   <a:fillRect l="-607" t="-738"/>
                 </a:stretch>
@@ -7784,7 +11686,7 @@
               <a:lstStyle/>
               <a:p>
                 <a:r>
-                  <a:rPr lang="es-ES">
+                  <a:rPr lang="en-US">
                     <a:noFill/>
                   </a:rPr>
                   <a:t> </a:t>
@@ -7794,96 +11696,605 @@
           </p:sp>
         </mc:Fallback>
       </mc:AlternateContent>
-      <p:sp>
-        <p:nvSpPr>
-          <p:cNvPr id="2" name="CuadroTexto 1">
-            <a:extLst>
-              <a:ext uri="{FF2B5EF4-FFF2-40B4-BE49-F238E27FC236}">
-                <a16:creationId xmlns:a16="http://schemas.microsoft.com/office/drawing/2014/main" id="{CFDBBA6B-3646-055F-7A9C-EE01830137BE}"/>
-              </a:ext>
-            </a:extLst>
-          </p:cNvPr>
-          <p:cNvSpPr txBox="1"/>
-          <p:nvPr/>
-        </p:nvSpPr>
-        <p:spPr>
-          <a:xfrm>
-            <a:off x="609441" y="4860334"/>
-            <a:ext cx="11199971" cy="1384995"/>
-          </a:xfrm>
-          <a:prstGeom prst="rect">
-            <a:avLst/>
-          </a:prstGeom>
-          <a:solidFill>
-            <a:schemeClr val="bg1">
-              <a:lumMod val="95000"/>
-            </a:schemeClr>
-          </a:solidFill>
-          <a:ln w="28575">
-            <a:solidFill>
-              <a:srgbClr val="E0700D"/>
-            </a:solidFill>
-          </a:ln>
-        </p:spPr>
-        <p:txBody>
-          <a:bodyPr wrap="square" rtlCol="0">
-            <a:spAutoFit/>
-          </a:bodyPr>
-          <a:lstStyle/>
-          <a:p>
-            <a:pPr algn="just"/>
-            <a:r>
-              <a:rPr lang="en-US" sz="1200" dirty="0">
-                <a:latin typeface="Arial" panose="020B0604020202020204" pitchFamily="34" charset="0"/>
-                <a:cs typeface="Arial" panose="020B0604020202020204" pitchFamily="34" charset="0"/>
-              </a:rPr>
-              <a:t>Document all your results (copy here the code employed to obtain the corresponding value)</a:t>
-            </a:r>
-          </a:p>
-          <a:p>
-            <a:pPr algn="just"/>
-            <a:endParaRPr lang="en-US" sz="1200" dirty="0">
-              <a:latin typeface="Arial" panose="020B0604020202020204" pitchFamily="34" charset="0"/>
-              <a:cs typeface="Arial" panose="020B0604020202020204" pitchFamily="34" charset="0"/>
-            </a:endParaRPr>
-          </a:p>
-          <a:p>
-            <a:pPr algn="just"/>
-            <a:endParaRPr lang="en-US" sz="1200" dirty="0">
-              <a:latin typeface="Arial" panose="020B0604020202020204" pitchFamily="34" charset="0"/>
-              <a:cs typeface="Arial" panose="020B0604020202020204" pitchFamily="34" charset="0"/>
-            </a:endParaRPr>
-          </a:p>
-          <a:p>
-            <a:pPr algn="just"/>
-            <a:endParaRPr lang="en-US" sz="1200" dirty="0">
-              <a:latin typeface="Arial" panose="020B0604020202020204" pitchFamily="34" charset="0"/>
-              <a:cs typeface="Arial" panose="020B0604020202020204" pitchFamily="34" charset="0"/>
-            </a:endParaRPr>
-          </a:p>
-          <a:p>
-            <a:pPr algn="just"/>
-            <a:endParaRPr lang="en-US" sz="1200" dirty="0">
-              <a:latin typeface="Arial" panose="020B0604020202020204" pitchFamily="34" charset="0"/>
-              <a:cs typeface="Arial" panose="020B0604020202020204" pitchFamily="34" charset="0"/>
-            </a:endParaRPr>
-          </a:p>
-          <a:p>
-            <a:pPr algn="just"/>
-            <a:endParaRPr lang="en-US" sz="1200" dirty="0">
-              <a:latin typeface="Arial" panose="020B0604020202020204" pitchFamily="34" charset="0"/>
-              <a:cs typeface="Arial" panose="020B0604020202020204" pitchFamily="34" charset="0"/>
-            </a:endParaRPr>
-          </a:p>
-          <a:p>
-            <a:pPr algn="just"/>
-            <a:endParaRPr lang="en-US" sz="1200" dirty="0">
-              <a:latin typeface="Arial" panose="020B0604020202020204" pitchFamily="34" charset="0"/>
-              <a:cs typeface="Arial" panose="020B0604020202020204" pitchFamily="34" charset="0"/>
-            </a:endParaRPr>
-          </a:p>
-        </p:txBody>
-      </p:sp>
+      <mc:AlternateContent xmlns:mc="http://schemas.openxmlformats.org/markup-compatibility/2006">
+        <mc:Choice xmlns:a14="http://schemas.microsoft.com/office/drawing/2010/main" Requires="a14">
+          <p:sp>
+            <p:nvSpPr>
+              <p:cNvPr id="2" name="CuadroTexto 1">
+                <a:extLst>
+                  <a:ext uri="{FF2B5EF4-FFF2-40B4-BE49-F238E27FC236}">
+                    <a16:creationId xmlns:a16="http://schemas.microsoft.com/office/drawing/2014/main" id="{CFDBBA6B-3646-055F-7A9C-EE01830137BE}"/>
+                  </a:ext>
+                </a:extLst>
+              </p:cNvPr>
+              <p:cNvSpPr txBox="1"/>
+              <p:nvPr/>
+            </p:nvSpPr>
+            <p:spPr>
+              <a:xfrm>
+                <a:off x="399661" y="2286000"/>
+                <a:ext cx="5716588" cy="3867213"/>
+              </a:xfrm>
+              <a:prstGeom prst="rect">
+                <a:avLst/>
+              </a:prstGeom>
+              <a:solidFill>
+                <a:schemeClr val="bg1">
+                  <a:lumMod val="95000"/>
+                </a:schemeClr>
+              </a:solidFill>
+              <a:ln w="28575">
+                <a:solidFill>
+                  <a:srgbClr val="E0700D"/>
+                </a:solidFill>
+              </a:ln>
+            </p:spPr>
+            <p:txBody>
+              <a:bodyPr wrap="square" rtlCol="0">
+                <a:spAutoFit/>
+              </a:bodyPr>
+              <a:lstStyle/>
+              <a:p>
+                <a:pPr algn="just"/>
+                <a:r>
+                  <a:rPr lang="en-US" sz="1400" dirty="0">
+                    <a:latin typeface="Arial" panose="020B0604020202020204" pitchFamily="34" charset="0"/>
+                    <a:cs typeface="Arial" panose="020B0604020202020204" pitchFamily="34" charset="0"/>
+                  </a:rPr>
+                  <a:t>From</a:t>
+                </a:r>
+                <a:r>
+                  <a:rPr lang="en-US" sz="1400" dirty="0"/>
+                  <a:t> </a:t>
+                </a:r>
+                <a:r>
+                  <a:rPr lang="en-US" sz="1400" dirty="0">
+                    <a:latin typeface="Arial" panose="020B0604020202020204" pitchFamily="34" charset="0"/>
+                    <a:cs typeface="Arial" panose="020B0604020202020204" pitchFamily="34" charset="0"/>
+                  </a:rPr>
+                  <a:t>the</a:t>
+                </a:r>
+                <a:r>
+                  <a:rPr lang="en-US" sz="1400" dirty="0"/>
+                  <a:t> </a:t>
+                </a:r>
+                <a:r>
+                  <a:rPr lang="en-US" sz="1400" dirty="0">
+                    <a:latin typeface="Arial" panose="020B0604020202020204" pitchFamily="34" charset="0"/>
+                    <a:cs typeface="Arial" panose="020B0604020202020204" pitchFamily="34" charset="0"/>
+                  </a:rPr>
+                  <a:t>recorded values of the effective index </a:t>
+                </a:r>
+                <a14:m>
+                  <m:oMath xmlns:m="http://schemas.openxmlformats.org/officeDocument/2006/math">
+                    <m:sSub>
+                      <m:sSubPr>
+                        <m:ctrlPr>
+                          <a:rPr lang="en-US" sz="1400" dirty="0">
+                            <a:latin typeface="Arial" panose="020B0604020202020204" pitchFamily="34" charset="0"/>
+                            <a:cs typeface="Arial" panose="020B0604020202020204" pitchFamily="34" charset="0"/>
+                          </a:rPr>
+                        </m:ctrlPr>
+                      </m:sSubPr>
+                      <m:e>
+                        <m:r>
+                          <a:rPr lang="en-US" sz="1400" dirty="0">
+                            <a:latin typeface="Arial" panose="020B0604020202020204" pitchFamily="34" charset="0"/>
+                            <a:cs typeface="Arial" panose="020B0604020202020204" pitchFamily="34" charset="0"/>
+                          </a:rPr>
+                          <m:t>𝑛</m:t>
+                        </m:r>
+                      </m:e>
+                      <m:sub>
+                        <m:r>
+                          <m:rPr>
+                            <m:nor/>
+                          </m:rPr>
+                          <a:rPr lang="en-US" sz="1400" dirty="0">
+                            <a:latin typeface="Arial" panose="020B0604020202020204" pitchFamily="34" charset="0"/>
+                            <a:cs typeface="Arial" panose="020B0604020202020204" pitchFamily="34" charset="0"/>
+                          </a:rPr>
+                          <m:t>eff</m:t>
+                        </m:r>
+                      </m:sub>
+                    </m:sSub>
+                  </m:oMath>
+                </a14:m>
+                <a:r>
+                  <a:rPr lang="en-US" sz="1400" dirty="0">
+                    <a:latin typeface="Arial" panose="020B0604020202020204" pitchFamily="34" charset="0"/>
+                    <a:cs typeface="Arial" panose="020B0604020202020204" pitchFamily="34" charset="0"/>
+                  </a:rPr>
+                  <a:t> at different wavelengths for the SOI waveguide, it is possible to calculate the group index </a:t>
+                </a:r>
+                <a14:m>
+                  <m:oMath xmlns:m="http://schemas.openxmlformats.org/officeDocument/2006/math">
+                    <m:sSub>
+                      <m:sSubPr>
+                        <m:ctrlPr>
+                          <a:rPr lang="en-US" sz="1400" dirty="0">
+                            <a:latin typeface="Arial" panose="020B0604020202020204" pitchFamily="34" charset="0"/>
+                            <a:cs typeface="Arial" panose="020B0604020202020204" pitchFamily="34" charset="0"/>
+                          </a:rPr>
+                        </m:ctrlPr>
+                      </m:sSubPr>
+                      <m:e>
+                        <m:r>
+                          <a:rPr lang="en-US" sz="1400" dirty="0">
+                            <a:latin typeface="Arial" panose="020B0604020202020204" pitchFamily="34" charset="0"/>
+                            <a:cs typeface="Arial" panose="020B0604020202020204" pitchFamily="34" charset="0"/>
+                          </a:rPr>
+                          <m:t>𝑛</m:t>
+                        </m:r>
+                      </m:e>
+                      <m:sub>
+                        <m:r>
+                          <a:rPr lang="en-US" sz="1400" dirty="0">
+                            <a:latin typeface="Arial" panose="020B0604020202020204" pitchFamily="34" charset="0"/>
+                            <a:cs typeface="Arial" panose="020B0604020202020204" pitchFamily="34" charset="0"/>
+                          </a:rPr>
+                          <m:t>𝑔</m:t>
+                        </m:r>
+                      </m:sub>
+                    </m:sSub>
+                  </m:oMath>
+                </a14:m>
+                <a:r>
+                  <a:rPr lang="en-US" sz="1400" dirty="0">
+                    <a:latin typeface="Arial" panose="020B0604020202020204" pitchFamily="34" charset="0"/>
+                    <a:cs typeface="Arial" panose="020B0604020202020204" pitchFamily="34" charset="0"/>
+                  </a:rPr>
+                  <a:t>using the following equation:</a:t>
+                </a:r>
+              </a:p>
+              <a:p>
+                <a:pPr algn="just"/>
+                <a:endParaRPr lang="en-US" sz="1200" dirty="0">
+                  <a:latin typeface="Arial" panose="020B0604020202020204" pitchFamily="34" charset="0"/>
+                  <a:cs typeface="Arial" panose="020B0604020202020204" pitchFamily="34" charset="0"/>
+                </a:endParaRPr>
+              </a:p>
+              <a:p>
+                <a:pPr algn="just"/>
+                <a14:m>
+                  <m:oMathPara xmlns:m="http://schemas.openxmlformats.org/officeDocument/2006/math">
+                    <m:oMathParaPr>
+                      <m:jc m:val="centerGroup"/>
+                    </m:oMathParaPr>
+                    <m:oMath xmlns:m="http://schemas.openxmlformats.org/officeDocument/2006/math">
+                      <m:r>
+                        <a:rPr lang="es-CO" i="1" dirty="0" smtClean="0">
+                          <a:latin typeface="Cambria Math" panose="02040503050406030204" pitchFamily="18" charset="0"/>
+                        </a:rPr>
+                        <m:t>𝑛𝑔</m:t>
+                      </m:r>
+                      <m:r>
+                        <a:rPr lang="es-CO" i="1" dirty="0" smtClean="0">
+                          <a:latin typeface="Cambria Math" panose="02040503050406030204" pitchFamily="18" charset="0"/>
+                        </a:rPr>
+                        <m:t>=</m:t>
+                      </m:r>
+                      <m:r>
+                        <a:rPr lang="es-CO" i="1" dirty="0" smtClean="0">
+                          <a:latin typeface="Cambria Math" panose="02040503050406030204" pitchFamily="18" charset="0"/>
+                        </a:rPr>
+                        <m:t>𝑛</m:t>
+                      </m:r>
+                      <m:r>
+                        <m:rPr>
+                          <m:nor/>
+                        </m:rPr>
+                        <a:rPr lang="es-CO" i="0" dirty="0" err="1">
+                          <a:latin typeface="Cambria Math" panose="02040503050406030204" pitchFamily="18" charset="0"/>
+                        </a:rPr>
+                        <m:t>eff</m:t>
+                      </m:r>
+                      <m:r>
+                        <a:rPr lang="es-CO" i="1" dirty="0">
+                          <a:latin typeface="Cambria Math" panose="02040503050406030204" pitchFamily="18" charset="0"/>
+                        </a:rPr>
+                        <m:t>−</m:t>
+                      </m:r>
+                      <m:r>
+                        <a:rPr lang="es-CO" i="1" dirty="0">
+                          <a:latin typeface="Cambria Math" panose="02040503050406030204" pitchFamily="18" charset="0"/>
+                        </a:rPr>
+                        <m:t>𝜆</m:t>
+                      </m:r>
+                      <m:f>
+                        <m:fPr>
+                          <m:ctrlPr>
+                            <a:rPr lang="es-CO" i="1" dirty="0">
+                              <a:latin typeface="Cambria Math" panose="02040503050406030204" pitchFamily="18" charset="0"/>
+                            </a:rPr>
+                          </m:ctrlPr>
+                        </m:fPr>
+                        <m:num>
+                          <m:r>
+                            <a:rPr lang="es-CO" i="1" dirty="0">
+                              <a:latin typeface="Cambria Math" panose="02040503050406030204" pitchFamily="18" charset="0"/>
+                            </a:rPr>
+                            <m:t>𝑑</m:t>
+                          </m:r>
+                          <m:sSub>
+                            <m:sSubPr>
+                              <m:ctrlPr>
+                                <a:rPr lang="es-CO" i="1" dirty="0">
+                                  <a:latin typeface="Cambria Math" panose="02040503050406030204" pitchFamily="18" charset="0"/>
+                                </a:rPr>
+                              </m:ctrlPr>
+                            </m:sSubPr>
+                            <m:e>
+                              <m:r>
+                                <a:rPr lang="es-CO" i="1" dirty="0">
+                                  <a:latin typeface="Cambria Math" panose="02040503050406030204" pitchFamily="18" charset="0"/>
+                                </a:rPr>
+                                <m:t>𝑛</m:t>
+                              </m:r>
+                            </m:e>
+                            <m:sub>
+                              <m:r>
+                                <m:rPr>
+                                  <m:nor/>
+                                </m:rPr>
+                                <a:rPr lang="es-CO" i="0" dirty="0" err="1">
+                                  <a:latin typeface="Cambria Math" panose="02040503050406030204" pitchFamily="18" charset="0"/>
+                                </a:rPr>
+                                <m:t>eff</m:t>
+                              </m:r>
+                            </m:sub>
+                          </m:sSub>
+                        </m:num>
+                        <m:den>
+                          <m:r>
+                            <a:rPr lang="es-CO" i="1" dirty="0">
+                              <a:latin typeface="Cambria Math" panose="02040503050406030204" pitchFamily="18" charset="0"/>
+                            </a:rPr>
+                            <m:t>𝑑</m:t>
+                          </m:r>
+                          <m:r>
+                            <a:rPr lang="es-CO" i="1" dirty="0">
+                              <a:latin typeface="Cambria Math" panose="02040503050406030204" pitchFamily="18" charset="0"/>
+                            </a:rPr>
+                            <m:t>𝜆</m:t>
+                          </m:r>
+                        </m:den>
+                      </m:f>
+                    </m:oMath>
+                  </m:oMathPara>
+                </a14:m>
+                <a:endParaRPr lang="es-CO" dirty="0"/>
+              </a:p>
+              <a:p>
+                <a:pPr algn="just"/>
+                <a:endParaRPr lang="en-US" sz="1200" dirty="0">
+                  <a:latin typeface="Arial" panose="020B0604020202020204" pitchFamily="34" charset="0"/>
+                  <a:cs typeface="Arial" panose="020B0604020202020204" pitchFamily="34" charset="0"/>
+                </a:endParaRPr>
+              </a:p>
+              <a:p>
+                <a:pPr algn="just"/>
+                <a:endParaRPr lang="en-US" sz="1200" dirty="0">
+                  <a:latin typeface="Arial" panose="020B0604020202020204" pitchFamily="34" charset="0"/>
+                  <a:cs typeface="Arial" panose="020B0604020202020204" pitchFamily="34" charset="0"/>
+                </a:endParaRPr>
+              </a:p>
+              <a:p>
+                <a:pPr algn="just"/>
+                <a:r>
+                  <a:rPr lang="en-US" sz="1400" dirty="0">
+                    <a:latin typeface="Arial" panose="020B0604020202020204" pitchFamily="34" charset="0"/>
+                    <a:cs typeface="Arial" panose="020B0604020202020204" pitchFamily="34" charset="0"/>
+                  </a:rPr>
+                  <a:t>Using this value, the length difference between the two interferometer arms can be calculated for a desired FSR of 40 nm.</a:t>
+                </a:r>
+              </a:p>
+              <a:p>
+                <a:pPr algn="just"/>
+                <a:endParaRPr lang="en-US" sz="1200" dirty="0">
+                  <a:latin typeface="Arial" panose="020B0604020202020204" pitchFamily="34" charset="0"/>
+                  <a:cs typeface="Arial" panose="020B0604020202020204" pitchFamily="34" charset="0"/>
+                </a:endParaRPr>
+              </a:p>
+              <a:p>
+                <a:pPr algn="just"/>
+                <a14:m>
+                  <m:oMathPara xmlns:m="http://schemas.openxmlformats.org/officeDocument/2006/math">
+                    <m:oMathParaPr>
+                      <m:jc m:val="centerGroup"/>
+                    </m:oMathParaPr>
+                    <m:oMath xmlns:m="http://schemas.openxmlformats.org/officeDocument/2006/math">
+                      <m:r>
+                        <m:rPr>
+                          <m:sty m:val="p"/>
+                        </m:rPr>
+                        <a:rPr lang="es-CO" sz="1600" i="0" dirty="0" smtClean="0">
+                          <a:latin typeface="Cambria Math" panose="02040503050406030204" pitchFamily="18" charset="0"/>
+                        </a:rPr>
+                        <m:t>Δ</m:t>
+                      </m:r>
+                      <m:r>
+                        <a:rPr lang="es-CO" sz="1600" i="1" dirty="0" smtClean="0">
+                          <a:latin typeface="Cambria Math" panose="02040503050406030204" pitchFamily="18" charset="0"/>
+                        </a:rPr>
+                        <m:t>𝐿</m:t>
+                      </m:r>
+                      <m:r>
+                        <a:rPr lang="es-CO" sz="1600" i="1" dirty="0" smtClean="0">
+                          <a:latin typeface="Cambria Math" panose="02040503050406030204" pitchFamily="18" charset="0"/>
+                        </a:rPr>
+                        <m:t>=</m:t>
+                      </m:r>
+                      <m:f>
+                        <m:fPr>
+                          <m:ctrlPr>
+                            <a:rPr lang="es-CO" sz="1600" i="1" dirty="0" smtClean="0">
+                              <a:latin typeface="Cambria Math" panose="02040503050406030204" pitchFamily="18" charset="0"/>
+                            </a:rPr>
+                          </m:ctrlPr>
+                        </m:fPr>
+                        <m:num>
+                          <m:sSubSup>
+                            <m:sSubSupPr>
+                              <m:ctrlPr>
+                                <a:rPr lang="es-CO" sz="1600" i="1" dirty="0" smtClean="0">
+                                  <a:latin typeface="Cambria Math" panose="02040503050406030204" pitchFamily="18" charset="0"/>
+                                </a:rPr>
+                              </m:ctrlPr>
+                            </m:sSubSupPr>
+                            <m:e>
+                              <m:r>
+                                <a:rPr lang="es-CO" sz="1600" i="1" dirty="0" smtClean="0">
+                                  <a:latin typeface="Cambria Math" panose="02040503050406030204" pitchFamily="18" charset="0"/>
+                                </a:rPr>
+                                <m:t>𝜆</m:t>
+                              </m:r>
+                            </m:e>
+                            <m:sub>
+                              <m:r>
+                                <a:rPr lang="es-CO" sz="1600" i="1" dirty="0" smtClean="0">
+                                  <a:latin typeface="Cambria Math" panose="02040503050406030204" pitchFamily="18" charset="0"/>
+                                </a:rPr>
+                                <m:t>0</m:t>
+                              </m:r>
+                            </m:sub>
+                            <m:sup>
+                              <m:r>
+                                <a:rPr lang="es-CO" sz="1600" i="1" dirty="0" smtClean="0">
+                                  <a:latin typeface="Cambria Math" panose="02040503050406030204" pitchFamily="18" charset="0"/>
+                                </a:rPr>
+                                <m:t>2</m:t>
+                              </m:r>
+                            </m:sup>
+                          </m:sSubSup>
+                        </m:num>
+                        <m:den>
+                          <m:sSub>
+                            <m:sSubPr>
+                              <m:ctrlPr>
+                                <a:rPr lang="es-CO" sz="1600" i="1" dirty="0" err="1" smtClean="0">
+                                  <a:latin typeface="Cambria Math" panose="02040503050406030204" pitchFamily="18" charset="0"/>
+                                </a:rPr>
+                              </m:ctrlPr>
+                            </m:sSubPr>
+                            <m:e>
+                              <m:r>
+                                <a:rPr lang="es-CO" sz="1600" i="1" dirty="0" err="1">
+                                  <a:latin typeface="Cambria Math" panose="02040503050406030204" pitchFamily="18" charset="0"/>
+                                </a:rPr>
+                                <m:t>𝑛</m:t>
+                              </m:r>
+                            </m:e>
+                            <m:sub>
+                              <m:r>
+                                <a:rPr lang="es-CO" sz="1600" i="1" dirty="0" err="1">
+                                  <a:latin typeface="Cambria Math" panose="02040503050406030204" pitchFamily="18" charset="0"/>
+                                </a:rPr>
+                                <m:t>𝑔</m:t>
+                              </m:r>
+                            </m:sub>
+                          </m:sSub>
+                          <m:r>
+                            <a:rPr lang="es-CO" sz="1600" i="1" dirty="0">
+                              <a:latin typeface="Cambria Math" panose="02040503050406030204" pitchFamily="18" charset="0"/>
+                            </a:rPr>
+                            <m:t>,</m:t>
+                          </m:r>
+                          <m:r>
+                            <m:rPr>
+                              <m:nor/>
+                            </m:rPr>
+                            <a:rPr lang="es-CO" sz="1600" i="0" dirty="0">
+                              <a:latin typeface="Cambria Math" panose="02040503050406030204" pitchFamily="18" charset="0"/>
+                            </a:rPr>
+                            <m:t>FSR</m:t>
+                          </m:r>
+                        </m:den>
+                      </m:f>
+                    </m:oMath>
+                  </m:oMathPara>
+                </a14:m>
+                <a:endParaRPr lang="en-US" sz="1200" dirty="0">
+                  <a:latin typeface="Arial" panose="020B0604020202020204" pitchFamily="34" charset="0"/>
+                  <a:cs typeface="Arial" panose="020B0604020202020204" pitchFamily="34" charset="0"/>
+                </a:endParaRPr>
+              </a:p>
+              <a:p>
+                <a:pPr algn="just"/>
+                <a:endParaRPr lang="en-US" sz="1200" dirty="0">
+                  <a:latin typeface="Arial" panose="020B0604020202020204" pitchFamily="34" charset="0"/>
+                  <a:cs typeface="Arial" panose="020B0604020202020204" pitchFamily="34" charset="0"/>
+                </a:endParaRPr>
+              </a:p>
+              <a:p>
+                <a:pPr algn="just"/>
+                <a:r>
+                  <a:rPr lang="en-US" sz="1400" dirty="0">
+                    <a:latin typeface="Arial" panose="020B0604020202020204" pitchFamily="34" charset="0"/>
+                    <a:cs typeface="Arial" panose="020B0604020202020204" pitchFamily="34" charset="0"/>
+                  </a:rPr>
+                  <a:t>The results are </a:t>
+                </a:r>
+                <a14:m>
+                  <m:oMath xmlns:m="http://schemas.openxmlformats.org/officeDocument/2006/math">
+                    <m:sSub>
+                      <m:sSubPr>
+                        <m:ctrlPr>
+                          <a:rPr lang="en-US" sz="1400" i="1" dirty="0" smtClean="0">
+                            <a:latin typeface="Cambria Math" panose="02040503050406030204" pitchFamily="18" charset="0"/>
+                            <a:cs typeface="Arial" panose="020B0604020202020204" pitchFamily="34" charset="0"/>
+                          </a:rPr>
+                        </m:ctrlPr>
+                      </m:sSubPr>
+                      <m:e>
+                        <m:r>
+                          <a:rPr lang="en-US" sz="1400" i="1" dirty="0" smtClean="0">
+                            <a:latin typeface="Cambria Math" panose="02040503050406030204" pitchFamily="18" charset="0"/>
+                            <a:cs typeface="Arial" panose="020B0604020202020204" pitchFamily="34" charset="0"/>
+                          </a:rPr>
+                          <m:t>𝑛</m:t>
+                        </m:r>
+                      </m:e>
+                      <m:sub>
+                        <m:r>
+                          <a:rPr lang="en-US" sz="1400" i="1" dirty="0" smtClean="0">
+                            <a:latin typeface="Cambria Math" panose="02040503050406030204" pitchFamily="18" charset="0"/>
+                            <a:cs typeface="Arial" panose="020B0604020202020204" pitchFamily="34" charset="0"/>
+                          </a:rPr>
+                          <m:t>𝑔</m:t>
+                        </m:r>
+                      </m:sub>
+                    </m:sSub>
+                    <m:r>
+                      <a:rPr lang="en-US" sz="1400" i="1" dirty="0" smtClean="0">
+                        <a:latin typeface="Cambria Math" panose="02040503050406030204" pitchFamily="18" charset="0"/>
+                        <a:cs typeface="Arial" panose="020B0604020202020204" pitchFamily="34" charset="0"/>
+                      </a:rPr>
+                      <m:t>=4,3</m:t>
+                    </m:r>
+                    <m:r>
+                      <a:rPr lang="es-MX" sz="1400" b="0" i="1" dirty="0" smtClean="0">
+                        <a:latin typeface="Cambria Math" panose="02040503050406030204" pitchFamily="18" charset="0"/>
+                        <a:cs typeface="Arial" panose="020B0604020202020204" pitchFamily="34" charset="0"/>
+                      </a:rPr>
+                      <m:t> </m:t>
+                    </m:r>
+                  </m:oMath>
+                </a14:m>
+                <a:r>
+                  <a:rPr lang="en-US" sz="1400" dirty="0">
+                    <a:latin typeface="Arial" panose="020B0604020202020204" pitchFamily="34" charset="0"/>
+                    <a:cs typeface="Arial" panose="020B0604020202020204" pitchFamily="34" charset="0"/>
+                  </a:rPr>
+                  <a:t>and </a:t>
+                </a:r>
+                <a14:m>
+                  <m:oMath xmlns:m="http://schemas.openxmlformats.org/officeDocument/2006/math">
+                    <m:r>
+                      <m:rPr>
+                        <m:sty m:val="p"/>
+                      </m:rPr>
+                      <a:rPr lang="en-US" sz="1400" i="0" dirty="0" smtClean="0">
+                        <a:latin typeface="Cambria Math" panose="02040503050406030204" pitchFamily="18" charset="0"/>
+                        <a:cs typeface="Arial" panose="020B0604020202020204" pitchFamily="34" charset="0"/>
+                      </a:rPr>
+                      <m:t>Δ</m:t>
+                    </m:r>
+                    <m:r>
+                      <a:rPr lang="en-US" sz="1400" i="1" dirty="0" smtClean="0">
+                        <a:latin typeface="Cambria Math" panose="02040503050406030204" pitchFamily="18" charset="0"/>
+                        <a:cs typeface="Arial" panose="020B0604020202020204" pitchFamily="34" charset="0"/>
+                      </a:rPr>
+                      <m:t>𝐿</m:t>
+                    </m:r>
+                    <m:r>
+                      <a:rPr lang="en-US" sz="1400" i="1" dirty="0" smtClean="0">
+                        <a:latin typeface="Cambria Math" panose="02040503050406030204" pitchFamily="18" charset="0"/>
+                        <a:cs typeface="Arial" panose="020B0604020202020204" pitchFamily="34" charset="0"/>
+                      </a:rPr>
+                      <m:t> = 14000 </m:t>
+                    </m:r>
+                    <m:r>
+                      <a:rPr lang="en-US" sz="1400" i="1" dirty="0" smtClean="0">
+                        <a:latin typeface="Cambria Math" panose="02040503050406030204" pitchFamily="18" charset="0"/>
+                        <a:cs typeface="Arial" panose="020B0604020202020204" pitchFamily="34" charset="0"/>
+                      </a:rPr>
+                      <m:t>𝑛𝑚</m:t>
+                    </m:r>
+                  </m:oMath>
+                </a14:m>
+                <a:endParaRPr lang="en-US" sz="1400" dirty="0">
+                  <a:latin typeface="Arial" panose="020B0604020202020204" pitchFamily="34" charset="0"/>
+                  <a:cs typeface="Arial" panose="020B0604020202020204" pitchFamily="34" charset="0"/>
+                </a:endParaRPr>
+              </a:p>
+              <a:p>
+                <a:pPr algn="just"/>
+                <a:endParaRPr lang="en-US" sz="1400" dirty="0">
+                  <a:latin typeface="Arial" panose="020B0604020202020204" pitchFamily="34" charset="0"/>
+                  <a:cs typeface="Arial" panose="020B0604020202020204" pitchFamily="34" charset="0"/>
+                </a:endParaRPr>
+              </a:p>
+              <a:p>
+                <a:pPr algn="just"/>
+                <a:endParaRPr lang="en-US" sz="1200" dirty="0">
+                  <a:latin typeface="Arial" panose="020B0604020202020204" pitchFamily="34" charset="0"/>
+                  <a:cs typeface="Arial" panose="020B0604020202020204" pitchFamily="34" charset="0"/>
+                </a:endParaRPr>
+              </a:p>
+            </p:txBody>
+          </p:sp>
+        </mc:Choice>
+        <mc:Fallback>
+          <p:sp>
+            <p:nvSpPr>
+              <p:cNvPr id="2" name="CuadroTexto 1">
+                <a:extLst>
+                  <a:ext uri="{FF2B5EF4-FFF2-40B4-BE49-F238E27FC236}">
+                    <a16:creationId xmlns:a16="http://schemas.microsoft.com/office/drawing/2014/main" id="{CFDBBA6B-3646-055F-7A9C-EE01830137BE}"/>
+                  </a:ext>
+                </a:extLst>
+              </p:cNvPr>
+              <p:cNvSpPr txBox="1">
+                <a:spLocks noRot="1" noChangeAspect="1" noMove="1" noResize="1" noEditPoints="1" noAdjustHandles="1" noChangeArrowheads="1" noChangeShapeType="1" noTextEdit="1"/>
+              </p:cNvSpPr>
+              <p:nvPr/>
+            </p:nvSpPr>
+            <p:spPr>
+              <a:xfrm>
+                <a:off x="399661" y="2286000"/>
+                <a:ext cx="5716588" cy="3867213"/>
+              </a:xfrm>
+              <a:prstGeom prst="rect">
+                <a:avLst/>
+              </a:prstGeom>
+              <a:blipFill>
+                <a:blip r:embed="rId8"/>
+                <a:stretch>
+                  <a:fillRect l="-106" r="-106"/>
+                </a:stretch>
+              </a:blipFill>
+              <a:ln w="28575">
+                <a:solidFill>
+                  <a:srgbClr val="E0700D"/>
+                </a:solidFill>
+              </a:ln>
+            </p:spPr>
+            <p:txBody>
+              <a:bodyPr/>
+              <a:lstStyle/>
+              <a:p>
+                <a:r>
+                  <a:rPr lang="en-US">
+                    <a:noFill/>
+                  </a:rPr>
+                  <a:t> </a:t>
+                </a:r>
+              </a:p>
+            </p:txBody>
+          </p:sp>
+        </mc:Fallback>
+      </mc:AlternateContent>
       <p:sp>
         <p:nvSpPr>
           <p:cNvPr id="5" name="Marcador de pie de página 2">
@@ -7923,1167 +12334,184 @@
           </a:p>
         </p:txBody>
       </p:sp>
-    </p:spTree>
-    <p:extLst>
-      <p:ext uri="{BB962C8B-B14F-4D97-AF65-F5344CB8AC3E}">
-        <p14:creationId xmlns:p14="http://schemas.microsoft.com/office/powerpoint/2010/main" val="2337098194"/>
-      </p:ext>
-    </p:extLst>
-  </p:cSld>
-  <p:clrMapOvr>
-    <a:masterClrMapping/>
-  </p:clrMapOvr>
-</p:sld>
-</file>
-
-<file path=ppt/slides/slide8.xml><?xml version="1.0" encoding="utf-8"?>
-<p:sld xmlns:a="http://schemas.openxmlformats.org/drawingml/2006/main" xmlns:r="http://schemas.openxmlformats.org/officeDocument/2006/relationships" xmlns:p="http://schemas.openxmlformats.org/presentationml/2006/main">
-  <p:cSld>
-    <p:spTree>
-      <p:nvGrpSpPr>
-        <p:cNvPr id="1" name="">
-          <a:extLst>
-            <a:ext uri="{FF2B5EF4-FFF2-40B4-BE49-F238E27FC236}">
-              <a16:creationId xmlns:a16="http://schemas.microsoft.com/office/drawing/2014/main" id="{98CB9552-DF22-1310-10FA-4D2D2AF77601}"/>
-            </a:ext>
-          </a:extLst>
-        </p:cNvPr>
-        <p:cNvGrpSpPr/>
-        <p:nvPr/>
-      </p:nvGrpSpPr>
-      <p:grpSpPr>
-        <a:xfrm>
-          <a:off x="0" y="0"/>
-          <a:ext cx="0" cy="0"/>
-          <a:chOff x="0" y="0"/>
-          <a:chExt cx="0" cy="0"/>
-        </a:xfrm>
-      </p:grpSpPr>
-      <p:sp>
-        <p:nvSpPr>
-          <p:cNvPr id="16" name="object 16">
+      <p:sp>
+        <p:nvSpPr>
+          <p:cNvPr id="3" name="Rectángulo 4">
             <a:extLst>
               <a:ext uri="{FF2B5EF4-FFF2-40B4-BE49-F238E27FC236}">
-                <a16:creationId xmlns:a16="http://schemas.microsoft.com/office/drawing/2014/main" id="{B0632A48-0384-0EF1-389E-FBF3F9C3E7CE}"/>
+                <a16:creationId xmlns:a16="http://schemas.microsoft.com/office/drawing/2014/main" id="{F68B131B-F506-E0A6-FB8B-4BB7A3D49157}"/>
               </a:ext>
             </a:extLst>
           </p:cNvPr>
-          <p:cNvSpPr txBox="1">
-            <a:spLocks noGrp="1"/>
-          </p:cNvSpPr>
-          <p:nvPr>
-            <p:ph type="title"/>
-          </p:nvPr>
+          <p:cNvSpPr/>
+          <p:nvPr/>
         </p:nvSpPr>
         <p:spPr>
           <a:xfrm>
-            <a:off x="685800" y="408883"/>
-            <a:ext cx="10994410" cy="782265"/>
+            <a:off x="6272932" y="2227223"/>
+            <a:ext cx="5614427" cy="3925990"/>
           </a:xfrm>
           <a:prstGeom prst="rect">
             <a:avLst/>
           </a:prstGeom>
-        </p:spPr>
-        <p:txBody>
-          <a:bodyPr vert="horz" wrap="square" lIns="0" tIns="12700" rIns="0" bIns="0" rtlCol="0">
-            <a:spAutoFit/>
-          </a:bodyPr>
-          <a:lstStyle/>
-          <a:p>
-            <a:pPr marL="12700">
-              <a:lnSpc>
-                <a:spcPct val="100000"/>
-              </a:lnSpc>
-              <a:spcBef>
-                <a:spcPts val="100"/>
-              </a:spcBef>
-            </a:pPr>
-            <a:r>
-              <a:rPr lang="en-US" sz="2400" b="1" dirty="0"/>
-              <a:t>ASSESSMENT #3 </a:t>
-            </a:r>
-            <a:r>
-              <a:rPr lang="en-US" sz="2500" dirty="0"/>
-              <a:t>– SAX implementation </a:t>
-            </a:r>
-            <a:br>
-              <a:rPr lang="es-ES" sz="2500" spc="-5" dirty="0">
-                <a:latin typeface="+mj-lt"/>
-                <a:cs typeface="Lucida Sans"/>
-              </a:rPr>
-            </a:br>
-            <a:endParaRPr sz="2500" b="0" dirty="0">
-              <a:latin typeface="+mj-lt"/>
-              <a:cs typeface="Lucida Sans"/>
-            </a:endParaRPr>
-          </a:p>
-        </p:txBody>
-      </p:sp>
-      <p:pic>
-        <p:nvPicPr>
-          <p:cNvPr id="83" name="Gráfico 82">
-            <a:extLst>
-              <a:ext uri="{FF2B5EF4-FFF2-40B4-BE49-F238E27FC236}">
-                <a16:creationId xmlns:a16="http://schemas.microsoft.com/office/drawing/2014/main" id="{1F43E6A6-5CC3-9B99-14AC-997478150C3D}"/>
-              </a:ext>
-            </a:extLst>
-          </p:cNvPr>
-          <p:cNvPicPr>
-            <a:picLocks noChangeAspect="1"/>
-          </p:cNvPicPr>
-          <p:nvPr/>
-        </p:nvPicPr>
-        <p:blipFill>
-          <a:blip r:embed="rId3">
-            <a:extLst>
-              <a:ext uri="{96DAC541-7B7A-43D3-8B79-37D633B846F1}">
-                <asvg:svgBlip xmlns:asvg="http://schemas.microsoft.com/office/drawing/2016/SVG/main" r:embed="rId4"/>
-              </a:ext>
-            </a:extLst>
-          </a:blip>
-          <a:stretch>
-            <a:fillRect/>
-          </a:stretch>
-        </p:blipFill>
-        <p:spPr>
-          <a:xfrm>
-            <a:off x="5045006" y="6356057"/>
-            <a:ext cx="6409575" cy="363174"/>
-          </a:xfrm>
-          <a:prstGeom prst="rect">
-            <a:avLst/>
-          </a:prstGeom>
-        </p:spPr>
-      </p:pic>
-      <p:sp>
-        <p:nvSpPr>
-          <p:cNvPr id="84" name="Marcador de número de diapositiva 83">
-            <a:extLst>
-              <a:ext uri="{FF2B5EF4-FFF2-40B4-BE49-F238E27FC236}">
-                <a16:creationId xmlns:a16="http://schemas.microsoft.com/office/drawing/2014/main" id="{DFC09DB6-1DF7-C8F9-7414-27BC280DEA0F}"/>
-              </a:ext>
-            </a:extLst>
-          </p:cNvPr>
-          <p:cNvSpPr>
-            <a:spLocks noGrp="1"/>
-          </p:cNvSpPr>
-          <p:nvPr>
-            <p:ph type="sldNum" sz="quarter" idx="7"/>
-          </p:nvPr>
-        </p:nvSpPr>
-        <p:spPr/>
-        <p:txBody>
-          <a:bodyPr/>
-          <a:lstStyle/>
-          <a:p>
-            <a:fld id="{B6F15528-21DE-4FAA-801E-634DDDAF4B2B}" type="slidenum">
-              <a:rPr lang="es-ES" smtClean="0"/>
-              <a:t>8</a:t>
-            </a:fld>
-            <a:endParaRPr lang="es-ES"/>
-          </a:p>
-        </p:txBody>
-      </p:sp>
-      <p:sp>
-        <p:nvSpPr>
-          <p:cNvPr id="4" name="Marcador de texto 2">
-            <a:extLst>
-              <a:ext uri="{FF2B5EF4-FFF2-40B4-BE49-F238E27FC236}">
-                <a16:creationId xmlns:a16="http://schemas.microsoft.com/office/drawing/2014/main" id="{EBC8DCFA-5565-A757-1F8D-F4CCCF573A63}"/>
-              </a:ext>
-            </a:extLst>
-          </p:cNvPr>
-          <p:cNvSpPr txBox="1">
-            <a:spLocks/>
-          </p:cNvSpPr>
-          <p:nvPr/>
-        </p:nvSpPr>
-        <p:spPr>
-          <a:xfrm>
-            <a:off x="571500" y="1066800"/>
-            <a:ext cx="11048999" cy="4958137"/>
-          </a:xfrm>
-          <a:prstGeom prst="rect">
-            <a:avLst/>
-          </a:prstGeom>
-        </p:spPr>
-        <p:txBody>
-          <a:bodyPr>
-            <a:normAutofit/>
-          </a:bodyPr>
-          <a:lstStyle>
-            <a:lvl1pPr marL="0">
-              <a:defRPr>
-                <a:latin typeface="+mn-lt"/>
-                <a:ea typeface="+mn-ea"/>
-                <a:cs typeface="+mn-cs"/>
-              </a:defRPr>
-            </a:lvl1pPr>
-            <a:lvl2pPr marL="457200">
-              <a:defRPr>
-                <a:latin typeface="+mn-lt"/>
-                <a:ea typeface="+mn-ea"/>
-                <a:cs typeface="+mn-cs"/>
-              </a:defRPr>
-            </a:lvl2pPr>
-            <a:lvl3pPr marL="914400">
-              <a:defRPr>
-                <a:latin typeface="+mn-lt"/>
-                <a:ea typeface="+mn-ea"/>
-                <a:cs typeface="+mn-cs"/>
-              </a:defRPr>
-            </a:lvl3pPr>
-            <a:lvl4pPr marL="1371600">
-              <a:defRPr>
-                <a:latin typeface="+mn-lt"/>
-                <a:ea typeface="+mn-ea"/>
-                <a:cs typeface="+mn-cs"/>
-              </a:defRPr>
-            </a:lvl4pPr>
-            <a:lvl5pPr marL="1828800">
-              <a:defRPr>
-                <a:latin typeface="+mn-lt"/>
-                <a:ea typeface="+mn-ea"/>
-                <a:cs typeface="+mn-cs"/>
-              </a:defRPr>
-            </a:lvl5pPr>
-            <a:lvl6pPr marL="2286000">
-              <a:defRPr>
-                <a:latin typeface="+mn-lt"/>
-                <a:ea typeface="+mn-ea"/>
-                <a:cs typeface="+mn-cs"/>
-              </a:defRPr>
-            </a:lvl6pPr>
-            <a:lvl7pPr marL="2743200">
-              <a:defRPr>
-                <a:latin typeface="+mn-lt"/>
-                <a:ea typeface="+mn-ea"/>
-                <a:cs typeface="+mn-cs"/>
-              </a:defRPr>
-            </a:lvl7pPr>
-            <a:lvl8pPr marL="3200400">
-              <a:defRPr>
-                <a:latin typeface="+mn-lt"/>
-                <a:ea typeface="+mn-ea"/>
-                <a:cs typeface="+mn-cs"/>
-              </a:defRPr>
-            </a:lvl8pPr>
-            <a:lvl9pPr marL="3657600">
-              <a:defRPr>
-                <a:latin typeface="+mn-lt"/>
-                <a:ea typeface="+mn-ea"/>
-                <a:cs typeface="+mn-cs"/>
-              </a:defRPr>
-            </a:lvl9pPr>
-          </a:lstStyle>
-          <a:p>
-            <a:r>
-              <a:rPr lang="en-US" dirty="0"/>
-              <a:t>Now, we are going to implement the design parameters in the MZI model developed in SAX and compare the response obtained with the one simulated by mathematical formulation. This will help us to identify any error in the definition of the SAX model single components. </a:t>
-            </a:r>
-          </a:p>
-          <a:p>
-            <a:br>
-              <a:rPr lang="en-US" dirty="0"/>
-            </a:br>
-            <a:r>
-              <a:rPr lang="en-US" dirty="0"/>
-              <a:t>In order to implement the SAX model, take as example the following lines:</a:t>
-            </a:r>
-          </a:p>
-          <a:p>
-            <a:endParaRPr lang="en-US" dirty="0"/>
-          </a:p>
-          <a:p>
-            <a:pPr lvl="2">
-              <a:lnSpc>
-                <a:spcPts val="1425"/>
-              </a:lnSpc>
-            </a:pPr>
-            <a:r>
-              <a:rPr lang="es-ES" sz="1400" b="0" dirty="0">
-                <a:effectLst/>
-                <a:latin typeface="Courier New" panose="02070309020205020404" pitchFamily="49" charset="0"/>
-              </a:rPr>
-              <a:t> </a:t>
-            </a:r>
-            <a:r>
-              <a:rPr lang="es-ES" sz="1400" b="0" dirty="0" err="1">
-                <a:effectLst/>
-                <a:latin typeface="Courier New" panose="02070309020205020404" pitchFamily="49" charset="0"/>
-              </a:rPr>
-              <a:t>mzi_test</a:t>
-            </a:r>
-            <a:r>
-              <a:rPr lang="es-ES" sz="1400" b="0" dirty="0">
-                <a:effectLst/>
-                <a:latin typeface="Courier New" panose="02070309020205020404" pitchFamily="49" charset="0"/>
-              </a:rPr>
-              <a:t> = </a:t>
-            </a:r>
-            <a:r>
-              <a:rPr lang="es-ES" sz="1400" b="0" dirty="0" err="1">
-                <a:effectLst/>
-                <a:latin typeface="Courier New" panose="02070309020205020404" pitchFamily="49" charset="0"/>
-              </a:rPr>
-              <a:t>mzi</a:t>
-            </a:r>
-            <a:r>
-              <a:rPr lang="es-ES" sz="1400" b="0" dirty="0">
-                <a:effectLst/>
-                <a:latin typeface="Courier New" panose="02070309020205020404" pitchFamily="49" charset="0"/>
-              </a:rPr>
-              <a:t>(</a:t>
-            </a:r>
-            <a:r>
-              <a:rPr lang="es-ES" sz="1400" b="0" dirty="0" err="1">
-                <a:effectLst/>
-                <a:latin typeface="Courier New" panose="02070309020205020404" pitchFamily="49" charset="0"/>
-              </a:rPr>
-              <a:t>wl</a:t>
-            </a:r>
-            <a:r>
-              <a:rPr lang="es-ES" sz="1400" b="0" dirty="0">
-                <a:effectLst/>
-                <a:latin typeface="Courier New" panose="02070309020205020404" pitchFamily="49" charset="0"/>
-              </a:rPr>
-              <a:t>=</a:t>
-            </a:r>
-            <a:r>
-              <a:rPr lang="es-ES" sz="1400" b="0" dirty="0" err="1">
-                <a:effectLst/>
-                <a:latin typeface="Courier New" panose="02070309020205020404" pitchFamily="49" charset="0"/>
-              </a:rPr>
-              <a:t>wl</a:t>
-            </a:r>
-            <a:r>
-              <a:rPr lang="es-ES" sz="1400" b="0" dirty="0">
-                <a:effectLst/>
-                <a:latin typeface="Courier New" panose="02070309020205020404" pitchFamily="49" charset="0"/>
-              </a:rPr>
-              <a:t>, </a:t>
-            </a:r>
-          </a:p>
-          <a:p>
-            <a:pPr lvl="2">
-              <a:lnSpc>
-                <a:spcPts val="1425"/>
-              </a:lnSpc>
-            </a:pPr>
-            <a:r>
-              <a:rPr lang="es-ES" sz="1400" b="0" dirty="0">
-                <a:effectLst/>
-                <a:latin typeface="Courier New" panose="02070309020205020404" pitchFamily="49" charset="0"/>
-              </a:rPr>
-              <a:t>    </a:t>
-            </a:r>
-            <a:r>
-              <a:rPr lang="es-ES" sz="1400" b="0" dirty="0" err="1">
-                <a:effectLst/>
-                <a:latin typeface="Courier New" panose="02070309020205020404" pitchFamily="49" charset="0"/>
-              </a:rPr>
-              <a:t>coup_a</a:t>
-            </a:r>
-            <a:r>
-              <a:rPr lang="es-ES" sz="1400" b="0" dirty="0">
-                <a:effectLst/>
-                <a:latin typeface="Courier New" panose="02070309020205020404" pitchFamily="49" charset="0"/>
-              </a:rPr>
-              <a:t> = ...</a:t>
-            </a:r>
-          </a:p>
-          <a:p>
-            <a:pPr lvl="2">
-              <a:lnSpc>
-                <a:spcPts val="1425"/>
-              </a:lnSpc>
-            </a:pPr>
-            <a:r>
-              <a:rPr lang="es-ES" sz="1400" b="0" dirty="0">
-                <a:effectLst/>
-                <a:latin typeface="Courier New" panose="02070309020205020404" pitchFamily="49" charset="0"/>
-              </a:rPr>
-              <a:t>    </a:t>
-            </a:r>
-            <a:r>
-              <a:rPr lang="es-ES" sz="1400" b="0" dirty="0" err="1">
-                <a:effectLst/>
-                <a:latin typeface="Courier New" panose="02070309020205020404" pitchFamily="49" charset="0"/>
-              </a:rPr>
-              <a:t>wvg_d</a:t>
-            </a:r>
-            <a:r>
-              <a:rPr lang="es-ES" sz="1400" b="0" dirty="0">
-                <a:effectLst/>
-                <a:latin typeface="Courier New" panose="02070309020205020404" pitchFamily="49" charset="0"/>
-              </a:rPr>
-              <a:t>={"</a:t>
-            </a:r>
-            <a:r>
-              <a:rPr lang="es-ES" sz="1400" b="0" dirty="0" err="1">
-                <a:effectLst/>
-                <a:latin typeface="Courier New" panose="02070309020205020404" pitchFamily="49" charset="0"/>
-              </a:rPr>
-              <a:t>length</a:t>
-            </a:r>
-            <a:r>
-              <a:rPr lang="es-ES" sz="1400" b="0" dirty="0">
-                <a:effectLst/>
-                <a:latin typeface="Courier New" panose="02070309020205020404" pitchFamily="49" charset="0"/>
-              </a:rPr>
-              <a:t>": </a:t>
-            </a:r>
-            <a:r>
-              <a:rPr lang="es-ES" sz="1400" b="0" dirty="0" err="1">
-                <a:effectLst/>
-                <a:latin typeface="Courier New" panose="02070309020205020404" pitchFamily="49" charset="0"/>
-              </a:rPr>
-              <a:t>l_d</a:t>
-            </a:r>
-            <a:r>
-              <a:rPr lang="es-ES" sz="1400" b="0" dirty="0">
-                <a:effectLst/>
-                <a:latin typeface="Courier New" panose="02070309020205020404" pitchFamily="49" charset="0"/>
-              </a:rPr>
-              <a:t>, "</a:t>
-            </a:r>
-            <a:r>
-              <a:rPr lang="es-ES" sz="1400" b="0" dirty="0" err="1">
-                <a:effectLst/>
-                <a:latin typeface="Courier New" panose="02070309020205020404" pitchFamily="49" charset="0"/>
-              </a:rPr>
-              <a:t>neff</a:t>
-            </a:r>
-            <a:r>
-              <a:rPr lang="es-ES" sz="1400" b="0" dirty="0">
-                <a:effectLst/>
-                <a:latin typeface="Courier New" panose="02070309020205020404" pitchFamily="49" charset="0"/>
-              </a:rPr>
-              <a:t>": ...}, </a:t>
-            </a:r>
-          </a:p>
-          <a:p>
-            <a:pPr lvl="2">
-              <a:lnSpc>
-                <a:spcPts val="1425"/>
-              </a:lnSpc>
-            </a:pPr>
-            <a:r>
-              <a:rPr lang="es-ES" sz="1400" b="0" dirty="0">
-                <a:effectLst/>
-                <a:latin typeface="Courier New" panose="02070309020205020404" pitchFamily="49" charset="0"/>
-              </a:rPr>
-              <a:t>    </a:t>
-            </a:r>
-            <a:r>
-              <a:rPr lang="es-ES" sz="1400" b="0" dirty="0" err="1">
-                <a:effectLst/>
-                <a:latin typeface="Courier New" panose="02070309020205020404" pitchFamily="49" charset="0"/>
-              </a:rPr>
-              <a:t>wvg_u</a:t>
-            </a:r>
-            <a:r>
-              <a:rPr lang="es-ES" sz="1400" b="0" dirty="0">
-                <a:effectLst/>
-                <a:latin typeface="Courier New" panose="02070309020205020404" pitchFamily="49" charset="0"/>
-              </a:rPr>
-              <a:t>={"</a:t>
-            </a:r>
-            <a:r>
-              <a:rPr lang="es-ES" sz="1400" b="0" dirty="0" err="1">
-                <a:effectLst/>
-                <a:latin typeface="Courier New" panose="02070309020205020404" pitchFamily="49" charset="0"/>
-              </a:rPr>
-              <a:t>length</a:t>
-            </a:r>
-            <a:r>
-              <a:rPr lang="es-ES" sz="1400" b="0" dirty="0">
-                <a:effectLst/>
-                <a:latin typeface="Courier New" panose="02070309020205020404" pitchFamily="49" charset="0"/>
-              </a:rPr>
-              <a:t>": </a:t>
-            </a:r>
-            <a:r>
-              <a:rPr lang="es-ES" sz="1400" b="0" dirty="0" err="1">
-                <a:effectLst/>
-                <a:latin typeface="Courier New" panose="02070309020205020404" pitchFamily="49" charset="0"/>
-              </a:rPr>
-              <a:t>l_u</a:t>
-            </a:r>
-            <a:r>
-              <a:rPr lang="es-ES" sz="1400" b="0" dirty="0">
-                <a:effectLst/>
-                <a:latin typeface="Courier New" panose="02070309020205020404" pitchFamily="49" charset="0"/>
-              </a:rPr>
-              <a:t>, "</a:t>
-            </a:r>
-            <a:r>
-              <a:rPr lang="es-ES" sz="1400" b="0" dirty="0" err="1">
-                <a:effectLst/>
-                <a:latin typeface="Courier New" panose="02070309020205020404" pitchFamily="49" charset="0"/>
-              </a:rPr>
-              <a:t>neff</a:t>
-            </a:r>
-            <a:r>
-              <a:rPr lang="es-ES" sz="1400" b="0" dirty="0">
-                <a:effectLst/>
-                <a:latin typeface="Courier New" panose="02070309020205020404" pitchFamily="49" charset="0"/>
-              </a:rPr>
-              <a:t>": ...},</a:t>
-            </a:r>
-          </a:p>
-          <a:p>
-            <a:pPr lvl="2">
-              <a:lnSpc>
-                <a:spcPts val="1425"/>
-              </a:lnSpc>
-            </a:pPr>
-            <a:r>
-              <a:rPr lang="es-ES" sz="1400" b="0" dirty="0">
-                <a:effectLst/>
-                <a:latin typeface="Courier New" panose="02070309020205020404" pitchFamily="49" charset="0"/>
-              </a:rPr>
-              <a:t>    </a:t>
-            </a:r>
-            <a:r>
-              <a:rPr lang="es-ES" sz="1400" b="0" dirty="0" err="1">
-                <a:effectLst/>
-                <a:latin typeface="Courier New" panose="02070309020205020404" pitchFamily="49" charset="0"/>
-              </a:rPr>
-              <a:t>coup_b</a:t>
-            </a:r>
-            <a:r>
-              <a:rPr lang="es-ES" sz="1400" b="0" dirty="0">
-                <a:effectLst/>
-                <a:latin typeface="Courier New" panose="02070309020205020404" pitchFamily="49" charset="0"/>
-              </a:rPr>
-              <a:t> = ... )</a:t>
-            </a:r>
-          </a:p>
-          <a:p>
-            <a:pPr lvl="2">
-              <a:lnSpc>
-                <a:spcPts val="1425"/>
-              </a:lnSpc>
-            </a:pPr>
-            <a:br>
-              <a:rPr lang="es-ES" sz="1400" b="0" dirty="0">
-                <a:effectLst/>
-                <a:latin typeface="Courier New" panose="02070309020205020404" pitchFamily="49" charset="0"/>
-              </a:rPr>
-            </a:br>
-            <a:r>
-              <a:rPr lang="es-ES" sz="1400" b="0" dirty="0">
-                <a:effectLst/>
-                <a:latin typeface="Courier New" panose="02070309020205020404" pitchFamily="49" charset="0"/>
-              </a:rPr>
-              <a:t>    H00 = </a:t>
-            </a:r>
-            <a:r>
-              <a:rPr lang="es-ES" sz="1400" b="0" dirty="0" err="1">
-                <a:effectLst/>
-                <a:latin typeface="Courier New" panose="02070309020205020404" pitchFamily="49" charset="0"/>
-              </a:rPr>
-              <a:t>mzi_test</a:t>
-            </a:r>
-            <a:r>
-              <a:rPr lang="es-ES" sz="1400" b="0" dirty="0">
-                <a:effectLst/>
-                <a:latin typeface="Courier New" panose="02070309020205020404" pitchFamily="49" charset="0"/>
-              </a:rPr>
-              <a:t>["in0", "out0"]</a:t>
-            </a:r>
-          </a:p>
-          <a:p>
-            <a:endParaRPr lang="en-US" sz="2000" dirty="0"/>
-          </a:p>
-          <a:p>
-            <a:pPr algn="just"/>
-            <a:endParaRPr lang="en-US" sz="2000" dirty="0"/>
-          </a:p>
-          <a:p>
-            <a:pPr algn="just"/>
-            <a:endParaRPr lang="en-US" sz="2000" b="1" i="1" dirty="0"/>
-          </a:p>
-          <a:p>
-            <a:pPr algn="just"/>
-            <a:endParaRPr lang="en-US" sz="2000" kern="0" dirty="0">
-              <a:solidFill>
-                <a:sysClr val="windowText" lastClr="000000"/>
-              </a:solidFill>
-            </a:endParaRPr>
-          </a:p>
-          <a:p>
-            <a:endParaRPr lang="en-US" sz="2000" kern="0" dirty="0">
-              <a:solidFill>
-                <a:sysClr val="windowText" lastClr="000000"/>
-              </a:solidFill>
-            </a:endParaRPr>
-          </a:p>
-        </p:txBody>
-      </p:sp>
-      <p:sp>
-        <p:nvSpPr>
-          <p:cNvPr id="2" name="CuadroTexto 1">
-            <a:extLst>
-              <a:ext uri="{FF2B5EF4-FFF2-40B4-BE49-F238E27FC236}">
-                <a16:creationId xmlns:a16="http://schemas.microsoft.com/office/drawing/2014/main" id="{CA4A2D6E-5993-52B3-D251-1ADF2B0C8355}"/>
-              </a:ext>
-            </a:extLst>
-          </p:cNvPr>
-          <p:cNvSpPr txBox="1"/>
-          <p:nvPr/>
-        </p:nvSpPr>
-        <p:spPr>
-          <a:xfrm>
-            <a:off x="609441" y="4860334"/>
-            <a:ext cx="11199971" cy="1384995"/>
-          </a:xfrm>
-          <a:prstGeom prst="rect">
-            <a:avLst/>
-          </a:prstGeom>
-          <a:solidFill>
-            <a:schemeClr val="bg1">
-              <a:lumMod val="95000"/>
-            </a:schemeClr>
-          </a:solidFill>
+          <a:noFill/>
           <a:ln w="28575">
             <a:solidFill>
               <a:srgbClr val="E0700D"/>
             </a:solidFill>
           </a:ln>
         </p:spPr>
-        <p:txBody>
-          <a:bodyPr wrap="square" rtlCol="0">
-            <a:spAutoFit/>
-          </a:bodyPr>
+        <p:style>
+          <a:lnRef idx="2">
+            <a:schemeClr val="accent1">
+              <a:shade val="15000"/>
+            </a:schemeClr>
+          </a:lnRef>
+          <a:fillRef idx="1">
+            <a:schemeClr val="accent1"/>
+          </a:fillRef>
+          <a:effectRef idx="0">
+            <a:schemeClr val="accent1"/>
+          </a:effectRef>
+          <a:fontRef idx="minor">
+            <a:schemeClr val="lt1"/>
+          </a:fontRef>
+        </p:style>
+        <p:txBody>
+          <a:bodyPr rtlCol="0" anchor="ctr"/>
           <a:lstStyle/>
           <a:p>
-            <a:pPr algn="just"/>
-            <a:r>
-              <a:rPr lang="en-US" sz="1200" dirty="0">
-                <a:latin typeface="Arial" panose="020B0604020202020204" pitchFamily="34" charset="0"/>
-                <a:cs typeface="Arial" panose="020B0604020202020204" pitchFamily="34" charset="0"/>
-              </a:rPr>
-              <a:t>Document all your results (copy here the code employed to obtain the transfer function employing SAX modeling and include the comparative plot of the models)</a:t>
-            </a:r>
-          </a:p>
-          <a:p>
-            <a:pPr algn="just"/>
-            <a:endParaRPr lang="en-US" sz="1200" dirty="0">
-              <a:latin typeface="Arial" panose="020B0604020202020204" pitchFamily="34" charset="0"/>
-              <a:cs typeface="Arial" panose="020B0604020202020204" pitchFamily="34" charset="0"/>
-            </a:endParaRPr>
-          </a:p>
-          <a:p>
-            <a:pPr algn="just"/>
-            <a:endParaRPr lang="en-US" sz="1200" dirty="0">
-              <a:latin typeface="Arial" panose="020B0604020202020204" pitchFamily="34" charset="0"/>
-              <a:cs typeface="Arial" panose="020B0604020202020204" pitchFamily="34" charset="0"/>
-            </a:endParaRPr>
-          </a:p>
-          <a:p>
-            <a:pPr algn="just"/>
-            <a:endParaRPr lang="en-US" sz="1200" dirty="0">
-              <a:latin typeface="Arial" panose="020B0604020202020204" pitchFamily="34" charset="0"/>
-              <a:cs typeface="Arial" panose="020B0604020202020204" pitchFamily="34" charset="0"/>
-            </a:endParaRPr>
-          </a:p>
-          <a:p>
-            <a:pPr algn="just"/>
-            <a:endParaRPr lang="en-US" sz="1200" dirty="0">
-              <a:latin typeface="Arial" panose="020B0604020202020204" pitchFamily="34" charset="0"/>
-              <a:cs typeface="Arial" panose="020B0604020202020204" pitchFamily="34" charset="0"/>
-            </a:endParaRPr>
-          </a:p>
-          <a:p>
-            <a:pPr algn="just"/>
-            <a:endParaRPr lang="en-US" sz="1200" dirty="0">
-              <a:latin typeface="Arial" panose="020B0604020202020204" pitchFamily="34" charset="0"/>
-              <a:cs typeface="Arial" panose="020B0604020202020204" pitchFamily="34" charset="0"/>
-            </a:endParaRPr>
-          </a:p>
-          <a:p>
-            <a:pPr algn="just"/>
-            <a:endParaRPr lang="en-US" sz="1200" dirty="0">
-              <a:latin typeface="Arial" panose="020B0604020202020204" pitchFamily="34" charset="0"/>
-              <a:cs typeface="Arial" panose="020B0604020202020204" pitchFamily="34" charset="0"/>
-            </a:endParaRPr>
-          </a:p>
-        </p:txBody>
-      </p:sp>
-      <p:sp>
-        <p:nvSpPr>
-          <p:cNvPr id="5" name="Marcador de pie de página 2">
+            <a:pPr algn="ctr"/>
+            <a:endParaRPr lang="en-US"/>
+          </a:p>
+        </p:txBody>
+      </p:sp>
+      <p:sp>
+        <p:nvSpPr>
+          <p:cNvPr id="8" name="Rectangle: Rounded Corners 7">
             <a:extLst>
               <a:ext uri="{FF2B5EF4-FFF2-40B4-BE49-F238E27FC236}">
-                <a16:creationId xmlns:a16="http://schemas.microsoft.com/office/drawing/2014/main" id="{ED97C9D0-256C-D4CA-42E7-79330F040B30}"/>
+                <a16:creationId xmlns:a16="http://schemas.microsoft.com/office/drawing/2014/main" id="{88CC3078-17ED-0CD4-C174-9D126BB74995}"/>
               </a:ext>
             </a:extLst>
           </p:cNvPr>
-          <p:cNvSpPr>
-            <a:spLocks noGrp="1"/>
-          </p:cNvSpPr>
-          <p:nvPr>
-            <p:ph type="ftr" sz="quarter" idx="5"/>
-          </p:nvPr>
+          <p:cNvSpPr/>
+          <p:nvPr/>
         </p:nvSpPr>
         <p:spPr>
           <a:xfrm>
-            <a:off x="609600" y="6457057"/>
-            <a:ext cx="2743200" cy="184666"/>
+            <a:off x="8491959" y="2781677"/>
+            <a:ext cx="1752600" cy="304800"/>
           </a:xfrm>
+          <a:prstGeom prst="roundRect">
+            <a:avLst/>
+          </a:prstGeom>
+          <a:solidFill>
+            <a:srgbClr val="FFD8B7"/>
+          </a:solidFill>
         </p:spPr>
-        <p:txBody>
-          <a:bodyPr/>
+        <p:style>
+          <a:lnRef idx="2">
+            <a:schemeClr val="accent6"/>
+          </a:lnRef>
+          <a:fillRef idx="1">
+            <a:schemeClr val="lt1"/>
+          </a:fillRef>
+          <a:effectRef idx="0">
+            <a:schemeClr val="accent6"/>
+          </a:effectRef>
+          <a:fontRef idx="minor">
+            <a:schemeClr val="dk1"/>
+          </a:fontRef>
+        </p:style>
+        <p:txBody>
+          <a:bodyPr rtlCol="0" anchor="ctr"/>
           <a:lstStyle/>
           <a:p>
-            <a:pPr marL="12700">
-              <a:spcBef>
-                <a:spcPts val="15"/>
-              </a:spcBef>
-            </a:pPr>
-            <a:r>
-              <a:rPr lang="es-ES" spc="-5"/>
-              <a:t>LAB 3. INTERFEROMETERS I</a:t>
-            </a:r>
-            <a:endParaRPr lang="es-ES" spc="-5" dirty="0"/>
+            <a:pPr algn="ctr"/>
+            <a:r>
+              <a:rPr lang="es-MX" dirty="0"/>
+              <a:t>20 nm</a:t>
+            </a:r>
+            <a:endParaRPr lang="en-US" dirty="0"/>
+          </a:p>
+        </p:txBody>
+      </p:sp>
+      <p:sp>
+        <p:nvSpPr>
+          <p:cNvPr id="9" name="Rectangle: Rounded Corners 8">
+            <a:extLst>
+              <a:ext uri="{FF2B5EF4-FFF2-40B4-BE49-F238E27FC236}">
+                <a16:creationId xmlns:a16="http://schemas.microsoft.com/office/drawing/2014/main" id="{C91381C0-41A3-8958-AF1D-0242CE59BFBC}"/>
+              </a:ext>
+            </a:extLst>
+          </p:cNvPr>
+          <p:cNvSpPr/>
+          <p:nvPr/>
+        </p:nvSpPr>
+        <p:spPr>
+          <a:xfrm>
+            <a:off x="8491959" y="5197655"/>
+            <a:ext cx="3585842" cy="304800"/>
+          </a:xfrm>
+          <a:prstGeom prst="roundRect">
+            <a:avLst/>
+          </a:prstGeom>
+          <a:solidFill>
+            <a:srgbClr val="FFD8B7"/>
+          </a:solidFill>
+        </p:spPr>
+        <p:style>
+          <a:lnRef idx="2">
+            <a:schemeClr val="accent6"/>
+          </a:lnRef>
+          <a:fillRef idx="1">
+            <a:schemeClr val="lt1"/>
+          </a:fillRef>
+          <a:effectRef idx="0">
+            <a:schemeClr val="accent6"/>
+          </a:effectRef>
+          <a:fontRef idx="minor">
+            <a:schemeClr val="dk1"/>
+          </a:fontRef>
+        </p:style>
+        <p:txBody>
+          <a:bodyPr rtlCol="0" anchor="ctr"/>
+          <a:lstStyle/>
+          <a:p>
+            <a:pPr algn="ctr"/>
+            <a:r>
+              <a:rPr lang="es-MX" dirty="0"/>
+              <a:t>40 nm </a:t>
+            </a:r>
+            <a:r>
+              <a:rPr lang="es-MX" dirty="0" err="1"/>
+              <a:t>for</a:t>
+            </a:r>
+            <a:r>
+              <a:rPr lang="es-MX" dirty="0"/>
+              <a:t> </a:t>
+            </a:r>
+            <a:r>
+              <a:rPr lang="es-MX" dirty="0" err="1"/>
+              <a:t>next</a:t>
+            </a:r>
+            <a:r>
+              <a:rPr lang="es-MX" dirty="0"/>
+              <a:t> </a:t>
+            </a:r>
+            <a:r>
+              <a:rPr lang="es-MX" dirty="0" err="1"/>
+              <a:t>peak</a:t>
+            </a:r>
+            <a:endParaRPr lang="en-US" dirty="0"/>
           </a:p>
         </p:txBody>
       </p:sp>
     </p:spTree>
     <p:extLst>
       <p:ext uri="{BB962C8B-B14F-4D97-AF65-F5344CB8AC3E}">
-        <p14:creationId xmlns:p14="http://schemas.microsoft.com/office/powerpoint/2010/main" val="3666436811"/>
-      </p:ext>
-    </p:extLst>
-  </p:cSld>
-  <p:clrMapOvr>
-    <a:masterClrMapping/>
-  </p:clrMapOvr>
-</p:sld>
-</file>
-
-<file path=ppt/slides/slide9.xml><?xml version="1.0" encoding="utf-8"?>
-<p:sld xmlns:a="http://schemas.openxmlformats.org/drawingml/2006/main" xmlns:r="http://schemas.openxmlformats.org/officeDocument/2006/relationships" xmlns:p="http://schemas.openxmlformats.org/presentationml/2006/main">
-  <p:cSld>
-    <p:spTree>
-      <p:nvGrpSpPr>
-        <p:cNvPr id="1" name="">
-          <a:extLst>
-            <a:ext uri="{FF2B5EF4-FFF2-40B4-BE49-F238E27FC236}">
-              <a16:creationId xmlns:a16="http://schemas.microsoft.com/office/drawing/2014/main" id="{25434E70-43B1-3881-1771-20FB4358471D}"/>
-            </a:ext>
-          </a:extLst>
-        </p:cNvPr>
-        <p:cNvGrpSpPr/>
-        <p:nvPr/>
-      </p:nvGrpSpPr>
-      <p:grpSpPr>
-        <a:xfrm>
-          <a:off x="0" y="0"/>
-          <a:ext cx="0" cy="0"/>
-          <a:chOff x="0" y="0"/>
-          <a:chExt cx="0" cy="0"/>
-        </a:xfrm>
-      </p:grpSpPr>
-      <p:sp>
-        <p:nvSpPr>
-          <p:cNvPr id="16" name="object 16">
-            <a:extLst>
-              <a:ext uri="{FF2B5EF4-FFF2-40B4-BE49-F238E27FC236}">
-                <a16:creationId xmlns:a16="http://schemas.microsoft.com/office/drawing/2014/main" id="{742C31CE-19F0-B995-0997-9A2D6A879BF7}"/>
-              </a:ext>
-            </a:extLst>
-          </p:cNvPr>
-          <p:cNvSpPr txBox="1">
-            <a:spLocks noGrp="1"/>
-          </p:cNvSpPr>
-          <p:nvPr>
-            <p:ph type="title"/>
-          </p:nvPr>
-        </p:nvSpPr>
-        <p:spPr>
-          <a:xfrm>
-            <a:off x="685800" y="408883"/>
-            <a:ext cx="10994410" cy="397545"/>
-          </a:xfrm>
-          <a:prstGeom prst="rect">
-            <a:avLst/>
-          </a:prstGeom>
-        </p:spPr>
-        <p:txBody>
-          <a:bodyPr vert="horz" wrap="square" lIns="0" tIns="12700" rIns="0" bIns="0" rtlCol="0">
-            <a:spAutoFit/>
-          </a:bodyPr>
-          <a:lstStyle/>
-          <a:p>
-            <a:pPr marL="12700">
-              <a:lnSpc>
-                <a:spcPct val="100000"/>
-              </a:lnSpc>
-              <a:spcBef>
-                <a:spcPts val="100"/>
-              </a:spcBef>
-            </a:pPr>
-            <a:r>
-              <a:rPr lang="en-US" sz="2500" dirty="0"/>
-              <a:t>Extra assessments </a:t>
-            </a:r>
-            <a:endParaRPr lang="en-US" sz="2500" b="0" dirty="0">
-              <a:latin typeface="+mj-lt"/>
-              <a:cs typeface="Lucida Sans"/>
-            </a:endParaRPr>
-          </a:p>
-        </p:txBody>
-      </p:sp>
-      <p:pic>
-        <p:nvPicPr>
-          <p:cNvPr id="83" name="Gráfico 82">
-            <a:extLst>
-              <a:ext uri="{FF2B5EF4-FFF2-40B4-BE49-F238E27FC236}">
-                <a16:creationId xmlns:a16="http://schemas.microsoft.com/office/drawing/2014/main" id="{D688A609-F3DC-EE34-C536-683E70F32EAE}"/>
-              </a:ext>
-            </a:extLst>
-          </p:cNvPr>
-          <p:cNvPicPr>
-            <a:picLocks noChangeAspect="1"/>
-          </p:cNvPicPr>
-          <p:nvPr/>
-        </p:nvPicPr>
-        <p:blipFill>
-          <a:blip r:embed="rId3">
-            <a:extLst>
-              <a:ext uri="{96DAC541-7B7A-43D3-8B79-37D633B846F1}">
-                <asvg:svgBlip xmlns:asvg="http://schemas.microsoft.com/office/drawing/2016/SVG/main" r:embed="rId4"/>
-              </a:ext>
-            </a:extLst>
-          </a:blip>
-          <a:stretch>
-            <a:fillRect/>
-          </a:stretch>
-        </p:blipFill>
-        <p:spPr>
-          <a:xfrm>
-            <a:off x="5045006" y="6356057"/>
-            <a:ext cx="6409575" cy="363174"/>
-          </a:xfrm>
-          <a:prstGeom prst="rect">
-            <a:avLst/>
-          </a:prstGeom>
-        </p:spPr>
-      </p:pic>
-      <p:sp>
-        <p:nvSpPr>
-          <p:cNvPr id="84" name="Marcador de número de diapositiva 83">
-            <a:extLst>
-              <a:ext uri="{FF2B5EF4-FFF2-40B4-BE49-F238E27FC236}">
-                <a16:creationId xmlns:a16="http://schemas.microsoft.com/office/drawing/2014/main" id="{B6C672C6-89D4-7E67-2B94-811D081786A7}"/>
-              </a:ext>
-            </a:extLst>
-          </p:cNvPr>
-          <p:cNvSpPr>
-            <a:spLocks noGrp="1"/>
-          </p:cNvSpPr>
-          <p:nvPr>
-            <p:ph type="sldNum" sz="quarter" idx="7"/>
-          </p:nvPr>
-        </p:nvSpPr>
-        <p:spPr/>
-        <p:txBody>
-          <a:bodyPr/>
-          <a:lstStyle/>
-          <a:p>
-            <a:fld id="{B6F15528-21DE-4FAA-801E-634DDDAF4B2B}" type="slidenum">
-              <a:rPr lang="es-ES" smtClean="0"/>
-              <a:t>9</a:t>
-            </a:fld>
-            <a:endParaRPr lang="es-ES"/>
-          </a:p>
-        </p:txBody>
-      </p:sp>
-      <p:sp>
-        <p:nvSpPr>
-          <p:cNvPr id="4" name="Marcador de texto 2">
-            <a:extLst>
-              <a:ext uri="{FF2B5EF4-FFF2-40B4-BE49-F238E27FC236}">
-                <a16:creationId xmlns:a16="http://schemas.microsoft.com/office/drawing/2014/main" id="{D838A93A-BFC8-0124-93CE-FDC193435A0C}"/>
-              </a:ext>
-            </a:extLst>
-          </p:cNvPr>
-          <p:cNvSpPr txBox="1">
-            <a:spLocks/>
-          </p:cNvSpPr>
-          <p:nvPr/>
-        </p:nvSpPr>
-        <p:spPr>
-          <a:xfrm>
-            <a:off x="608012" y="1295400"/>
-            <a:ext cx="11048999" cy="4958137"/>
-          </a:xfrm>
-          <a:prstGeom prst="rect">
-            <a:avLst/>
-          </a:prstGeom>
-        </p:spPr>
-        <p:txBody>
-          <a:bodyPr>
-            <a:normAutofit/>
-          </a:bodyPr>
-          <a:lstStyle>
-            <a:lvl1pPr marL="0">
-              <a:defRPr>
-                <a:latin typeface="+mn-lt"/>
-                <a:ea typeface="+mn-ea"/>
-                <a:cs typeface="+mn-cs"/>
-              </a:defRPr>
-            </a:lvl1pPr>
-            <a:lvl2pPr marL="457200">
-              <a:defRPr>
-                <a:latin typeface="+mn-lt"/>
-                <a:ea typeface="+mn-ea"/>
-                <a:cs typeface="+mn-cs"/>
-              </a:defRPr>
-            </a:lvl2pPr>
-            <a:lvl3pPr marL="914400">
-              <a:defRPr>
-                <a:latin typeface="+mn-lt"/>
-                <a:ea typeface="+mn-ea"/>
-                <a:cs typeface="+mn-cs"/>
-              </a:defRPr>
-            </a:lvl3pPr>
-            <a:lvl4pPr marL="1371600">
-              <a:defRPr>
-                <a:latin typeface="+mn-lt"/>
-                <a:ea typeface="+mn-ea"/>
-                <a:cs typeface="+mn-cs"/>
-              </a:defRPr>
-            </a:lvl4pPr>
-            <a:lvl5pPr marL="1828800">
-              <a:defRPr>
-                <a:latin typeface="+mn-lt"/>
-                <a:ea typeface="+mn-ea"/>
-                <a:cs typeface="+mn-cs"/>
-              </a:defRPr>
-            </a:lvl5pPr>
-            <a:lvl6pPr marL="2286000">
-              <a:defRPr>
-                <a:latin typeface="+mn-lt"/>
-                <a:ea typeface="+mn-ea"/>
-                <a:cs typeface="+mn-cs"/>
-              </a:defRPr>
-            </a:lvl6pPr>
-            <a:lvl7pPr marL="2743200">
-              <a:defRPr>
-                <a:latin typeface="+mn-lt"/>
-                <a:ea typeface="+mn-ea"/>
-                <a:cs typeface="+mn-cs"/>
-              </a:defRPr>
-            </a:lvl7pPr>
-            <a:lvl8pPr marL="3200400">
-              <a:defRPr>
-                <a:latin typeface="+mn-lt"/>
-                <a:ea typeface="+mn-ea"/>
-                <a:cs typeface="+mn-cs"/>
-              </a:defRPr>
-            </a:lvl8pPr>
-            <a:lvl9pPr marL="3657600">
-              <a:defRPr>
-                <a:latin typeface="+mn-lt"/>
-                <a:ea typeface="+mn-ea"/>
-                <a:cs typeface="+mn-cs"/>
-              </a:defRPr>
-            </a:lvl9pPr>
-          </a:lstStyle>
-          <a:p>
-            <a:pPr marL="0" indent="0">
-              <a:buNone/>
-            </a:pPr>
-            <a:r>
-              <a:rPr lang="en-US" b="1" dirty="0"/>
-              <a:t>Assessment 4</a:t>
-            </a:r>
-            <a:r>
-              <a:rPr lang="en-US" dirty="0"/>
-              <a:t>. Design an MZI for filtering at a specific wavelength. Calculate and adjust the arm lengths to configure the MZI to have a maximum transmission at 1550 nm.</a:t>
-            </a:r>
-          </a:p>
-          <a:p>
-            <a:endParaRPr lang="en-US" b="1" dirty="0"/>
-          </a:p>
-          <a:p>
-            <a:r>
-              <a:rPr lang="en-US" b="1" dirty="0"/>
-              <a:t>Assessment 5. </a:t>
-            </a:r>
-            <a:r>
-              <a:rPr lang="en-US" dirty="0"/>
-              <a:t>Let's see how the response of the MZI varies with the effective index. Vary the effective index of one of the arms and analyze how the spectrum shifts. To do this, you can use the data provided in the .txt files entitled ‘</a:t>
-            </a:r>
-            <a:r>
-              <a:rPr lang="en-US" dirty="0" err="1"/>
-              <a:t>SiN</a:t>
-            </a:r>
-            <a:r>
-              <a:rPr lang="en-US" dirty="0"/>
-              <a:t>’. Can you give an example of an application where this configuration is used?</a:t>
-            </a:r>
-          </a:p>
-          <a:p>
-            <a:pPr marL="0" indent="0">
-              <a:buNone/>
-            </a:pPr>
-            <a:endParaRPr lang="en-US" dirty="0"/>
-          </a:p>
-          <a:p>
-            <a:r>
-              <a:rPr lang="en-US" b="1" dirty="0"/>
-              <a:t>Advanced level assessment.</a:t>
-            </a:r>
-            <a:r>
-              <a:rPr lang="en-US" dirty="0"/>
-              <a:t> Explore how cascading two MZIs affects the transmission spectrum. To do so, design a system in which two MZIs are cascaded. Simulate and observe the spectrum, explaining how the transmission peaks behave</a:t>
-            </a:r>
-            <a:r>
-              <a:rPr lang="en-US" b="1" dirty="0"/>
-              <a:t>.</a:t>
-            </a:r>
-          </a:p>
-          <a:p>
-            <a:pPr algn="just"/>
-            <a:endParaRPr lang="en-US" sz="2000" kern="0" dirty="0">
-              <a:solidFill>
-                <a:sysClr val="windowText" lastClr="000000"/>
-              </a:solidFill>
-            </a:endParaRPr>
-          </a:p>
-        </p:txBody>
-      </p:sp>
-      <p:sp>
-        <p:nvSpPr>
-          <p:cNvPr id="2" name="CuadroTexto 1">
-            <a:extLst>
-              <a:ext uri="{FF2B5EF4-FFF2-40B4-BE49-F238E27FC236}">
-                <a16:creationId xmlns:a16="http://schemas.microsoft.com/office/drawing/2014/main" id="{FDE3A197-9508-F9F1-1FEB-FF883D78C151}"/>
-              </a:ext>
-            </a:extLst>
-          </p:cNvPr>
-          <p:cNvSpPr txBox="1"/>
-          <p:nvPr/>
-        </p:nvSpPr>
-        <p:spPr>
-          <a:xfrm>
-            <a:off x="609441" y="4860334"/>
-            <a:ext cx="11199971" cy="1200329"/>
-          </a:xfrm>
-          <a:prstGeom prst="rect">
-            <a:avLst/>
-          </a:prstGeom>
-          <a:solidFill>
-            <a:schemeClr val="bg1">
-              <a:lumMod val="95000"/>
-            </a:schemeClr>
-          </a:solidFill>
-          <a:ln w="28575">
-            <a:solidFill>
-              <a:srgbClr val="E0700D"/>
-            </a:solidFill>
-          </a:ln>
-        </p:spPr>
-        <p:txBody>
-          <a:bodyPr wrap="square" rtlCol="0">
-            <a:spAutoFit/>
-          </a:bodyPr>
-          <a:lstStyle/>
-          <a:p>
-            <a:pPr algn="just"/>
-            <a:r>
-              <a:rPr lang="en-US" sz="1200" dirty="0">
-                <a:latin typeface="Arial" panose="020B0604020202020204" pitchFamily="34" charset="0"/>
-                <a:cs typeface="Arial" panose="020B0604020202020204" pitchFamily="34" charset="0"/>
-              </a:rPr>
-              <a:t>Document all your results</a:t>
-            </a:r>
-          </a:p>
-          <a:p>
-            <a:pPr algn="just"/>
-            <a:endParaRPr lang="en-US" sz="1200" dirty="0">
-              <a:latin typeface="Arial" panose="020B0604020202020204" pitchFamily="34" charset="0"/>
-              <a:cs typeface="Arial" panose="020B0604020202020204" pitchFamily="34" charset="0"/>
-            </a:endParaRPr>
-          </a:p>
-          <a:p>
-            <a:pPr algn="just"/>
-            <a:endParaRPr lang="en-US" sz="1200" dirty="0">
-              <a:latin typeface="Arial" panose="020B0604020202020204" pitchFamily="34" charset="0"/>
-              <a:cs typeface="Arial" panose="020B0604020202020204" pitchFamily="34" charset="0"/>
-            </a:endParaRPr>
-          </a:p>
-          <a:p>
-            <a:pPr algn="just"/>
-            <a:endParaRPr lang="en-US" sz="1200" dirty="0">
-              <a:latin typeface="Arial" panose="020B0604020202020204" pitchFamily="34" charset="0"/>
-              <a:cs typeface="Arial" panose="020B0604020202020204" pitchFamily="34" charset="0"/>
-            </a:endParaRPr>
-          </a:p>
-          <a:p>
-            <a:pPr algn="just"/>
-            <a:endParaRPr lang="en-US" sz="1200" dirty="0">
-              <a:latin typeface="Arial" panose="020B0604020202020204" pitchFamily="34" charset="0"/>
-              <a:cs typeface="Arial" panose="020B0604020202020204" pitchFamily="34" charset="0"/>
-            </a:endParaRPr>
-          </a:p>
-          <a:p>
-            <a:pPr algn="just"/>
-            <a:endParaRPr lang="en-US" sz="1200" dirty="0">
-              <a:latin typeface="Arial" panose="020B0604020202020204" pitchFamily="34" charset="0"/>
-              <a:cs typeface="Arial" panose="020B0604020202020204" pitchFamily="34" charset="0"/>
-            </a:endParaRPr>
-          </a:p>
-        </p:txBody>
-      </p:sp>
-      <p:sp>
-        <p:nvSpPr>
-          <p:cNvPr id="6" name="Marcador de pie de página 2">
-            <a:extLst>
-              <a:ext uri="{FF2B5EF4-FFF2-40B4-BE49-F238E27FC236}">
-                <a16:creationId xmlns:a16="http://schemas.microsoft.com/office/drawing/2014/main" id="{04C1A7E9-6C33-172D-E7B9-CCF643221E6A}"/>
-              </a:ext>
-            </a:extLst>
-          </p:cNvPr>
-          <p:cNvSpPr>
-            <a:spLocks noGrp="1"/>
-          </p:cNvSpPr>
-          <p:nvPr>
-            <p:ph type="ftr" sz="quarter" idx="5"/>
-          </p:nvPr>
-        </p:nvSpPr>
-        <p:spPr>
-          <a:xfrm>
-            <a:off x="609600" y="6457057"/>
-            <a:ext cx="2743200" cy="184666"/>
-          </a:xfrm>
-        </p:spPr>
-        <p:txBody>
-          <a:bodyPr/>
-          <a:lstStyle/>
-          <a:p>
-            <a:pPr marL="12700">
-              <a:spcBef>
-                <a:spcPts val="15"/>
-              </a:spcBef>
-            </a:pPr>
-            <a:r>
-              <a:rPr lang="es-ES" spc="-5"/>
-              <a:t>LAB 3. INTERFEROMETERS I</a:t>
-            </a:r>
-            <a:endParaRPr lang="es-ES" spc="-5" dirty="0"/>
-          </a:p>
-        </p:txBody>
-      </p:sp>
-    </p:spTree>
-    <p:extLst>
-      <p:ext uri="{BB962C8B-B14F-4D97-AF65-F5344CB8AC3E}">
-        <p14:creationId xmlns:p14="http://schemas.microsoft.com/office/powerpoint/2010/main" val="3660438245"/>
+        <p14:creationId xmlns:p14="http://schemas.microsoft.com/office/powerpoint/2010/main" val="2337098194"/>
       </p:ext>
     </p:extLst>
   </p:cSld>
